--- a/Intro/RISCV-MCU.pptx
+++ b/Intro/RISCV-MCU.pptx
@@ -13,7 +13,7 @@
     <p:sldMasterId id="2147483668" r:id="rId9"/>
   </p:sldMasterIdLst>
   <p:notesMasterIdLst>
-    <p:notesMasterId r:id="rId20"/>
+    <p:notesMasterId r:id="rId22"/>
   </p:notesMasterIdLst>
   <p:sldIdLst>
     <p:sldId id="256" r:id="rId10"/>
@@ -25,7 +25,9 @@
     <p:sldId id="273" r:id="rId16"/>
     <p:sldId id="275" r:id="rId17"/>
     <p:sldId id="263" r:id="rId18"/>
-    <p:sldId id="264" r:id="rId19"/>
+    <p:sldId id="280" r:id="rId19"/>
+    <p:sldId id="281" r:id="rId20"/>
+    <p:sldId id="264" r:id="rId21"/>
   </p:sldIdLst>
   <p:sldSz cx="12192000" cy="6858000"/>
   <p:notesSz cx="6858000" cy="9144000"/>
@@ -734,6 +736,2015 @@
 </p:notes>
 </file>
 
+<file path=ppt/notesSlides/notesSlide2.xml><?xml version="1.0" encoding="utf-8"?>
+<p:notes xmlns:a="http://schemas.openxmlformats.org/drawingml/2006/main" xmlns:r="http://schemas.openxmlformats.org/officeDocument/2006/relationships" xmlns:p="http://schemas.openxmlformats.org/presentationml/2006/main">
+  <p:cSld>
+    <p:spTree>
+      <p:nvGrpSpPr>
+        <p:cNvPr id="1" name=""/>
+        <p:cNvGrpSpPr/>
+        <p:nvPr/>
+      </p:nvGrpSpPr>
+      <p:grpSpPr>
+        <a:xfrm>
+          <a:off x="0" y="0"/>
+          <a:ext cx="0" cy="0"/>
+          <a:chOff x="0" y="0"/>
+          <a:chExt cx="0" cy="0"/>
+        </a:xfrm>
+      </p:grpSpPr>
+      <p:sp>
+        <p:nvSpPr>
+          <p:cNvPr id="2" name="投影片影像版面配置區 1"/>
+          <p:cNvSpPr>
+            <a:spLocks noGrp="1" noRot="1" noChangeAspect="1"/>
+          </p:cNvSpPr>
+          <p:nvPr>
+            <p:ph type="sldImg"/>
+          </p:nvPr>
+        </p:nvSpPr>
+        <p:spPr>
+          <a:xfrm>
+            <a:off x="217488" y="812800"/>
+            <a:ext cx="7124700" cy="4008438"/>
+          </a:xfrm>
+        </p:spPr>
+      </p:sp>
+      <mc:AlternateContent xmlns:mc="http://schemas.openxmlformats.org/markup-compatibility/2006">
+        <mc:Choice xmlns:a14="http://schemas.microsoft.com/office/drawing/2010/main" Requires="a14">
+          <p:sp>
+            <p:nvSpPr>
+              <p:cNvPr id="3" name="備忘稿版面配置區 2"/>
+              <p:cNvSpPr>
+                <a:spLocks noGrp="1"/>
+              </p:cNvSpPr>
+              <p:nvPr>
+                <p:ph type="body" idx="1"/>
+              </p:nvPr>
+            </p:nvSpPr>
+            <p:spPr/>
+            <p:txBody>
+              <a:bodyPr/>
+              <a:lstStyle/>
+              <a:p>
+                <a:pPr rtl="0"/>
+                <a:r>
+                  <a:rPr lang="en-US" altLang="zh-TW" sz="1200" b="0" i="0" u="none" strike="noStrike" kern="1200" dirty="0">
+                    <a:solidFill>
+                      <a:schemeClr val="tx1"/>
+                    </a:solidFill>
+                    <a:effectLst/>
+                    <a:latin typeface="+mn-lt"/>
+                    <a:ea typeface="+mn-ea"/>
+                    <a:cs typeface="+mn-cs"/>
+                  </a:rPr>
+                  <a:t>1.  </a:t>
+                </a:r>
+                <a:r>
+                  <a:rPr lang="zh-TW" altLang="en-US" sz="1200" b="0" i="0" u="none" strike="noStrike" kern="1200" dirty="0">
+                    <a:solidFill>
+                      <a:schemeClr val="tx1"/>
+                    </a:solidFill>
+                    <a:effectLst/>
+                    <a:latin typeface="+mn-lt"/>
+                    <a:ea typeface="+mn-ea"/>
+                    <a:cs typeface="+mn-cs"/>
+                  </a:rPr>
+                  <a:t>降壓分壓：</a:t>
+                </a:r>
+                <a:r>
+                  <a:rPr lang="en-US" altLang="zh-TW" sz="1200" b="0" i="0" u="none" strike="noStrike" kern="1200" dirty="0">
+                    <a:solidFill>
+                      <a:schemeClr val="tx1"/>
+                    </a:solidFill>
+                    <a:effectLst/>
+                    <a:latin typeface="+mn-lt"/>
+                    <a:ea typeface="+mn-ea"/>
+                    <a:cs typeface="+mn-cs"/>
+                  </a:rPr>
+                  <a:t>2.32kΩ </a:t>
+                </a:r>
+                <a:r>
+                  <a:rPr lang="zh-TW" altLang="en-US" sz="1200" b="0" i="0" u="none" strike="noStrike" kern="1200" dirty="0">
+                    <a:solidFill>
+                      <a:schemeClr val="tx1"/>
+                    </a:solidFill>
+                    <a:effectLst/>
+                    <a:latin typeface="+mn-lt"/>
+                    <a:ea typeface="+mn-ea"/>
+                    <a:cs typeface="+mn-cs"/>
+                  </a:rPr>
+                  <a:t>與 </a:t>
+                </a:r>
+                <a:r>
+                  <a:rPr lang="en-US" altLang="zh-TW" sz="1200" b="0" i="0" u="none" strike="noStrike" kern="1200" dirty="0">
+                    <a:solidFill>
+                      <a:schemeClr val="tx1"/>
+                    </a:solidFill>
+                    <a:effectLst/>
+                    <a:latin typeface="+mn-lt"/>
+                    <a:ea typeface="+mn-ea"/>
+                    <a:cs typeface="+mn-cs"/>
+                  </a:rPr>
+                  <a:t>1kΩ </a:t>
+                </a:r>
+                <a:r>
+                  <a:rPr lang="zh-TW" altLang="en-US" sz="1200" b="0" i="0" u="none" strike="noStrike" kern="1200" dirty="0">
+                    <a:solidFill>
+                      <a:schemeClr val="tx1"/>
+                    </a:solidFill>
+                    <a:effectLst/>
+                    <a:latin typeface="+mn-lt"/>
+                    <a:ea typeface="+mn-ea"/>
+                    <a:cs typeface="+mn-cs"/>
+                  </a:rPr>
+                  <a:t>電阻負責將外部訊號（如 </a:t>
+                </a:r>
+                <a:r>
+                  <a:rPr lang="en-US" altLang="zh-TW" sz="1200" b="0" i="0" u="none" strike="noStrike" kern="1200" dirty="0">
+                    <a:solidFill>
+                      <a:schemeClr val="tx1"/>
+                    </a:solidFill>
+                    <a:effectLst/>
+                    <a:latin typeface="+mn-lt"/>
+                    <a:ea typeface="+mn-ea"/>
+                    <a:cs typeface="+mn-cs"/>
+                  </a:rPr>
+                  <a:t>3.3V</a:t>
+                </a:r>
+                <a:r>
+                  <a:rPr lang="zh-TW" altLang="en-US" sz="1200" b="0" i="0" u="none" strike="noStrike" kern="1200" dirty="0">
+                    <a:solidFill>
+                      <a:schemeClr val="tx1"/>
+                    </a:solidFill>
+                    <a:effectLst/>
+                    <a:latin typeface="+mn-lt"/>
+                    <a:ea typeface="+mn-ea"/>
+                    <a:cs typeface="+mn-cs"/>
+                  </a:rPr>
+                  <a:t>）按比例縮小至 </a:t>
+                </a:r>
+                <a:r>
+                  <a:rPr lang="en-US" altLang="zh-TW" sz="1200" b="0" i="0" u="none" strike="noStrike" kern="1200" dirty="0">
+                    <a:solidFill>
+                      <a:schemeClr val="tx1"/>
+                    </a:solidFill>
+                    <a:effectLst/>
+                    <a:latin typeface="+mn-lt"/>
+                    <a:ea typeface="+mn-ea"/>
+                    <a:cs typeface="+mn-cs"/>
+                  </a:rPr>
+                  <a:t>XADC </a:t>
+                </a:r>
+                <a:r>
+                  <a:rPr lang="zh-TW" altLang="en-US" sz="1200" b="0" i="0" u="none" strike="noStrike" kern="1200" dirty="0">
+                    <a:solidFill>
+                      <a:schemeClr val="tx1"/>
+                    </a:solidFill>
+                    <a:effectLst/>
+                    <a:latin typeface="+mn-lt"/>
+                    <a:ea typeface="+mn-ea"/>
+                    <a:cs typeface="+mn-cs"/>
+                  </a:rPr>
+                  <a:t>安全可測的 </a:t>
+                </a:r>
+                <a:r>
+                  <a:rPr lang="en-US" altLang="zh-TW" sz="1200" b="0" i="0" u="none" strike="noStrike" kern="1200" dirty="0">
+                    <a:solidFill>
+                      <a:schemeClr val="tx1"/>
+                    </a:solidFill>
+                    <a:effectLst/>
+                    <a:latin typeface="+mn-lt"/>
+                    <a:ea typeface="+mn-ea"/>
+                    <a:cs typeface="+mn-cs"/>
+                  </a:rPr>
+                  <a:t>0~1V </a:t>
+                </a:r>
+                <a:r>
+                  <a:rPr lang="zh-TW" altLang="en-US" sz="1200" b="0" i="0" u="none" strike="noStrike" kern="1200" dirty="0">
+                    <a:solidFill>
+                      <a:schemeClr val="tx1"/>
+                    </a:solidFill>
+                    <a:effectLst/>
+                    <a:latin typeface="+mn-lt"/>
+                    <a:ea typeface="+mn-ea"/>
+                    <a:cs typeface="+mn-cs"/>
+                  </a:rPr>
+                  <a:t>範圍。</a:t>
+                </a:r>
+                <a:endParaRPr lang="zh-TW" altLang="en-US" dirty="0">
+                  <a:effectLst/>
+                </a:endParaRPr>
+              </a:p>
+              <a:p>
+                <a:pPr rtl="0"/>
+                <a:r>
+                  <a:rPr lang="en-US" altLang="zh-TW" sz="1200" b="0" i="0" u="none" strike="noStrike" kern="1200" dirty="0">
+                    <a:solidFill>
+                      <a:schemeClr val="tx1"/>
+                    </a:solidFill>
+                    <a:effectLst/>
+                    <a:latin typeface="+mn-lt"/>
+                    <a:ea typeface="+mn-ea"/>
+                    <a:cs typeface="+mn-cs"/>
+                  </a:rPr>
+                  <a:t>2.  </a:t>
+                </a:r>
+                <a:r>
+                  <a:rPr lang="zh-TW" altLang="en-US" sz="1200" b="0" i="0" u="none" strike="noStrike" kern="1200" dirty="0">
+                    <a:solidFill>
+                      <a:schemeClr val="tx1"/>
+                    </a:solidFill>
+                    <a:effectLst/>
+                    <a:latin typeface="+mn-lt"/>
+                    <a:ea typeface="+mn-ea"/>
+                    <a:cs typeface="+mn-cs"/>
+                  </a:rPr>
+                  <a:t>戴維寧等效電阻 </a:t>
+                </a:r>
+                <a:r>
+                  <a:rPr lang="en-US" altLang="zh-TW" sz="1200" b="0" i="0" u="none" strike="noStrike" kern="1200" dirty="0">
+                    <a:solidFill>
+                      <a:schemeClr val="tx1"/>
+                    </a:solidFill>
+                    <a:effectLst/>
+                    <a:latin typeface="+mn-lt"/>
+                    <a:ea typeface="+mn-ea"/>
+                    <a:cs typeface="+mn-cs"/>
+                  </a:rPr>
+                  <a:t>(</a:t>
+                </a:r>
+                <a:r>
+                  <a:rPr lang="en-US" altLang="zh-TW" sz="1200" b="0" i="0" u="none" strike="noStrike" kern="1200" dirty="0" err="1">
+                    <a:solidFill>
+                      <a:schemeClr val="tx1"/>
+                    </a:solidFill>
+                    <a:effectLst/>
+                    <a:latin typeface="+mn-lt"/>
+                    <a:ea typeface="+mn-ea"/>
+                    <a:cs typeface="+mn-cs"/>
+                  </a:rPr>
+                  <a:t>ADx_P</a:t>
+                </a:r>
+                <a:r>
+                  <a:rPr lang="en-US" altLang="zh-TW" sz="1200" b="0" i="0" u="none" strike="noStrike" kern="1200" dirty="0">
+                    <a:solidFill>
+                      <a:schemeClr val="tx1"/>
+                    </a:solidFill>
+                    <a:effectLst/>
+                    <a:latin typeface="+mn-lt"/>
+                    <a:ea typeface="+mn-ea"/>
+                    <a:cs typeface="+mn-cs"/>
+                  </a:rPr>
+                  <a:t>)</a:t>
+                </a:r>
+                <a:r>
+                  <a:rPr lang="zh-TW" altLang="en-US" sz="1200" b="0" i="0" u="none" strike="noStrike" kern="1200" dirty="0">
+                    <a:solidFill>
+                      <a:schemeClr val="tx1"/>
+                    </a:solidFill>
+                    <a:effectLst/>
+                    <a:latin typeface="+mn-lt"/>
+                    <a:ea typeface="+mn-ea"/>
+                    <a:cs typeface="+mn-cs"/>
+                  </a:rPr>
+                  <a:t>：將電源短路接地後，分壓電阻視為並聯。</a:t>
+                </a:r>
+                <a:r>
+                  <a:rPr lang="en-US" altLang="zh-TW" sz="1200" b="0" i="0" u="none" strike="noStrike" kern="1200" dirty="0" err="1">
+                    <a:solidFill>
+                      <a:schemeClr val="tx1"/>
+                    </a:solidFill>
+                    <a:effectLst/>
+                    <a:latin typeface="+mn-lt"/>
+                    <a:ea typeface="+mn-ea"/>
+                    <a:cs typeface="+mn-cs"/>
+                  </a:rPr>
+                  <a:t>ADx_P</a:t>
+                </a:r>
+                <a:r>
+                  <a:rPr lang="en-US" altLang="zh-TW" sz="1200" b="0" i="0" u="none" strike="noStrike" kern="1200" dirty="0">
+                    <a:solidFill>
+                      <a:schemeClr val="tx1"/>
+                    </a:solidFill>
+                    <a:effectLst/>
+                    <a:latin typeface="+mn-lt"/>
+                    <a:ea typeface="+mn-ea"/>
+                    <a:cs typeface="+mn-cs"/>
+                  </a:rPr>
+                  <a:t> </a:t>
+                </a:r>
+                <a:r>
+                  <a:rPr lang="zh-TW" altLang="en-US" sz="1200" b="0" i="0" u="none" strike="noStrike" kern="1200" dirty="0">
+                    <a:solidFill>
+                      <a:schemeClr val="tx1"/>
+                    </a:solidFill>
+                    <a:effectLst/>
+                    <a:latin typeface="+mn-lt"/>
+                    <a:ea typeface="+mn-ea"/>
+                    <a:cs typeface="+mn-cs"/>
+                  </a:rPr>
+                  <a:t>端看出去的等效阻抗為 </a:t>
+                </a:r>
+                <a:r>
+                  <a:rPr lang="en-US" altLang="zh-TW" sz="1200" b="0" i="0" u="none" strike="noStrike" kern="1200" dirty="0">
+                    <a:solidFill>
+                      <a:schemeClr val="tx1"/>
+                    </a:solidFill>
+                    <a:effectLst/>
+                    <a:latin typeface="+mn-lt"/>
+                    <a:ea typeface="+mn-ea"/>
+                    <a:cs typeface="+mn-cs"/>
+                  </a:rPr>
+                  <a:t>(2.32kΩ // 1kΩ) + 140Ω ≈ 838Ω</a:t>
+                </a:r>
+                <a:r>
+                  <a:rPr lang="zh-TW" altLang="en-US" sz="1200" b="0" i="0" u="none" strike="noStrike" kern="1200" dirty="0">
+                    <a:solidFill>
+                      <a:schemeClr val="tx1"/>
+                    </a:solidFill>
+                    <a:effectLst/>
+                    <a:latin typeface="+mn-lt"/>
+                    <a:ea typeface="+mn-ea"/>
+                    <a:cs typeface="+mn-cs"/>
+                  </a:rPr>
+                  <a:t>。</a:t>
+                </a:r>
+                <a:endParaRPr lang="en-US" altLang="zh-TW" sz="1200" b="0" i="0" u="none" strike="noStrike" kern="1200" dirty="0">
+                  <a:solidFill>
+                    <a:schemeClr val="tx1"/>
+                  </a:solidFill>
+                  <a:effectLst/>
+                  <a:latin typeface="+mn-lt"/>
+                  <a:ea typeface="+mn-ea"/>
+                  <a:cs typeface="+mn-cs"/>
+                </a:endParaRPr>
+              </a:p>
+              <a:p>
+                <a:pPr rtl="0"/>
+                <a:r>
+                  <a:rPr lang="en-US" altLang="zh-TW" sz="1200" b="0" i="0" u="none" strike="noStrike" kern="1200" dirty="0">
+                    <a:solidFill>
+                      <a:schemeClr val="tx1"/>
+                    </a:solidFill>
+                    <a:effectLst/>
+                    <a:latin typeface="+mn-lt"/>
+                    <a:ea typeface="+mn-ea"/>
+                    <a:cs typeface="+mn-cs"/>
+                  </a:rPr>
+                  <a:t>	</a:t>
+                </a:r>
+                <a:r>
+                  <a:rPr lang="en-US" altLang="zh-TW" sz="1200" b="0" i="0" u="none" strike="noStrike" kern="1200" dirty="0" err="1">
+                    <a:solidFill>
+                      <a:schemeClr val="tx1"/>
+                    </a:solidFill>
+                    <a:effectLst/>
+                    <a:latin typeface="+mn-lt"/>
+                    <a:ea typeface="+mn-ea"/>
+                    <a:cs typeface="+mn-cs"/>
+                  </a:rPr>
+                  <a:t>Adx_N</a:t>
+                </a:r>
+                <a:r>
+                  <a:rPr lang="en-US" altLang="zh-TW" sz="1200" b="0" i="0" u="none" strike="noStrike" kern="1200" dirty="0">
+                    <a:solidFill>
+                      <a:schemeClr val="tx1"/>
+                    </a:solidFill>
+                    <a:effectLst/>
+                    <a:latin typeface="+mn-lt"/>
+                    <a:ea typeface="+mn-ea"/>
+                    <a:cs typeface="+mn-cs"/>
+                  </a:rPr>
+                  <a:t> </a:t>
+                </a:r>
+                <a:r>
+                  <a:rPr lang="zh-TW" altLang="en-US" sz="1200" b="0" i="0" u="none" strike="noStrike" kern="1200" dirty="0">
+                    <a:solidFill>
+                      <a:schemeClr val="tx1"/>
+                    </a:solidFill>
+                    <a:effectLst/>
+                    <a:latin typeface="+mn-lt"/>
+                    <a:ea typeface="+mn-ea"/>
+                    <a:cs typeface="+mn-cs"/>
+                  </a:rPr>
+                  <a:t>則為</a:t>
+                </a:r>
+                <a:r>
+                  <a:rPr lang="en-US" altLang="zh-TW" sz="1200" b="0" i="0" u="none" strike="noStrike" kern="1200" dirty="0">
+                    <a:solidFill>
+                      <a:schemeClr val="tx1"/>
+                    </a:solidFill>
+                    <a:effectLst/>
+                    <a:latin typeface="+mn-lt"/>
+                    <a:ea typeface="+mn-ea"/>
+                    <a:cs typeface="+mn-cs"/>
+                  </a:rPr>
+                  <a:t>845</a:t>
+                </a:r>
+                <a:r>
+                  <a:rPr lang="zh-TW" altLang="en-US" sz="1200" b="0" i="0" u="none" strike="noStrike" kern="1200" dirty="0">
+                    <a:solidFill>
+                      <a:schemeClr val="tx1"/>
+                    </a:solidFill>
+                    <a:effectLst/>
+                    <a:latin typeface="+mn-lt"/>
+                    <a:ea typeface="+mn-ea"/>
+                    <a:cs typeface="+mn-cs"/>
+                  </a:rPr>
+                  <a:t>直接接地</a:t>
+                </a:r>
+                <a:endParaRPr lang="zh-TW" altLang="en-US" dirty="0">
+                  <a:effectLst/>
+                </a:endParaRPr>
+              </a:p>
+              <a:p>
+                <a:pPr rtl="0"/>
+                <a:r>
+                  <a:rPr lang="en-US" altLang="zh-TW" sz="1200" b="0" i="0" u="none" strike="noStrike" kern="1200" dirty="0">
+                    <a:solidFill>
+                      <a:schemeClr val="tx1"/>
+                    </a:solidFill>
+                    <a:effectLst/>
+                    <a:latin typeface="+mn-lt"/>
+                    <a:ea typeface="+mn-ea"/>
+                    <a:cs typeface="+mn-cs"/>
+                  </a:rPr>
+                  <a:t>3.  </a:t>
+                </a:r>
+                <a:r>
+                  <a:rPr lang="zh-TW" altLang="en-US" sz="1200" b="0" i="0" u="none" strike="noStrike" kern="1200" dirty="0">
+                    <a:solidFill>
+                      <a:schemeClr val="tx1"/>
+                    </a:solidFill>
+                    <a:effectLst/>
+                    <a:latin typeface="+mn-lt"/>
+                    <a:ea typeface="+mn-ea"/>
+                    <a:cs typeface="+mn-cs"/>
+                  </a:rPr>
+                  <a:t>阻抗匹配 </a:t>
+                </a:r>
+                <a:r>
+                  <a:rPr lang="en-US" altLang="zh-TW" sz="1200" b="0" i="0" u="none" strike="noStrike" kern="1200" dirty="0">
+                    <a:solidFill>
+                      <a:schemeClr val="tx1"/>
+                    </a:solidFill>
+                    <a:effectLst/>
+                    <a:latin typeface="+mn-lt"/>
+                    <a:ea typeface="+mn-ea"/>
+                    <a:cs typeface="+mn-cs"/>
+                  </a:rPr>
+                  <a:t>(</a:t>
+                </a:r>
+                <a:r>
+                  <a:rPr lang="en-US" altLang="zh-TW" sz="1200" b="0" i="0" u="none" strike="noStrike" kern="1200" dirty="0" err="1">
+                    <a:solidFill>
+                      <a:schemeClr val="tx1"/>
+                    </a:solidFill>
+                    <a:effectLst/>
+                    <a:latin typeface="+mn-lt"/>
+                    <a:ea typeface="+mn-ea"/>
+                    <a:cs typeface="+mn-cs"/>
+                  </a:rPr>
+                  <a:t>ADx_N</a:t>
+                </a:r>
+                <a:r>
+                  <a:rPr lang="en-US" altLang="zh-TW" sz="1200" b="0" i="0" u="none" strike="noStrike" kern="1200" dirty="0">
+                    <a:solidFill>
+                      <a:schemeClr val="tx1"/>
+                    </a:solidFill>
+                    <a:effectLst/>
+                    <a:latin typeface="+mn-lt"/>
+                    <a:ea typeface="+mn-ea"/>
+                    <a:cs typeface="+mn-cs"/>
+                  </a:rPr>
+                  <a:t>)</a:t>
+                </a:r>
+                <a:r>
+                  <a:rPr lang="zh-TW" altLang="en-US" sz="1200" b="0" i="0" u="none" strike="noStrike" kern="1200" dirty="0">
+                    <a:solidFill>
+                      <a:schemeClr val="tx1"/>
+                    </a:solidFill>
+                    <a:effectLst/>
+                    <a:latin typeface="+mn-lt"/>
+                    <a:ea typeface="+mn-ea"/>
+                    <a:cs typeface="+mn-cs"/>
+                  </a:rPr>
+                  <a:t>：</a:t>
+                </a:r>
+                <a:r>
+                  <a:rPr lang="en-US" altLang="zh-TW" sz="1200" b="0" i="0" u="none" strike="noStrike" kern="1200" dirty="0" err="1">
+                    <a:solidFill>
+                      <a:schemeClr val="tx1"/>
+                    </a:solidFill>
+                    <a:effectLst/>
+                    <a:latin typeface="+mn-lt"/>
+                    <a:ea typeface="+mn-ea"/>
+                    <a:cs typeface="+mn-cs"/>
+                  </a:rPr>
+                  <a:t>ADx_N</a:t>
+                </a:r>
+                <a:r>
+                  <a:rPr lang="en-US" altLang="zh-TW" sz="1200" b="0" i="0" u="none" strike="noStrike" kern="1200" dirty="0">
+                    <a:solidFill>
+                      <a:schemeClr val="tx1"/>
+                    </a:solidFill>
+                    <a:effectLst/>
+                    <a:latin typeface="+mn-lt"/>
+                    <a:ea typeface="+mn-ea"/>
+                    <a:cs typeface="+mn-cs"/>
+                  </a:rPr>
+                  <a:t> </a:t>
+                </a:r>
+                <a:r>
+                  <a:rPr lang="zh-TW" altLang="en-US" sz="1200" b="0" i="0" u="none" strike="noStrike" kern="1200" dirty="0">
+                    <a:solidFill>
+                      <a:schemeClr val="tx1"/>
+                    </a:solidFill>
+                    <a:effectLst/>
+                    <a:latin typeface="+mn-lt"/>
+                    <a:ea typeface="+mn-ea"/>
+                    <a:cs typeface="+mn-cs"/>
+                  </a:rPr>
+                  <a:t>端直接串聯 </a:t>
+                </a:r>
+                <a:r>
+                  <a:rPr lang="en-US" altLang="zh-TW" sz="1200" b="0" i="0" u="none" strike="noStrike" kern="1200" dirty="0">
+                    <a:solidFill>
+                      <a:schemeClr val="tx1"/>
+                    </a:solidFill>
+                    <a:effectLst/>
+                    <a:latin typeface="+mn-lt"/>
+                    <a:ea typeface="+mn-ea"/>
+                    <a:cs typeface="+mn-cs"/>
+                  </a:rPr>
+                  <a:t>845Ω </a:t>
+                </a:r>
+                <a:r>
+                  <a:rPr lang="zh-TW" altLang="en-US" sz="1200" b="0" i="0" u="none" strike="noStrike" kern="1200" dirty="0">
+                    <a:solidFill>
+                      <a:schemeClr val="tx1"/>
+                    </a:solidFill>
+                    <a:effectLst/>
+                    <a:latin typeface="+mn-lt"/>
+                    <a:ea typeface="+mn-ea"/>
+                    <a:cs typeface="+mn-cs"/>
+                  </a:rPr>
+                  <a:t>電阻接地，目的是與 </a:t>
+                </a:r>
+                <a:r>
+                  <a:rPr lang="en-US" altLang="zh-TW" sz="1200" b="0" i="0" u="none" strike="noStrike" kern="1200" dirty="0" err="1">
+                    <a:solidFill>
+                      <a:schemeClr val="tx1"/>
+                    </a:solidFill>
+                    <a:effectLst/>
+                    <a:latin typeface="+mn-lt"/>
+                    <a:ea typeface="+mn-ea"/>
+                    <a:cs typeface="+mn-cs"/>
+                  </a:rPr>
+                  <a:t>ADx_P</a:t>
+                </a:r>
+                <a:r>
+                  <a:rPr lang="en-US" altLang="zh-TW" sz="1200" b="0" i="0" u="none" strike="noStrike" kern="1200" dirty="0">
+                    <a:solidFill>
+                      <a:schemeClr val="tx1"/>
+                    </a:solidFill>
+                    <a:effectLst/>
+                    <a:latin typeface="+mn-lt"/>
+                    <a:ea typeface="+mn-ea"/>
+                    <a:cs typeface="+mn-cs"/>
+                  </a:rPr>
+                  <a:t> </a:t>
+                </a:r>
+                <a:r>
+                  <a:rPr lang="zh-TW" altLang="en-US" sz="1200" b="0" i="0" u="none" strike="noStrike" kern="1200" dirty="0">
+                    <a:solidFill>
+                      <a:schemeClr val="tx1"/>
+                    </a:solidFill>
+                    <a:effectLst/>
+                    <a:latin typeface="+mn-lt"/>
+                    <a:ea typeface="+mn-ea"/>
+                    <a:cs typeface="+mn-cs"/>
+                  </a:rPr>
+                  <a:t>端的 </a:t>
+                </a:r>
+                <a:r>
+                  <a:rPr lang="en-US" altLang="zh-TW" sz="1200" b="0" i="0" u="none" strike="noStrike" kern="1200" dirty="0">
+                    <a:solidFill>
+                      <a:schemeClr val="tx1"/>
+                    </a:solidFill>
+                    <a:effectLst/>
+                    <a:latin typeface="+mn-lt"/>
+                    <a:ea typeface="+mn-ea"/>
+                    <a:cs typeface="+mn-cs"/>
+                  </a:rPr>
+                  <a:t>838Ω </a:t>
+                </a:r>
+                <a:r>
+                  <a:rPr lang="zh-TW" altLang="en-US" sz="1200" b="0" i="0" u="none" strike="noStrike" kern="1200" dirty="0">
+                    <a:solidFill>
+                      <a:schemeClr val="tx1"/>
+                    </a:solidFill>
+                    <a:effectLst/>
+                    <a:latin typeface="+mn-lt"/>
+                    <a:ea typeface="+mn-ea"/>
+                    <a:cs typeface="+mn-cs"/>
+                  </a:rPr>
+                  <a:t>達成極度接近的阻抗匹配。</a:t>
+                </a:r>
+                <a:endParaRPr lang="zh-TW" altLang="en-US" dirty="0">
+                  <a:effectLst/>
+                </a:endParaRPr>
+              </a:p>
+              <a:p>
+                <a:pPr rtl="0"/>
+                <a:r>
+                  <a:rPr lang="en-US" altLang="zh-TW" sz="1200" b="0" i="0" u="none" strike="noStrike" kern="1200" dirty="0">
+                    <a:solidFill>
+                      <a:schemeClr val="tx1"/>
+                    </a:solidFill>
+                    <a:effectLst/>
+                    <a:latin typeface="+mn-lt"/>
+                    <a:ea typeface="+mn-ea"/>
+                    <a:cs typeface="+mn-cs"/>
+                  </a:rPr>
+                  <a:t>4.  </a:t>
+                </a:r>
+                <a:r>
+                  <a:rPr lang="zh-TW" altLang="en-US" sz="1200" b="0" i="0" u="none" strike="noStrike" kern="1200" dirty="0">
+                    <a:solidFill>
+                      <a:schemeClr val="tx1"/>
+                    </a:solidFill>
+                    <a:effectLst/>
+                    <a:latin typeface="+mn-lt"/>
+                    <a:ea typeface="+mn-ea"/>
+                    <a:cs typeface="+mn-cs"/>
+                  </a:rPr>
+                  <a:t>核心目的：兩端阻抗平衡可以完美抵銷 </a:t>
+                </a:r>
+                <a:r>
+                  <a:rPr lang="en-US" altLang="zh-TW" sz="1200" b="0" i="0" u="none" strike="noStrike" kern="1200" dirty="0">
+                    <a:solidFill>
+                      <a:schemeClr val="tx1"/>
+                    </a:solidFill>
+                    <a:effectLst/>
+                    <a:latin typeface="+mn-lt"/>
+                    <a:ea typeface="+mn-ea"/>
+                    <a:cs typeface="+mn-cs"/>
+                  </a:rPr>
+                  <a:t>ADC </a:t>
+                </a:r>
+                <a:r>
+                  <a:rPr lang="zh-TW" altLang="en-US" sz="1200" b="0" i="0" u="none" strike="noStrike" kern="1200" dirty="0">
+                    <a:solidFill>
+                      <a:schemeClr val="tx1"/>
+                    </a:solidFill>
+                    <a:effectLst/>
+                    <a:latin typeface="+mn-lt"/>
+                    <a:ea typeface="+mn-ea"/>
+                    <a:cs typeface="+mn-cs"/>
+                  </a:rPr>
+                  <a:t>內部直流偏置電流（</a:t>
+                </a:r>
+                <a:r>
+                  <a:rPr lang="en-US" altLang="zh-TW" sz="1200" b="0" i="0" u="none" strike="noStrike" kern="1200" dirty="0">
+                    <a:solidFill>
+                      <a:schemeClr val="tx1"/>
+                    </a:solidFill>
+                    <a:effectLst/>
+                    <a:latin typeface="+mn-lt"/>
+                    <a:ea typeface="+mn-ea"/>
+                    <a:cs typeface="+mn-cs"/>
+                  </a:rPr>
+                  <a:t>DC Bias Current</a:t>
+                </a:r>
+                <a:r>
+                  <a:rPr lang="zh-TW" altLang="en-US" sz="1200" b="0" i="0" u="none" strike="noStrike" kern="1200" dirty="0">
+                    <a:solidFill>
+                      <a:schemeClr val="tx1"/>
+                    </a:solidFill>
+                    <a:effectLst/>
+                    <a:latin typeface="+mn-lt"/>
+                    <a:ea typeface="+mn-ea"/>
+                    <a:cs typeface="+mn-cs"/>
+                  </a:rPr>
+                  <a:t>）所造成的壓降誤差，大幅提升差分測量的精準度。</a:t>
+                </a:r>
+                <a:endParaRPr lang="en-US" altLang="zh-TW" sz="1200" b="0" i="0" u="none" strike="noStrike" kern="1200" dirty="0">
+                  <a:solidFill>
+                    <a:schemeClr val="tx1"/>
+                  </a:solidFill>
+                  <a:effectLst/>
+                  <a:latin typeface="+mn-lt"/>
+                  <a:ea typeface="+mn-ea"/>
+                  <a:cs typeface="+mn-cs"/>
+                </a:endParaRPr>
+              </a:p>
+              <a:p>
+                <a:pPr rtl="0"/>
+                <a14:m>
+                  <m:oMath xmlns:m="http://schemas.openxmlformats.org/officeDocument/2006/math">
+                    <a:fld id="{825F15A7-03F4-43D7-82C5-3E23DA2F108C}" type="mathplaceholder">
+                      <a:rPr lang="en-US" altLang="zh-TW" sz="1200" b="0" i="1" u="none" strike="noStrike" kern="1200" smtClean="0">
+                        <a:solidFill>
+                          <a:schemeClr val="tx1"/>
+                        </a:solidFill>
+                        <a:effectLst/>
+                        <a:latin typeface="Cambria Math" panose="02040503050406030204" pitchFamily="18" charset="0"/>
+                        <a:ea typeface="+mn-ea"/>
+                        <a:cs typeface="+mn-cs"/>
+                      </a:rPr>
+                      <a:t>在這裡鍵入方程式。</a:t>
+                    </a:fld>
+                  </m:oMath>
+                </a14:m>
+                <a:r>
+                  <a:rPr lang="en-US" altLang="zh-TW" sz="1200" b="0" i="0" u="none" strike="noStrike" kern="1200" dirty="0">
+                    <a:solidFill>
+                      <a:schemeClr val="tx1"/>
+                    </a:solidFill>
+                    <a:effectLst/>
+                    <a:latin typeface="+mn-lt"/>
+                    <a:ea typeface="+mn-ea"/>
+                    <a:cs typeface="+mn-cs"/>
+                  </a:rPr>
+                  <a:t>5. </a:t>
+                </a:r>
+                <a:r>
+                  <a:rPr lang="zh-TW" altLang="en-US" sz="1200" b="0" i="0" u="none" strike="noStrike" kern="1200" dirty="0">
+                    <a:solidFill>
+                      <a:schemeClr val="tx1"/>
+                    </a:solidFill>
+                    <a:effectLst/>
+                    <a:latin typeface="+mn-lt"/>
+                    <a:ea typeface="+mn-ea"/>
+                    <a:cs typeface="+mn-cs"/>
+                  </a:rPr>
+                  <a:t>高輸入阻抗：</a:t>
+                </a:r>
+                <a:r>
+                  <a:rPr lang="en-US" altLang="zh-TW" sz="1200" b="0" i="0" u="none" strike="noStrike" kern="1200" dirty="0">
+                    <a:solidFill>
+                      <a:schemeClr val="tx1"/>
+                    </a:solidFill>
+                    <a:effectLst/>
+                    <a:latin typeface="+mn-lt"/>
+                    <a:ea typeface="+mn-ea"/>
+                    <a:cs typeface="+mn-cs"/>
+                  </a:rPr>
+                  <a:t>XADC </a:t>
+                </a:r>
+                <a:r>
+                  <a:rPr lang="zh-TW" altLang="en-US" sz="1200" b="0" i="0" u="none" strike="noStrike" kern="1200" dirty="0">
+                    <a:solidFill>
+                      <a:schemeClr val="tx1"/>
+                    </a:solidFill>
+                    <a:effectLst/>
+                    <a:latin typeface="+mn-lt"/>
+                    <a:ea typeface="+mn-ea"/>
+                    <a:cs typeface="+mn-cs"/>
+                  </a:rPr>
+                  <a:t>測量端阻抗極高，實際流入的電流微乎其微（</a:t>
+                </a:r>
+                <a:r>
+                  <a:rPr lang="en-US" altLang="zh-TW" sz="1200" b="0" i="0" u="none" strike="noStrike" kern="1200" dirty="0" err="1">
+                    <a:solidFill>
+                      <a:schemeClr val="tx1"/>
+                    </a:solidFill>
+                    <a:effectLst/>
+                    <a:latin typeface="+mn-lt"/>
+                    <a:ea typeface="+mn-ea"/>
+                    <a:cs typeface="+mn-cs"/>
+                  </a:rPr>
+                  <a:t>nA</a:t>
+                </a:r>
+                <a:r>
+                  <a:rPr lang="zh-TW" altLang="en-US" sz="1200" b="0" i="0" u="none" strike="noStrike" kern="1200" dirty="0">
+                    <a:solidFill>
+                      <a:schemeClr val="tx1"/>
+                    </a:solidFill>
+                    <a:effectLst/>
+                    <a:latin typeface="+mn-lt"/>
+                    <a:ea typeface="+mn-ea"/>
+                    <a:cs typeface="+mn-cs"/>
+                  </a:rPr>
+                  <a:t>等級），在外部電阻上產生的電壓降極小，幾乎不影響量測。</a:t>
+                </a:r>
+                <a:endParaRPr lang="zh-TW" altLang="en-US" dirty="0">
+                  <a:effectLst/>
+                </a:endParaRPr>
+              </a:p>
+              <a:p>
+                <a:pPr rtl="0"/>
+                <a:r>
+                  <a:rPr lang="en-US" altLang="zh-TW" sz="1200" b="0" i="0" u="none" strike="noStrike" kern="1200" dirty="0">
+                    <a:solidFill>
+                      <a:schemeClr val="tx1"/>
+                    </a:solidFill>
+                    <a:effectLst/>
+                    <a:latin typeface="+mn-lt"/>
+                    <a:ea typeface="+mn-ea"/>
+                    <a:cs typeface="+mn-cs"/>
+                  </a:rPr>
+                  <a:t>6. </a:t>
+                </a:r>
+                <a:r>
+                  <a:rPr lang="zh-TW" altLang="en-US" sz="1200" b="0" i="0" u="none" strike="noStrike" kern="1200" dirty="0">
+                    <a:solidFill>
+                      <a:schemeClr val="tx1"/>
+                    </a:solidFill>
+                    <a:effectLst/>
+                    <a:latin typeface="+mn-lt"/>
+                    <a:ea typeface="+mn-ea"/>
+                    <a:cs typeface="+mn-cs"/>
+                  </a:rPr>
+                  <a:t>差分相減抵銷誤差：即便有微小的偏置電流，因為 </a:t>
+                </a:r>
+                <a:r>
+                  <a:rPr lang="en-US" altLang="zh-TW" sz="1200" b="0" i="0" u="none" strike="noStrike" kern="1200" dirty="0">
+                    <a:solidFill>
+                      <a:schemeClr val="tx1"/>
+                    </a:solidFill>
+                    <a:effectLst/>
+                    <a:latin typeface="+mn-lt"/>
+                    <a:ea typeface="+mn-ea"/>
+                    <a:cs typeface="+mn-cs"/>
+                  </a:rPr>
+                  <a:t>P </a:t>
+                </a:r>
+                <a:r>
+                  <a:rPr lang="zh-TW" altLang="en-US" sz="1200" b="0" i="0" u="none" strike="noStrike" kern="1200" dirty="0">
+                    <a:solidFill>
+                      <a:schemeClr val="tx1"/>
+                    </a:solidFill>
+                    <a:effectLst/>
+                    <a:latin typeface="+mn-lt"/>
+                    <a:ea typeface="+mn-ea"/>
+                    <a:cs typeface="+mn-cs"/>
+                  </a:rPr>
+                  <a:t>端 </a:t>
+                </a:r>
+                <a:r>
+                  <a:rPr lang="en-US" altLang="zh-TW" sz="1200" b="0" i="0" u="none" strike="noStrike" kern="1200" dirty="0">
+                    <a:solidFill>
+                      <a:schemeClr val="tx1"/>
+                    </a:solidFill>
+                    <a:effectLst/>
+                    <a:latin typeface="+mn-lt"/>
+                    <a:ea typeface="+mn-ea"/>
+                    <a:cs typeface="+mn-cs"/>
+                  </a:rPr>
+                  <a:t>(838Ω) </a:t>
+                </a:r>
+                <a:r>
+                  <a:rPr lang="zh-TW" altLang="en-US" sz="1200" b="0" i="0" u="none" strike="noStrike" kern="1200" dirty="0">
+                    <a:solidFill>
+                      <a:schemeClr val="tx1"/>
+                    </a:solidFill>
+                    <a:effectLst/>
+                    <a:latin typeface="+mn-lt"/>
+                    <a:ea typeface="+mn-ea"/>
+                    <a:cs typeface="+mn-cs"/>
+                  </a:rPr>
+                  <a:t>與 </a:t>
+                </a:r>
+                <a:r>
+                  <a:rPr lang="en-US" altLang="zh-TW" sz="1200" b="0" i="0" u="none" strike="noStrike" kern="1200" dirty="0">
+                    <a:solidFill>
+                      <a:schemeClr val="tx1"/>
+                    </a:solidFill>
+                    <a:effectLst/>
+                    <a:latin typeface="+mn-lt"/>
+                    <a:ea typeface="+mn-ea"/>
+                    <a:cs typeface="+mn-cs"/>
+                  </a:rPr>
+                  <a:t>N </a:t>
+                </a:r>
+                <a:r>
+                  <a:rPr lang="zh-TW" altLang="en-US" sz="1200" b="0" i="0" u="none" strike="noStrike" kern="1200" dirty="0">
+                    <a:solidFill>
+                      <a:schemeClr val="tx1"/>
+                    </a:solidFill>
+                    <a:effectLst/>
+                    <a:latin typeface="+mn-lt"/>
+                    <a:ea typeface="+mn-ea"/>
+                    <a:cs typeface="+mn-cs"/>
+                  </a:rPr>
+                  <a:t>端 </a:t>
+                </a:r>
+                <a:r>
+                  <a:rPr lang="en-US" altLang="zh-TW" sz="1200" b="0" i="0" u="none" strike="noStrike" kern="1200" dirty="0">
+                    <a:solidFill>
+                      <a:schemeClr val="tx1"/>
+                    </a:solidFill>
+                    <a:effectLst/>
+                    <a:latin typeface="+mn-lt"/>
+                    <a:ea typeface="+mn-ea"/>
+                    <a:cs typeface="+mn-cs"/>
+                  </a:rPr>
+                  <a:t>(845Ω) </a:t>
+                </a:r>
+                <a:r>
+                  <a:rPr lang="zh-TW" altLang="en-US" sz="1200" b="0" i="0" u="none" strike="noStrike" kern="1200" dirty="0">
+                    <a:solidFill>
+                      <a:schemeClr val="tx1"/>
+                    </a:solidFill>
+                    <a:effectLst/>
+                    <a:latin typeface="+mn-lt"/>
+                    <a:ea typeface="+mn-ea"/>
+                    <a:cs typeface="+mn-cs"/>
+                  </a:rPr>
+                  <a:t>阻抗極度匹配，兩端產生的誤差電壓相等。</a:t>
+                </a:r>
+                <a:r>
+                  <a:rPr lang="en-US" altLang="zh-TW" sz="1200" b="0" i="0" u="none" strike="noStrike" kern="1200" dirty="0">
+                    <a:solidFill>
+                      <a:schemeClr val="tx1"/>
+                    </a:solidFill>
+                    <a:effectLst/>
+                    <a:latin typeface="+mn-lt"/>
+                    <a:ea typeface="+mn-ea"/>
+                    <a:cs typeface="+mn-cs"/>
+                  </a:rPr>
+                  <a:t>XADC </a:t>
+                </a:r>
+                <a:r>
+                  <a:rPr lang="zh-TW" altLang="en-US" sz="1200" b="0" i="0" u="none" strike="noStrike" kern="1200" dirty="0">
+                    <a:solidFill>
+                      <a:schemeClr val="tx1"/>
+                    </a:solidFill>
+                    <a:effectLst/>
+                    <a:latin typeface="+mn-lt"/>
+                    <a:ea typeface="+mn-ea"/>
+                    <a:cs typeface="+mn-cs"/>
+                  </a:rPr>
+                  <a:t>測量差分電壓（</a:t>
+                </a:r>
+                <a:r>
+                  <a:rPr lang="en-US" altLang="zh-TW" sz="1200" b="0" i="0" u="none" strike="noStrike" kern="1200" dirty="0">
+                    <a:solidFill>
+                      <a:schemeClr val="tx1"/>
+                    </a:solidFill>
+                    <a:effectLst/>
+                    <a:latin typeface="+mn-lt"/>
+                    <a:ea typeface="+mn-ea"/>
+                    <a:cs typeface="+mn-cs"/>
+                  </a:rPr>
+                  <a:t>P</a:t>
+                </a:r>
+                <a:r>
+                  <a:rPr lang="zh-TW" altLang="en-US" sz="1200" b="0" i="0" u="none" strike="noStrike" kern="1200" dirty="0">
+                    <a:solidFill>
+                      <a:schemeClr val="tx1"/>
+                    </a:solidFill>
+                    <a:effectLst/>
+                    <a:latin typeface="+mn-lt"/>
+                    <a:ea typeface="+mn-ea"/>
+                    <a:cs typeface="+mn-cs"/>
+                  </a:rPr>
+                  <a:t>減</a:t>
+                </a:r>
+                <a:r>
+                  <a:rPr lang="en-US" altLang="zh-TW" sz="1200" b="0" i="0" u="none" strike="noStrike" kern="1200" dirty="0">
+                    <a:solidFill>
+                      <a:schemeClr val="tx1"/>
+                    </a:solidFill>
+                    <a:effectLst/>
+                    <a:latin typeface="+mn-lt"/>
+                    <a:ea typeface="+mn-ea"/>
+                    <a:cs typeface="+mn-cs"/>
+                  </a:rPr>
+                  <a:t>N</a:t>
+                </a:r>
+                <a:r>
+                  <a:rPr lang="zh-TW" altLang="en-US" sz="1200" b="0" i="0" u="none" strike="noStrike" kern="1200" dirty="0">
+                    <a:solidFill>
+                      <a:schemeClr val="tx1"/>
+                    </a:solidFill>
+                    <a:effectLst/>
+                    <a:latin typeface="+mn-lt"/>
+                    <a:ea typeface="+mn-ea"/>
+                    <a:cs typeface="+mn-cs"/>
+                  </a:rPr>
+                  <a:t>）時，此誤差會被完美抵銷。</a:t>
+                </a:r>
+                <a:endParaRPr lang="zh-TW" altLang="en-US" dirty="0">
+                  <a:effectLst/>
+                </a:endParaRPr>
+              </a:p>
+            </p:txBody>
+          </p:sp>
+        </mc:Choice>
+        <mc:Fallback>
+          <p:sp>
+            <p:nvSpPr>
+              <p:cNvPr id="3" name="備忘稿版面配置區 2"/>
+              <p:cNvSpPr>
+                <a:spLocks noGrp="1"/>
+              </p:cNvSpPr>
+              <p:nvPr>
+                <p:ph type="body" idx="1"/>
+              </p:nvPr>
+            </p:nvSpPr>
+            <p:spPr/>
+            <p:txBody>
+              <a:bodyPr/>
+              <a:lstStyle/>
+              <a:p>
+                <a:pPr rtl="0"/>
+                <a:r>
+                  <a:rPr lang="en-US" altLang="zh-TW" sz="1200" b="0" i="0" u="none" strike="noStrike" kern="1200" dirty="0">
+                    <a:solidFill>
+                      <a:schemeClr val="tx1"/>
+                    </a:solidFill>
+                    <a:effectLst/>
+                    <a:latin typeface="+mn-lt"/>
+                    <a:ea typeface="+mn-ea"/>
+                    <a:cs typeface="+mn-cs"/>
+                  </a:rPr>
+                  <a:t>1.  </a:t>
+                </a:r>
+                <a:r>
+                  <a:rPr lang="zh-TW" altLang="en-US" sz="1200" b="0" i="0" u="none" strike="noStrike" kern="1200" dirty="0">
+                    <a:solidFill>
+                      <a:schemeClr val="tx1"/>
+                    </a:solidFill>
+                    <a:effectLst/>
+                    <a:latin typeface="+mn-lt"/>
+                    <a:ea typeface="+mn-ea"/>
+                    <a:cs typeface="+mn-cs"/>
+                  </a:rPr>
+                  <a:t>降壓分壓：</a:t>
+                </a:r>
+                <a:r>
+                  <a:rPr lang="en-US" altLang="zh-TW" sz="1200" b="0" i="0" u="none" strike="noStrike" kern="1200" dirty="0">
+                    <a:solidFill>
+                      <a:schemeClr val="tx1"/>
+                    </a:solidFill>
+                    <a:effectLst/>
+                    <a:latin typeface="+mn-lt"/>
+                    <a:ea typeface="+mn-ea"/>
+                    <a:cs typeface="+mn-cs"/>
+                  </a:rPr>
+                  <a:t>2.32kΩ </a:t>
+                </a:r>
+                <a:r>
+                  <a:rPr lang="zh-TW" altLang="en-US" sz="1200" b="0" i="0" u="none" strike="noStrike" kern="1200" dirty="0">
+                    <a:solidFill>
+                      <a:schemeClr val="tx1"/>
+                    </a:solidFill>
+                    <a:effectLst/>
+                    <a:latin typeface="+mn-lt"/>
+                    <a:ea typeface="+mn-ea"/>
+                    <a:cs typeface="+mn-cs"/>
+                  </a:rPr>
+                  <a:t>與 </a:t>
+                </a:r>
+                <a:r>
+                  <a:rPr lang="en-US" altLang="zh-TW" sz="1200" b="0" i="0" u="none" strike="noStrike" kern="1200" dirty="0">
+                    <a:solidFill>
+                      <a:schemeClr val="tx1"/>
+                    </a:solidFill>
+                    <a:effectLst/>
+                    <a:latin typeface="+mn-lt"/>
+                    <a:ea typeface="+mn-ea"/>
+                    <a:cs typeface="+mn-cs"/>
+                  </a:rPr>
+                  <a:t>1kΩ </a:t>
+                </a:r>
+                <a:r>
+                  <a:rPr lang="zh-TW" altLang="en-US" sz="1200" b="0" i="0" u="none" strike="noStrike" kern="1200" dirty="0">
+                    <a:solidFill>
+                      <a:schemeClr val="tx1"/>
+                    </a:solidFill>
+                    <a:effectLst/>
+                    <a:latin typeface="+mn-lt"/>
+                    <a:ea typeface="+mn-ea"/>
+                    <a:cs typeface="+mn-cs"/>
+                  </a:rPr>
+                  <a:t>電阻負責將外部訊號（如 </a:t>
+                </a:r>
+                <a:r>
+                  <a:rPr lang="en-US" altLang="zh-TW" sz="1200" b="0" i="0" u="none" strike="noStrike" kern="1200" dirty="0">
+                    <a:solidFill>
+                      <a:schemeClr val="tx1"/>
+                    </a:solidFill>
+                    <a:effectLst/>
+                    <a:latin typeface="+mn-lt"/>
+                    <a:ea typeface="+mn-ea"/>
+                    <a:cs typeface="+mn-cs"/>
+                  </a:rPr>
+                  <a:t>3.3V</a:t>
+                </a:r>
+                <a:r>
+                  <a:rPr lang="zh-TW" altLang="en-US" sz="1200" b="0" i="0" u="none" strike="noStrike" kern="1200" dirty="0">
+                    <a:solidFill>
+                      <a:schemeClr val="tx1"/>
+                    </a:solidFill>
+                    <a:effectLst/>
+                    <a:latin typeface="+mn-lt"/>
+                    <a:ea typeface="+mn-ea"/>
+                    <a:cs typeface="+mn-cs"/>
+                  </a:rPr>
+                  <a:t>）按比例縮小至 </a:t>
+                </a:r>
+                <a:r>
+                  <a:rPr lang="en-US" altLang="zh-TW" sz="1200" b="0" i="0" u="none" strike="noStrike" kern="1200" dirty="0">
+                    <a:solidFill>
+                      <a:schemeClr val="tx1"/>
+                    </a:solidFill>
+                    <a:effectLst/>
+                    <a:latin typeface="+mn-lt"/>
+                    <a:ea typeface="+mn-ea"/>
+                    <a:cs typeface="+mn-cs"/>
+                  </a:rPr>
+                  <a:t>XADC </a:t>
+                </a:r>
+                <a:r>
+                  <a:rPr lang="zh-TW" altLang="en-US" sz="1200" b="0" i="0" u="none" strike="noStrike" kern="1200" dirty="0">
+                    <a:solidFill>
+                      <a:schemeClr val="tx1"/>
+                    </a:solidFill>
+                    <a:effectLst/>
+                    <a:latin typeface="+mn-lt"/>
+                    <a:ea typeface="+mn-ea"/>
+                    <a:cs typeface="+mn-cs"/>
+                  </a:rPr>
+                  <a:t>安全可測的 </a:t>
+                </a:r>
+                <a:r>
+                  <a:rPr lang="en-US" altLang="zh-TW" sz="1200" b="0" i="0" u="none" strike="noStrike" kern="1200" dirty="0">
+                    <a:solidFill>
+                      <a:schemeClr val="tx1"/>
+                    </a:solidFill>
+                    <a:effectLst/>
+                    <a:latin typeface="+mn-lt"/>
+                    <a:ea typeface="+mn-ea"/>
+                    <a:cs typeface="+mn-cs"/>
+                  </a:rPr>
+                  <a:t>0~1V </a:t>
+                </a:r>
+                <a:r>
+                  <a:rPr lang="zh-TW" altLang="en-US" sz="1200" b="0" i="0" u="none" strike="noStrike" kern="1200" dirty="0">
+                    <a:solidFill>
+                      <a:schemeClr val="tx1"/>
+                    </a:solidFill>
+                    <a:effectLst/>
+                    <a:latin typeface="+mn-lt"/>
+                    <a:ea typeface="+mn-ea"/>
+                    <a:cs typeface="+mn-cs"/>
+                  </a:rPr>
+                  <a:t>範圍。</a:t>
+                </a:r>
+                <a:endParaRPr lang="zh-TW" altLang="en-US" dirty="0">
+                  <a:effectLst/>
+                </a:endParaRPr>
+              </a:p>
+              <a:p>
+                <a:pPr rtl="0"/>
+                <a:r>
+                  <a:rPr lang="en-US" altLang="zh-TW" sz="1200" b="0" i="0" u="none" strike="noStrike" kern="1200" dirty="0">
+                    <a:solidFill>
+                      <a:schemeClr val="tx1"/>
+                    </a:solidFill>
+                    <a:effectLst/>
+                    <a:latin typeface="+mn-lt"/>
+                    <a:ea typeface="+mn-ea"/>
+                    <a:cs typeface="+mn-cs"/>
+                  </a:rPr>
+                  <a:t>2.  </a:t>
+                </a:r>
+                <a:r>
+                  <a:rPr lang="zh-TW" altLang="en-US" sz="1200" b="0" i="0" u="none" strike="noStrike" kern="1200" dirty="0">
+                    <a:solidFill>
+                      <a:schemeClr val="tx1"/>
+                    </a:solidFill>
+                    <a:effectLst/>
+                    <a:latin typeface="+mn-lt"/>
+                    <a:ea typeface="+mn-ea"/>
+                    <a:cs typeface="+mn-cs"/>
+                  </a:rPr>
+                  <a:t>戴維寧等效電阻 </a:t>
+                </a:r>
+                <a:r>
+                  <a:rPr lang="en-US" altLang="zh-TW" sz="1200" b="0" i="0" u="none" strike="noStrike" kern="1200" dirty="0">
+                    <a:solidFill>
+                      <a:schemeClr val="tx1"/>
+                    </a:solidFill>
+                    <a:effectLst/>
+                    <a:latin typeface="+mn-lt"/>
+                    <a:ea typeface="+mn-ea"/>
+                    <a:cs typeface="+mn-cs"/>
+                  </a:rPr>
+                  <a:t>(</a:t>
+                </a:r>
+                <a:r>
+                  <a:rPr lang="en-US" altLang="zh-TW" sz="1200" b="0" i="0" u="none" strike="noStrike" kern="1200" dirty="0" err="1">
+                    <a:solidFill>
+                      <a:schemeClr val="tx1"/>
+                    </a:solidFill>
+                    <a:effectLst/>
+                    <a:latin typeface="+mn-lt"/>
+                    <a:ea typeface="+mn-ea"/>
+                    <a:cs typeface="+mn-cs"/>
+                  </a:rPr>
+                  <a:t>ADx_P</a:t>
+                </a:r>
+                <a:r>
+                  <a:rPr lang="en-US" altLang="zh-TW" sz="1200" b="0" i="0" u="none" strike="noStrike" kern="1200" dirty="0">
+                    <a:solidFill>
+                      <a:schemeClr val="tx1"/>
+                    </a:solidFill>
+                    <a:effectLst/>
+                    <a:latin typeface="+mn-lt"/>
+                    <a:ea typeface="+mn-ea"/>
+                    <a:cs typeface="+mn-cs"/>
+                  </a:rPr>
+                  <a:t>)</a:t>
+                </a:r>
+                <a:r>
+                  <a:rPr lang="zh-TW" altLang="en-US" sz="1200" b="0" i="0" u="none" strike="noStrike" kern="1200" dirty="0">
+                    <a:solidFill>
+                      <a:schemeClr val="tx1"/>
+                    </a:solidFill>
+                    <a:effectLst/>
+                    <a:latin typeface="+mn-lt"/>
+                    <a:ea typeface="+mn-ea"/>
+                    <a:cs typeface="+mn-cs"/>
+                  </a:rPr>
+                  <a:t>：將電源短路接地後，分壓電阻視為並聯。</a:t>
+                </a:r>
+                <a:r>
+                  <a:rPr lang="en-US" altLang="zh-TW" sz="1200" b="0" i="0" u="none" strike="noStrike" kern="1200" dirty="0" err="1">
+                    <a:solidFill>
+                      <a:schemeClr val="tx1"/>
+                    </a:solidFill>
+                    <a:effectLst/>
+                    <a:latin typeface="+mn-lt"/>
+                    <a:ea typeface="+mn-ea"/>
+                    <a:cs typeface="+mn-cs"/>
+                  </a:rPr>
+                  <a:t>ADx_P</a:t>
+                </a:r>
+                <a:r>
+                  <a:rPr lang="en-US" altLang="zh-TW" sz="1200" b="0" i="0" u="none" strike="noStrike" kern="1200" dirty="0">
+                    <a:solidFill>
+                      <a:schemeClr val="tx1"/>
+                    </a:solidFill>
+                    <a:effectLst/>
+                    <a:latin typeface="+mn-lt"/>
+                    <a:ea typeface="+mn-ea"/>
+                    <a:cs typeface="+mn-cs"/>
+                  </a:rPr>
+                  <a:t> </a:t>
+                </a:r>
+                <a:r>
+                  <a:rPr lang="zh-TW" altLang="en-US" sz="1200" b="0" i="0" u="none" strike="noStrike" kern="1200" dirty="0">
+                    <a:solidFill>
+                      <a:schemeClr val="tx1"/>
+                    </a:solidFill>
+                    <a:effectLst/>
+                    <a:latin typeface="+mn-lt"/>
+                    <a:ea typeface="+mn-ea"/>
+                    <a:cs typeface="+mn-cs"/>
+                  </a:rPr>
+                  <a:t>端看出去的等效阻抗為 </a:t>
+                </a:r>
+                <a:r>
+                  <a:rPr lang="en-US" altLang="zh-TW" sz="1200" b="0" i="0" u="none" strike="noStrike" kern="1200" dirty="0">
+                    <a:solidFill>
+                      <a:schemeClr val="tx1"/>
+                    </a:solidFill>
+                    <a:effectLst/>
+                    <a:latin typeface="+mn-lt"/>
+                    <a:ea typeface="+mn-ea"/>
+                    <a:cs typeface="+mn-cs"/>
+                  </a:rPr>
+                  <a:t>(2.32kΩ // 1kΩ) + 140Ω ≈ 838Ω</a:t>
+                </a:r>
+                <a:r>
+                  <a:rPr lang="zh-TW" altLang="en-US" sz="1200" b="0" i="0" u="none" strike="noStrike" kern="1200" dirty="0">
+                    <a:solidFill>
+                      <a:schemeClr val="tx1"/>
+                    </a:solidFill>
+                    <a:effectLst/>
+                    <a:latin typeface="+mn-lt"/>
+                    <a:ea typeface="+mn-ea"/>
+                    <a:cs typeface="+mn-cs"/>
+                  </a:rPr>
+                  <a:t>。</a:t>
+                </a:r>
+                <a:endParaRPr lang="en-US" altLang="zh-TW" sz="1200" b="0" i="0" u="none" strike="noStrike" kern="1200" dirty="0">
+                  <a:solidFill>
+                    <a:schemeClr val="tx1"/>
+                  </a:solidFill>
+                  <a:effectLst/>
+                  <a:latin typeface="+mn-lt"/>
+                  <a:ea typeface="+mn-ea"/>
+                  <a:cs typeface="+mn-cs"/>
+                </a:endParaRPr>
+              </a:p>
+              <a:p>
+                <a:pPr rtl="0"/>
+                <a:r>
+                  <a:rPr lang="en-US" altLang="zh-TW" sz="1200" b="0" i="0" u="none" strike="noStrike" kern="1200" dirty="0">
+                    <a:solidFill>
+                      <a:schemeClr val="tx1"/>
+                    </a:solidFill>
+                    <a:effectLst/>
+                    <a:latin typeface="+mn-lt"/>
+                    <a:ea typeface="+mn-ea"/>
+                    <a:cs typeface="+mn-cs"/>
+                  </a:rPr>
+                  <a:t>	</a:t>
+                </a:r>
+                <a:r>
+                  <a:rPr lang="en-US" altLang="zh-TW" sz="1200" b="0" i="0" u="none" strike="noStrike" kern="1200" dirty="0" err="1">
+                    <a:solidFill>
+                      <a:schemeClr val="tx1"/>
+                    </a:solidFill>
+                    <a:effectLst/>
+                    <a:latin typeface="+mn-lt"/>
+                    <a:ea typeface="+mn-ea"/>
+                    <a:cs typeface="+mn-cs"/>
+                  </a:rPr>
+                  <a:t>Adx_N</a:t>
+                </a:r>
+                <a:r>
+                  <a:rPr lang="en-US" altLang="zh-TW" sz="1200" b="0" i="0" u="none" strike="noStrike" kern="1200" dirty="0">
+                    <a:solidFill>
+                      <a:schemeClr val="tx1"/>
+                    </a:solidFill>
+                    <a:effectLst/>
+                    <a:latin typeface="+mn-lt"/>
+                    <a:ea typeface="+mn-ea"/>
+                    <a:cs typeface="+mn-cs"/>
+                  </a:rPr>
+                  <a:t> </a:t>
+                </a:r>
+                <a:r>
+                  <a:rPr lang="zh-TW" altLang="en-US" sz="1200" b="0" i="0" u="none" strike="noStrike" kern="1200" dirty="0">
+                    <a:solidFill>
+                      <a:schemeClr val="tx1"/>
+                    </a:solidFill>
+                    <a:effectLst/>
+                    <a:latin typeface="+mn-lt"/>
+                    <a:ea typeface="+mn-ea"/>
+                    <a:cs typeface="+mn-cs"/>
+                  </a:rPr>
+                  <a:t>則為</a:t>
+                </a:r>
+                <a:r>
+                  <a:rPr lang="en-US" altLang="zh-TW" sz="1200" b="0" i="0" u="none" strike="noStrike" kern="1200" dirty="0">
+                    <a:solidFill>
+                      <a:schemeClr val="tx1"/>
+                    </a:solidFill>
+                    <a:effectLst/>
+                    <a:latin typeface="+mn-lt"/>
+                    <a:ea typeface="+mn-ea"/>
+                    <a:cs typeface="+mn-cs"/>
+                  </a:rPr>
+                  <a:t>845</a:t>
+                </a:r>
+                <a:r>
+                  <a:rPr lang="zh-TW" altLang="en-US" sz="1200" b="0" i="0" u="none" strike="noStrike" kern="1200" dirty="0">
+                    <a:solidFill>
+                      <a:schemeClr val="tx1"/>
+                    </a:solidFill>
+                    <a:effectLst/>
+                    <a:latin typeface="+mn-lt"/>
+                    <a:ea typeface="+mn-ea"/>
+                    <a:cs typeface="+mn-cs"/>
+                  </a:rPr>
+                  <a:t>直接接地</a:t>
+                </a:r>
+                <a:endParaRPr lang="zh-TW" altLang="en-US" dirty="0">
+                  <a:effectLst/>
+                </a:endParaRPr>
+              </a:p>
+              <a:p>
+                <a:pPr rtl="0"/>
+                <a:r>
+                  <a:rPr lang="en-US" altLang="zh-TW" sz="1200" b="0" i="0" u="none" strike="noStrike" kern="1200" dirty="0">
+                    <a:solidFill>
+                      <a:schemeClr val="tx1"/>
+                    </a:solidFill>
+                    <a:effectLst/>
+                    <a:latin typeface="+mn-lt"/>
+                    <a:ea typeface="+mn-ea"/>
+                    <a:cs typeface="+mn-cs"/>
+                  </a:rPr>
+                  <a:t>3.  </a:t>
+                </a:r>
+                <a:r>
+                  <a:rPr lang="zh-TW" altLang="en-US" sz="1200" b="0" i="0" u="none" strike="noStrike" kern="1200" dirty="0">
+                    <a:solidFill>
+                      <a:schemeClr val="tx1"/>
+                    </a:solidFill>
+                    <a:effectLst/>
+                    <a:latin typeface="+mn-lt"/>
+                    <a:ea typeface="+mn-ea"/>
+                    <a:cs typeface="+mn-cs"/>
+                  </a:rPr>
+                  <a:t>阻抗匹配 </a:t>
+                </a:r>
+                <a:r>
+                  <a:rPr lang="en-US" altLang="zh-TW" sz="1200" b="0" i="0" u="none" strike="noStrike" kern="1200" dirty="0">
+                    <a:solidFill>
+                      <a:schemeClr val="tx1"/>
+                    </a:solidFill>
+                    <a:effectLst/>
+                    <a:latin typeface="+mn-lt"/>
+                    <a:ea typeface="+mn-ea"/>
+                    <a:cs typeface="+mn-cs"/>
+                  </a:rPr>
+                  <a:t>(</a:t>
+                </a:r>
+                <a:r>
+                  <a:rPr lang="en-US" altLang="zh-TW" sz="1200" b="0" i="0" u="none" strike="noStrike" kern="1200" dirty="0" err="1">
+                    <a:solidFill>
+                      <a:schemeClr val="tx1"/>
+                    </a:solidFill>
+                    <a:effectLst/>
+                    <a:latin typeface="+mn-lt"/>
+                    <a:ea typeface="+mn-ea"/>
+                    <a:cs typeface="+mn-cs"/>
+                  </a:rPr>
+                  <a:t>ADx_N</a:t>
+                </a:r>
+                <a:r>
+                  <a:rPr lang="en-US" altLang="zh-TW" sz="1200" b="0" i="0" u="none" strike="noStrike" kern="1200" dirty="0">
+                    <a:solidFill>
+                      <a:schemeClr val="tx1"/>
+                    </a:solidFill>
+                    <a:effectLst/>
+                    <a:latin typeface="+mn-lt"/>
+                    <a:ea typeface="+mn-ea"/>
+                    <a:cs typeface="+mn-cs"/>
+                  </a:rPr>
+                  <a:t>)</a:t>
+                </a:r>
+                <a:r>
+                  <a:rPr lang="zh-TW" altLang="en-US" sz="1200" b="0" i="0" u="none" strike="noStrike" kern="1200" dirty="0">
+                    <a:solidFill>
+                      <a:schemeClr val="tx1"/>
+                    </a:solidFill>
+                    <a:effectLst/>
+                    <a:latin typeface="+mn-lt"/>
+                    <a:ea typeface="+mn-ea"/>
+                    <a:cs typeface="+mn-cs"/>
+                  </a:rPr>
+                  <a:t>：</a:t>
+                </a:r>
+                <a:r>
+                  <a:rPr lang="en-US" altLang="zh-TW" sz="1200" b="0" i="0" u="none" strike="noStrike" kern="1200" dirty="0" err="1">
+                    <a:solidFill>
+                      <a:schemeClr val="tx1"/>
+                    </a:solidFill>
+                    <a:effectLst/>
+                    <a:latin typeface="+mn-lt"/>
+                    <a:ea typeface="+mn-ea"/>
+                    <a:cs typeface="+mn-cs"/>
+                  </a:rPr>
+                  <a:t>ADx_N</a:t>
+                </a:r>
+                <a:r>
+                  <a:rPr lang="en-US" altLang="zh-TW" sz="1200" b="0" i="0" u="none" strike="noStrike" kern="1200" dirty="0">
+                    <a:solidFill>
+                      <a:schemeClr val="tx1"/>
+                    </a:solidFill>
+                    <a:effectLst/>
+                    <a:latin typeface="+mn-lt"/>
+                    <a:ea typeface="+mn-ea"/>
+                    <a:cs typeface="+mn-cs"/>
+                  </a:rPr>
+                  <a:t> </a:t>
+                </a:r>
+                <a:r>
+                  <a:rPr lang="zh-TW" altLang="en-US" sz="1200" b="0" i="0" u="none" strike="noStrike" kern="1200" dirty="0">
+                    <a:solidFill>
+                      <a:schemeClr val="tx1"/>
+                    </a:solidFill>
+                    <a:effectLst/>
+                    <a:latin typeface="+mn-lt"/>
+                    <a:ea typeface="+mn-ea"/>
+                    <a:cs typeface="+mn-cs"/>
+                  </a:rPr>
+                  <a:t>端直接串聯 </a:t>
+                </a:r>
+                <a:r>
+                  <a:rPr lang="en-US" altLang="zh-TW" sz="1200" b="0" i="0" u="none" strike="noStrike" kern="1200" dirty="0">
+                    <a:solidFill>
+                      <a:schemeClr val="tx1"/>
+                    </a:solidFill>
+                    <a:effectLst/>
+                    <a:latin typeface="+mn-lt"/>
+                    <a:ea typeface="+mn-ea"/>
+                    <a:cs typeface="+mn-cs"/>
+                  </a:rPr>
+                  <a:t>845Ω </a:t>
+                </a:r>
+                <a:r>
+                  <a:rPr lang="zh-TW" altLang="en-US" sz="1200" b="0" i="0" u="none" strike="noStrike" kern="1200" dirty="0">
+                    <a:solidFill>
+                      <a:schemeClr val="tx1"/>
+                    </a:solidFill>
+                    <a:effectLst/>
+                    <a:latin typeface="+mn-lt"/>
+                    <a:ea typeface="+mn-ea"/>
+                    <a:cs typeface="+mn-cs"/>
+                  </a:rPr>
+                  <a:t>電阻接地，目的是與 </a:t>
+                </a:r>
+                <a:r>
+                  <a:rPr lang="en-US" altLang="zh-TW" sz="1200" b="0" i="0" u="none" strike="noStrike" kern="1200" dirty="0" err="1">
+                    <a:solidFill>
+                      <a:schemeClr val="tx1"/>
+                    </a:solidFill>
+                    <a:effectLst/>
+                    <a:latin typeface="+mn-lt"/>
+                    <a:ea typeface="+mn-ea"/>
+                    <a:cs typeface="+mn-cs"/>
+                  </a:rPr>
+                  <a:t>ADx_P</a:t>
+                </a:r>
+                <a:r>
+                  <a:rPr lang="en-US" altLang="zh-TW" sz="1200" b="0" i="0" u="none" strike="noStrike" kern="1200" dirty="0">
+                    <a:solidFill>
+                      <a:schemeClr val="tx1"/>
+                    </a:solidFill>
+                    <a:effectLst/>
+                    <a:latin typeface="+mn-lt"/>
+                    <a:ea typeface="+mn-ea"/>
+                    <a:cs typeface="+mn-cs"/>
+                  </a:rPr>
+                  <a:t> </a:t>
+                </a:r>
+                <a:r>
+                  <a:rPr lang="zh-TW" altLang="en-US" sz="1200" b="0" i="0" u="none" strike="noStrike" kern="1200" dirty="0">
+                    <a:solidFill>
+                      <a:schemeClr val="tx1"/>
+                    </a:solidFill>
+                    <a:effectLst/>
+                    <a:latin typeface="+mn-lt"/>
+                    <a:ea typeface="+mn-ea"/>
+                    <a:cs typeface="+mn-cs"/>
+                  </a:rPr>
+                  <a:t>端的 </a:t>
+                </a:r>
+                <a:r>
+                  <a:rPr lang="en-US" altLang="zh-TW" sz="1200" b="0" i="0" u="none" strike="noStrike" kern="1200" dirty="0">
+                    <a:solidFill>
+                      <a:schemeClr val="tx1"/>
+                    </a:solidFill>
+                    <a:effectLst/>
+                    <a:latin typeface="+mn-lt"/>
+                    <a:ea typeface="+mn-ea"/>
+                    <a:cs typeface="+mn-cs"/>
+                  </a:rPr>
+                  <a:t>838Ω </a:t>
+                </a:r>
+                <a:r>
+                  <a:rPr lang="zh-TW" altLang="en-US" sz="1200" b="0" i="0" u="none" strike="noStrike" kern="1200" dirty="0">
+                    <a:solidFill>
+                      <a:schemeClr val="tx1"/>
+                    </a:solidFill>
+                    <a:effectLst/>
+                    <a:latin typeface="+mn-lt"/>
+                    <a:ea typeface="+mn-ea"/>
+                    <a:cs typeface="+mn-cs"/>
+                  </a:rPr>
+                  <a:t>達成極度接近的阻抗匹配。</a:t>
+                </a:r>
+                <a:endParaRPr lang="zh-TW" altLang="en-US" dirty="0">
+                  <a:effectLst/>
+                </a:endParaRPr>
+              </a:p>
+              <a:p>
+                <a:pPr rtl="0"/>
+                <a:r>
+                  <a:rPr lang="en-US" altLang="zh-TW" sz="1200" b="0" i="0" u="none" strike="noStrike" kern="1200" dirty="0">
+                    <a:solidFill>
+                      <a:schemeClr val="tx1"/>
+                    </a:solidFill>
+                    <a:effectLst/>
+                    <a:latin typeface="+mn-lt"/>
+                    <a:ea typeface="+mn-ea"/>
+                    <a:cs typeface="+mn-cs"/>
+                  </a:rPr>
+                  <a:t>4.  </a:t>
+                </a:r>
+                <a:r>
+                  <a:rPr lang="zh-TW" altLang="en-US" sz="1200" b="0" i="0" u="none" strike="noStrike" kern="1200" dirty="0">
+                    <a:solidFill>
+                      <a:schemeClr val="tx1"/>
+                    </a:solidFill>
+                    <a:effectLst/>
+                    <a:latin typeface="+mn-lt"/>
+                    <a:ea typeface="+mn-ea"/>
+                    <a:cs typeface="+mn-cs"/>
+                  </a:rPr>
+                  <a:t>核心目的：兩端阻抗平衡可以完美抵銷 </a:t>
+                </a:r>
+                <a:r>
+                  <a:rPr lang="en-US" altLang="zh-TW" sz="1200" b="0" i="0" u="none" strike="noStrike" kern="1200" dirty="0">
+                    <a:solidFill>
+                      <a:schemeClr val="tx1"/>
+                    </a:solidFill>
+                    <a:effectLst/>
+                    <a:latin typeface="+mn-lt"/>
+                    <a:ea typeface="+mn-ea"/>
+                    <a:cs typeface="+mn-cs"/>
+                  </a:rPr>
+                  <a:t>ADC </a:t>
+                </a:r>
+                <a:r>
+                  <a:rPr lang="zh-TW" altLang="en-US" sz="1200" b="0" i="0" u="none" strike="noStrike" kern="1200" dirty="0">
+                    <a:solidFill>
+                      <a:schemeClr val="tx1"/>
+                    </a:solidFill>
+                    <a:effectLst/>
+                    <a:latin typeface="+mn-lt"/>
+                    <a:ea typeface="+mn-ea"/>
+                    <a:cs typeface="+mn-cs"/>
+                  </a:rPr>
+                  <a:t>內部直流偏置電流（</a:t>
+                </a:r>
+                <a:r>
+                  <a:rPr lang="en-US" altLang="zh-TW" sz="1200" b="0" i="0" u="none" strike="noStrike" kern="1200" dirty="0">
+                    <a:solidFill>
+                      <a:schemeClr val="tx1"/>
+                    </a:solidFill>
+                    <a:effectLst/>
+                    <a:latin typeface="+mn-lt"/>
+                    <a:ea typeface="+mn-ea"/>
+                    <a:cs typeface="+mn-cs"/>
+                  </a:rPr>
+                  <a:t>DC Bias Current</a:t>
+                </a:r>
+                <a:r>
+                  <a:rPr lang="zh-TW" altLang="en-US" sz="1200" b="0" i="0" u="none" strike="noStrike" kern="1200" dirty="0">
+                    <a:solidFill>
+                      <a:schemeClr val="tx1"/>
+                    </a:solidFill>
+                    <a:effectLst/>
+                    <a:latin typeface="+mn-lt"/>
+                    <a:ea typeface="+mn-ea"/>
+                    <a:cs typeface="+mn-cs"/>
+                  </a:rPr>
+                  <a:t>）所造成的壓降誤差，大幅提升差分測量的精準度。</a:t>
+                </a:r>
+                <a:endParaRPr lang="en-US" altLang="zh-TW" sz="1200" b="0" i="0" u="none" strike="noStrike" kern="1200" dirty="0">
+                  <a:solidFill>
+                    <a:schemeClr val="tx1"/>
+                  </a:solidFill>
+                  <a:effectLst/>
+                  <a:latin typeface="+mn-lt"/>
+                  <a:ea typeface="+mn-ea"/>
+                  <a:cs typeface="+mn-cs"/>
+                </a:endParaRPr>
+              </a:p>
+              <a:p>
+                <a:pPr rtl="0"/>
+                <a:r>
+                  <a:rPr lang="en-US" altLang="zh-TW" sz="1200" b="0" i="0" u="none" strike="noStrike" kern="1200">
+                    <a:solidFill>
+                      <a:schemeClr val="tx1"/>
+                    </a:solidFill>
+                    <a:effectLst/>
+                    <a:latin typeface="Cambria Math" panose="02040503050406030204" pitchFamily="18" charset="0"/>
+                    <a:ea typeface="+mn-ea"/>
+                    <a:cs typeface="+mn-cs"/>
+                  </a:rPr>
+                  <a:t>"在這裡鍵入方程式。"</a:t>
+                </a:r>
+                <a:r>
+                  <a:rPr lang="en-US" altLang="zh-TW" sz="1200" b="0" i="0" u="none" strike="noStrike" kern="1200" dirty="0">
+                    <a:solidFill>
+                      <a:schemeClr val="tx1"/>
+                    </a:solidFill>
+                    <a:effectLst/>
+                    <a:latin typeface="+mn-lt"/>
+                    <a:ea typeface="+mn-ea"/>
+                    <a:cs typeface="+mn-cs"/>
+                  </a:rPr>
+                  <a:t>5. </a:t>
+                </a:r>
+                <a:r>
+                  <a:rPr lang="zh-TW" altLang="en-US" sz="1200" b="0" i="0" u="none" strike="noStrike" kern="1200" dirty="0">
+                    <a:solidFill>
+                      <a:schemeClr val="tx1"/>
+                    </a:solidFill>
+                    <a:effectLst/>
+                    <a:latin typeface="+mn-lt"/>
+                    <a:ea typeface="+mn-ea"/>
+                    <a:cs typeface="+mn-cs"/>
+                  </a:rPr>
+                  <a:t>高輸入阻抗：</a:t>
+                </a:r>
+                <a:r>
+                  <a:rPr lang="en-US" altLang="zh-TW" sz="1200" b="0" i="0" u="none" strike="noStrike" kern="1200" dirty="0">
+                    <a:solidFill>
+                      <a:schemeClr val="tx1"/>
+                    </a:solidFill>
+                    <a:effectLst/>
+                    <a:latin typeface="+mn-lt"/>
+                    <a:ea typeface="+mn-ea"/>
+                    <a:cs typeface="+mn-cs"/>
+                  </a:rPr>
+                  <a:t>XADC </a:t>
+                </a:r>
+                <a:r>
+                  <a:rPr lang="zh-TW" altLang="en-US" sz="1200" b="0" i="0" u="none" strike="noStrike" kern="1200" dirty="0">
+                    <a:solidFill>
+                      <a:schemeClr val="tx1"/>
+                    </a:solidFill>
+                    <a:effectLst/>
+                    <a:latin typeface="+mn-lt"/>
+                    <a:ea typeface="+mn-ea"/>
+                    <a:cs typeface="+mn-cs"/>
+                  </a:rPr>
+                  <a:t>測量端阻抗極高，實際流入的電流微乎其微（</a:t>
+                </a:r>
+                <a:r>
+                  <a:rPr lang="en-US" altLang="zh-TW" sz="1200" b="0" i="0" u="none" strike="noStrike" kern="1200" dirty="0" err="1">
+                    <a:solidFill>
+                      <a:schemeClr val="tx1"/>
+                    </a:solidFill>
+                    <a:effectLst/>
+                    <a:latin typeface="+mn-lt"/>
+                    <a:ea typeface="+mn-ea"/>
+                    <a:cs typeface="+mn-cs"/>
+                  </a:rPr>
+                  <a:t>nA</a:t>
+                </a:r>
+                <a:r>
+                  <a:rPr lang="zh-TW" altLang="en-US" sz="1200" b="0" i="0" u="none" strike="noStrike" kern="1200" dirty="0">
+                    <a:solidFill>
+                      <a:schemeClr val="tx1"/>
+                    </a:solidFill>
+                    <a:effectLst/>
+                    <a:latin typeface="+mn-lt"/>
+                    <a:ea typeface="+mn-ea"/>
+                    <a:cs typeface="+mn-cs"/>
+                  </a:rPr>
+                  <a:t>等級），在外部電阻上產生的電壓降極小，幾乎不影響量測。</a:t>
+                </a:r>
+                <a:endParaRPr lang="zh-TW" altLang="en-US" dirty="0">
+                  <a:effectLst/>
+                </a:endParaRPr>
+              </a:p>
+              <a:p>
+                <a:pPr rtl="0"/>
+                <a:r>
+                  <a:rPr lang="en-US" altLang="zh-TW" sz="1200" b="0" i="0" u="none" strike="noStrike" kern="1200" dirty="0">
+                    <a:solidFill>
+                      <a:schemeClr val="tx1"/>
+                    </a:solidFill>
+                    <a:effectLst/>
+                    <a:latin typeface="+mn-lt"/>
+                    <a:ea typeface="+mn-ea"/>
+                    <a:cs typeface="+mn-cs"/>
+                  </a:rPr>
+                  <a:t>6. </a:t>
+                </a:r>
+                <a:r>
+                  <a:rPr lang="zh-TW" altLang="en-US" sz="1200" b="0" i="0" u="none" strike="noStrike" kern="1200" dirty="0">
+                    <a:solidFill>
+                      <a:schemeClr val="tx1"/>
+                    </a:solidFill>
+                    <a:effectLst/>
+                    <a:latin typeface="+mn-lt"/>
+                    <a:ea typeface="+mn-ea"/>
+                    <a:cs typeface="+mn-cs"/>
+                  </a:rPr>
+                  <a:t>差分相減抵銷誤差：即便有微小的偏置電流，因為 </a:t>
+                </a:r>
+                <a:r>
+                  <a:rPr lang="en-US" altLang="zh-TW" sz="1200" b="0" i="0" u="none" strike="noStrike" kern="1200" dirty="0">
+                    <a:solidFill>
+                      <a:schemeClr val="tx1"/>
+                    </a:solidFill>
+                    <a:effectLst/>
+                    <a:latin typeface="+mn-lt"/>
+                    <a:ea typeface="+mn-ea"/>
+                    <a:cs typeface="+mn-cs"/>
+                  </a:rPr>
+                  <a:t>P </a:t>
+                </a:r>
+                <a:r>
+                  <a:rPr lang="zh-TW" altLang="en-US" sz="1200" b="0" i="0" u="none" strike="noStrike" kern="1200" dirty="0">
+                    <a:solidFill>
+                      <a:schemeClr val="tx1"/>
+                    </a:solidFill>
+                    <a:effectLst/>
+                    <a:latin typeface="+mn-lt"/>
+                    <a:ea typeface="+mn-ea"/>
+                    <a:cs typeface="+mn-cs"/>
+                  </a:rPr>
+                  <a:t>端 </a:t>
+                </a:r>
+                <a:r>
+                  <a:rPr lang="en-US" altLang="zh-TW" sz="1200" b="0" i="0" u="none" strike="noStrike" kern="1200" dirty="0">
+                    <a:solidFill>
+                      <a:schemeClr val="tx1"/>
+                    </a:solidFill>
+                    <a:effectLst/>
+                    <a:latin typeface="+mn-lt"/>
+                    <a:ea typeface="+mn-ea"/>
+                    <a:cs typeface="+mn-cs"/>
+                  </a:rPr>
+                  <a:t>(838Ω) </a:t>
+                </a:r>
+                <a:r>
+                  <a:rPr lang="zh-TW" altLang="en-US" sz="1200" b="0" i="0" u="none" strike="noStrike" kern="1200" dirty="0">
+                    <a:solidFill>
+                      <a:schemeClr val="tx1"/>
+                    </a:solidFill>
+                    <a:effectLst/>
+                    <a:latin typeface="+mn-lt"/>
+                    <a:ea typeface="+mn-ea"/>
+                    <a:cs typeface="+mn-cs"/>
+                  </a:rPr>
+                  <a:t>與 </a:t>
+                </a:r>
+                <a:r>
+                  <a:rPr lang="en-US" altLang="zh-TW" sz="1200" b="0" i="0" u="none" strike="noStrike" kern="1200" dirty="0">
+                    <a:solidFill>
+                      <a:schemeClr val="tx1"/>
+                    </a:solidFill>
+                    <a:effectLst/>
+                    <a:latin typeface="+mn-lt"/>
+                    <a:ea typeface="+mn-ea"/>
+                    <a:cs typeface="+mn-cs"/>
+                  </a:rPr>
+                  <a:t>N </a:t>
+                </a:r>
+                <a:r>
+                  <a:rPr lang="zh-TW" altLang="en-US" sz="1200" b="0" i="0" u="none" strike="noStrike" kern="1200" dirty="0">
+                    <a:solidFill>
+                      <a:schemeClr val="tx1"/>
+                    </a:solidFill>
+                    <a:effectLst/>
+                    <a:latin typeface="+mn-lt"/>
+                    <a:ea typeface="+mn-ea"/>
+                    <a:cs typeface="+mn-cs"/>
+                  </a:rPr>
+                  <a:t>端 </a:t>
+                </a:r>
+                <a:r>
+                  <a:rPr lang="en-US" altLang="zh-TW" sz="1200" b="0" i="0" u="none" strike="noStrike" kern="1200" dirty="0">
+                    <a:solidFill>
+                      <a:schemeClr val="tx1"/>
+                    </a:solidFill>
+                    <a:effectLst/>
+                    <a:latin typeface="+mn-lt"/>
+                    <a:ea typeface="+mn-ea"/>
+                    <a:cs typeface="+mn-cs"/>
+                  </a:rPr>
+                  <a:t>(845Ω) </a:t>
+                </a:r>
+                <a:r>
+                  <a:rPr lang="zh-TW" altLang="en-US" sz="1200" b="0" i="0" u="none" strike="noStrike" kern="1200" dirty="0">
+                    <a:solidFill>
+                      <a:schemeClr val="tx1"/>
+                    </a:solidFill>
+                    <a:effectLst/>
+                    <a:latin typeface="+mn-lt"/>
+                    <a:ea typeface="+mn-ea"/>
+                    <a:cs typeface="+mn-cs"/>
+                  </a:rPr>
+                  <a:t>阻抗極度匹配，兩端產生的誤差電壓相等。</a:t>
+                </a:r>
+                <a:r>
+                  <a:rPr lang="en-US" altLang="zh-TW" sz="1200" b="0" i="0" u="none" strike="noStrike" kern="1200" dirty="0">
+                    <a:solidFill>
+                      <a:schemeClr val="tx1"/>
+                    </a:solidFill>
+                    <a:effectLst/>
+                    <a:latin typeface="+mn-lt"/>
+                    <a:ea typeface="+mn-ea"/>
+                    <a:cs typeface="+mn-cs"/>
+                  </a:rPr>
+                  <a:t>XADC </a:t>
+                </a:r>
+                <a:r>
+                  <a:rPr lang="zh-TW" altLang="en-US" sz="1200" b="0" i="0" u="none" strike="noStrike" kern="1200" dirty="0">
+                    <a:solidFill>
+                      <a:schemeClr val="tx1"/>
+                    </a:solidFill>
+                    <a:effectLst/>
+                    <a:latin typeface="+mn-lt"/>
+                    <a:ea typeface="+mn-ea"/>
+                    <a:cs typeface="+mn-cs"/>
+                  </a:rPr>
+                  <a:t>測量差分電壓（</a:t>
+                </a:r>
+                <a:r>
+                  <a:rPr lang="en-US" altLang="zh-TW" sz="1200" b="0" i="0" u="none" strike="noStrike" kern="1200" dirty="0">
+                    <a:solidFill>
+                      <a:schemeClr val="tx1"/>
+                    </a:solidFill>
+                    <a:effectLst/>
+                    <a:latin typeface="+mn-lt"/>
+                    <a:ea typeface="+mn-ea"/>
+                    <a:cs typeface="+mn-cs"/>
+                  </a:rPr>
+                  <a:t>P</a:t>
+                </a:r>
+                <a:r>
+                  <a:rPr lang="zh-TW" altLang="en-US" sz="1200" b="0" i="0" u="none" strike="noStrike" kern="1200" dirty="0">
+                    <a:solidFill>
+                      <a:schemeClr val="tx1"/>
+                    </a:solidFill>
+                    <a:effectLst/>
+                    <a:latin typeface="+mn-lt"/>
+                    <a:ea typeface="+mn-ea"/>
+                    <a:cs typeface="+mn-cs"/>
+                  </a:rPr>
+                  <a:t>減</a:t>
+                </a:r>
+                <a:r>
+                  <a:rPr lang="en-US" altLang="zh-TW" sz="1200" b="0" i="0" u="none" strike="noStrike" kern="1200" dirty="0">
+                    <a:solidFill>
+                      <a:schemeClr val="tx1"/>
+                    </a:solidFill>
+                    <a:effectLst/>
+                    <a:latin typeface="+mn-lt"/>
+                    <a:ea typeface="+mn-ea"/>
+                    <a:cs typeface="+mn-cs"/>
+                  </a:rPr>
+                  <a:t>N</a:t>
+                </a:r>
+                <a:r>
+                  <a:rPr lang="zh-TW" altLang="en-US" sz="1200" b="0" i="0" u="none" strike="noStrike" kern="1200" dirty="0">
+                    <a:solidFill>
+                      <a:schemeClr val="tx1"/>
+                    </a:solidFill>
+                    <a:effectLst/>
+                    <a:latin typeface="+mn-lt"/>
+                    <a:ea typeface="+mn-ea"/>
+                    <a:cs typeface="+mn-cs"/>
+                  </a:rPr>
+                  <a:t>）時，此誤差會被完美抵銷。</a:t>
+                </a:r>
+                <a:endParaRPr lang="zh-TW" altLang="en-US" dirty="0">
+                  <a:effectLst/>
+                </a:endParaRPr>
+              </a:p>
+            </p:txBody>
+          </p:sp>
+        </mc:Fallback>
+      </mc:AlternateContent>
+      <p:sp>
+        <p:nvSpPr>
+          <p:cNvPr id="4" name="投影片編號版面配置區 3"/>
+          <p:cNvSpPr>
+            <a:spLocks noGrp="1"/>
+          </p:cNvSpPr>
+          <p:nvPr>
+            <p:ph type="sldNum" idx="35"/>
+          </p:nvPr>
+        </p:nvSpPr>
+        <p:spPr/>
+        <p:txBody>
+          <a:bodyPr/>
+          <a:lstStyle/>
+          <a:p>
+            <a:pPr indent="0" algn="r">
+              <a:buNone/>
+            </a:pPr>
+            <a:fld id="{607342CF-35FB-406E-8734-9FDFFECECBEF}" type="slidenum">
+              <a:rPr lang="en-US" sz="1400" b="0" strike="noStrike" spc="-1" smtClean="0">
+                <a:solidFill>
+                  <a:srgbClr val="000000"/>
+                </a:solidFill>
+                <a:latin typeface="Times New Roman"/>
+              </a:rPr>
+              <a:t>4</a:t>
+            </a:fld>
+            <a:endParaRPr lang="en-US" sz="1400" b="0" strike="noStrike" spc="-1">
+              <a:solidFill>
+                <a:srgbClr val="000000"/>
+              </a:solidFill>
+              <a:latin typeface="Times New Roman"/>
+            </a:endParaRPr>
+          </a:p>
+        </p:txBody>
+      </p:sp>
+    </p:spTree>
+    <p:extLst>
+      <p:ext uri="{BB962C8B-B14F-4D97-AF65-F5344CB8AC3E}">
+        <p14:creationId xmlns:p14="http://schemas.microsoft.com/office/powerpoint/2010/main" val="3734076173"/>
+      </p:ext>
+    </p:extLst>
+  </p:cSld>
+  <p:clrMapOvr>
+    <a:masterClrMapping/>
+  </p:clrMapOvr>
+</p:notes>
+</file>
+
 <file path=ppt/slideLayouts/slideLayout1.xml><?xml version="1.0" encoding="utf-8"?>
 <p:sldLayout xmlns:a="http://schemas.openxmlformats.org/drawingml/2006/main" xmlns:r="http://schemas.openxmlformats.org/officeDocument/2006/relationships" xmlns:p="http://schemas.openxmlformats.org/presentationml/2006/main" type="title" preserve="1">
   <p:cSld name="TITLE">
@@ -7674,6 +9685,705 @@
   <p:cSld>
     <p:spTree>
       <p:nvGrpSpPr>
+        <p:cNvPr id="1" name="">
+          <a:extLst>
+            <a:ext uri="{FF2B5EF4-FFF2-40B4-BE49-F238E27FC236}">
+              <a16:creationId xmlns:a16="http://schemas.microsoft.com/office/drawing/2014/main" id="{2C0710B4-A7EA-2DFC-F7A3-8DCE98731E52}"/>
+            </a:ext>
+          </a:extLst>
+        </p:cNvPr>
+        <p:cNvGrpSpPr/>
+        <p:nvPr/>
+      </p:nvGrpSpPr>
+      <p:grpSpPr>
+        <a:xfrm>
+          <a:off x="0" y="0"/>
+          <a:ext cx="0" cy="0"/>
+          <a:chOff x="0" y="0"/>
+          <a:chExt cx="0" cy="0"/>
+        </a:xfrm>
+      </p:grpSpPr>
+      <p:sp>
+        <p:nvSpPr>
+          <p:cNvPr id="2" name="標題 1">
+            <a:extLst>
+              <a:ext uri="{FF2B5EF4-FFF2-40B4-BE49-F238E27FC236}">
+                <a16:creationId xmlns:a16="http://schemas.microsoft.com/office/drawing/2014/main" id="{5B295FC3-CC32-A8CA-DBC4-95A659AFD728}"/>
+              </a:ext>
+            </a:extLst>
+          </p:cNvPr>
+          <p:cNvSpPr>
+            <a:spLocks noGrp="1"/>
+          </p:cNvSpPr>
+          <p:nvPr>
+            <p:ph type="title"/>
+          </p:nvPr>
+        </p:nvSpPr>
+        <p:spPr/>
+        <p:txBody>
+          <a:bodyPr/>
+          <a:lstStyle/>
+          <a:p>
+            <a:r>
+              <a:rPr lang="en-US" b="1" spc="-1" dirty="0">
+                <a:solidFill>
+                  <a:srgbClr val="DDDDDD"/>
+                </a:solidFill>
+                <a:latin typeface="Calibri"/>
+                <a:ea typeface="Calibri"/>
+              </a:rPr>
+              <a:t>Software Design Flow</a:t>
+            </a:r>
+            <a:endParaRPr lang="en-US" dirty="0"/>
+          </a:p>
+        </p:txBody>
+      </p:sp>
+      <p:sp>
+        <p:nvSpPr>
+          <p:cNvPr id="10" name="文字方塊 9">
+            <a:extLst>
+              <a:ext uri="{FF2B5EF4-FFF2-40B4-BE49-F238E27FC236}">
+                <a16:creationId xmlns:a16="http://schemas.microsoft.com/office/drawing/2014/main" id="{8E84174D-0F14-35A9-FC6C-2F4BA35D3324}"/>
+              </a:ext>
+            </a:extLst>
+          </p:cNvPr>
+          <p:cNvSpPr txBox="1"/>
+          <p:nvPr/>
+        </p:nvSpPr>
+        <p:spPr>
+          <a:xfrm>
+            <a:off x="598394" y="1707776"/>
+            <a:ext cx="10972080" cy="3416320"/>
+          </a:xfrm>
+          <a:prstGeom prst="rect">
+            <a:avLst/>
+          </a:prstGeom>
+          <a:noFill/>
+        </p:spPr>
+        <p:txBody>
+          <a:bodyPr wrap="square" rtlCol="0">
+            <a:spAutoFit/>
+          </a:bodyPr>
+          <a:lstStyle/>
+          <a:p>
+            <a:r>
+              <a:rPr lang="en-US" dirty="0">
+                <a:latin typeface="Times New Roman" panose="02020603050405020304" pitchFamily="18" charset="0"/>
+                <a:cs typeface="Times New Roman" panose="02020603050405020304" pitchFamily="18" charset="0"/>
+              </a:rPr>
+              <a:t>Two development approaches: </a:t>
+            </a:r>
+          </a:p>
+          <a:p>
+            <a:pPr marL="457200" indent="-457200">
+              <a:buFont typeface="+mj-lt"/>
+              <a:buAutoNum type="arabicPeriod"/>
+            </a:pPr>
+            <a:r>
+              <a:rPr lang="en-US" dirty="0">
+                <a:latin typeface="Times New Roman" panose="02020603050405020304" pitchFamily="18" charset="0"/>
+                <a:cs typeface="Times New Roman" panose="02020603050405020304" pitchFamily="18" charset="0"/>
+              </a:rPr>
+              <a:t>Xilinx Vitis + Embedded SW Libraries </a:t>
+            </a:r>
+          </a:p>
+          <a:p>
+            <a:pPr marL="914400" lvl="1" indent="-457200">
+              <a:buFont typeface="Arial" panose="020B0604020202020204" pitchFamily="34" charset="0"/>
+              <a:buChar char="•"/>
+            </a:pPr>
+            <a:r>
+              <a:rPr lang="en-US" dirty="0">
+                <a:latin typeface="Times New Roman" panose="02020603050405020304" pitchFamily="18" charset="0"/>
+                <a:cs typeface="Times New Roman" panose="02020603050405020304" pitchFamily="18" charset="0"/>
+              </a:rPr>
+              <a:t>Official IDE with </a:t>
+            </a:r>
+            <a:r>
+              <a:rPr lang="en-US" dirty="0">
+                <a:solidFill>
+                  <a:srgbClr val="FF0000"/>
+                </a:solidFill>
+                <a:latin typeface="Times New Roman" panose="02020603050405020304" pitchFamily="18" charset="0"/>
+                <a:cs typeface="Times New Roman" panose="02020603050405020304" pitchFamily="18" charset="0"/>
+              </a:rPr>
+              <a:t>BSP auto-generation</a:t>
+            </a:r>
+          </a:p>
+          <a:p>
+            <a:pPr marL="914400" lvl="1" indent="-457200">
+              <a:buFont typeface="Arial" panose="020B0604020202020204" pitchFamily="34" charset="0"/>
+              <a:buChar char="•"/>
+            </a:pPr>
+            <a:r>
+              <a:rPr lang="en-US" dirty="0">
+                <a:latin typeface="Times New Roman" panose="02020603050405020304" pitchFamily="18" charset="0"/>
+                <a:cs typeface="Times New Roman" panose="02020603050405020304" pitchFamily="18" charset="0"/>
+              </a:rPr>
+              <a:t>Includes </a:t>
+            </a:r>
+            <a:r>
+              <a:rPr lang="en-US" dirty="0">
+                <a:solidFill>
+                  <a:srgbClr val="FF0000"/>
+                </a:solidFill>
+                <a:latin typeface="Times New Roman" panose="02020603050405020304" pitchFamily="18" charset="0"/>
+                <a:cs typeface="Times New Roman" panose="02020603050405020304" pitchFamily="18" charset="0"/>
+              </a:rPr>
+              <a:t>drivers for all AXI peripherals </a:t>
+            </a:r>
+            <a:r>
+              <a:rPr lang="en-US" dirty="0">
+                <a:latin typeface="Times New Roman" panose="02020603050405020304" pitchFamily="18" charset="0"/>
+                <a:cs typeface="Times New Roman" panose="02020603050405020304" pitchFamily="18" charset="0"/>
+              </a:rPr>
+              <a:t>(GPIO, UART, Timer, SPI, EMC) </a:t>
+            </a:r>
+          </a:p>
+          <a:p>
+            <a:pPr marL="914400" lvl="1" indent="-457200">
+              <a:buFont typeface="Arial" panose="020B0604020202020204" pitchFamily="34" charset="0"/>
+              <a:buChar char="•"/>
+            </a:pPr>
+            <a:endParaRPr lang="en-US" dirty="0">
+              <a:latin typeface="Times New Roman" panose="02020603050405020304" pitchFamily="18" charset="0"/>
+              <a:cs typeface="Times New Roman" panose="02020603050405020304" pitchFamily="18" charset="0"/>
+            </a:endParaRPr>
+          </a:p>
+          <a:p>
+            <a:pPr marL="457200" indent="-457200">
+              <a:buFont typeface="+mj-lt"/>
+              <a:buAutoNum type="arabicPeriod"/>
+            </a:pPr>
+            <a:r>
+              <a:rPr lang="en-US" dirty="0">
+                <a:latin typeface="Times New Roman" panose="02020603050405020304" pitchFamily="18" charset="0"/>
+                <a:cs typeface="Times New Roman" panose="02020603050405020304" pitchFamily="18" charset="0"/>
+                <a:hlinkClick r:id="rId2"/>
+              </a:rPr>
+              <a:t>RISC-V GNU Toolchain </a:t>
+            </a:r>
+            <a:endParaRPr lang="en-US" dirty="0">
+              <a:latin typeface="Times New Roman" panose="02020603050405020304" pitchFamily="18" charset="0"/>
+              <a:cs typeface="Times New Roman" panose="02020603050405020304" pitchFamily="18" charset="0"/>
+            </a:endParaRPr>
+          </a:p>
+          <a:p>
+            <a:pPr marL="914400" lvl="1" indent="-457200">
+              <a:buFont typeface="Arial" panose="020B0604020202020204" pitchFamily="34" charset="0"/>
+              <a:buChar char="•"/>
+            </a:pPr>
+            <a:r>
+              <a:rPr lang="en-US" dirty="0">
+                <a:latin typeface="Times New Roman" panose="02020603050405020304" pitchFamily="18" charset="0"/>
+                <a:cs typeface="Times New Roman" panose="02020603050405020304" pitchFamily="18" charset="0"/>
+              </a:rPr>
+              <a:t>Standalone </a:t>
+            </a:r>
+            <a:r>
+              <a:rPr lang="en-US" dirty="0">
+                <a:solidFill>
+                  <a:srgbClr val="FF0000"/>
+                </a:solidFill>
+                <a:latin typeface="Times New Roman" panose="02020603050405020304" pitchFamily="18" charset="0"/>
+                <a:cs typeface="Times New Roman" panose="02020603050405020304" pitchFamily="18" charset="0"/>
+              </a:rPr>
+              <a:t>GCC cross-compiler </a:t>
+            </a:r>
+            <a:r>
+              <a:rPr lang="en-US" dirty="0">
+                <a:latin typeface="Times New Roman" panose="02020603050405020304" pitchFamily="18" charset="0"/>
+                <a:cs typeface="Times New Roman" panose="02020603050405020304" pitchFamily="18" charset="0"/>
+              </a:rPr>
+              <a:t>(riscv32-unknown-elf</a:t>
+            </a:r>
+            <a:r>
+              <a:rPr lang="zh-TW" altLang="en-US" dirty="0">
+                <a:latin typeface="Times New Roman" panose="02020603050405020304" pitchFamily="18" charset="0"/>
+                <a:cs typeface="Times New Roman" panose="02020603050405020304" pitchFamily="18" charset="0"/>
+              </a:rPr>
+              <a:t> </a:t>
+            </a:r>
+            <a:r>
+              <a:rPr lang="en-US" altLang="zh-TW" dirty="0">
+                <a:latin typeface="Times New Roman" panose="02020603050405020304" pitchFamily="18" charset="0"/>
+                <a:cs typeface="Times New Roman" panose="02020603050405020304" pitchFamily="18" charset="0"/>
+              </a:rPr>
+              <a:t>/ riscv64-unknown-elf</a:t>
+            </a:r>
+            <a:r>
+              <a:rPr lang="en-US" dirty="0">
+                <a:latin typeface="Times New Roman" panose="02020603050405020304" pitchFamily="18" charset="0"/>
+                <a:cs typeface="Times New Roman" panose="02020603050405020304" pitchFamily="18" charset="0"/>
+              </a:rPr>
+              <a:t>)</a:t>
+            </a:r>
+            <a:endParaRPr lang="en-US" altLang="zh-TW" dirty="0">
+              <a:latin typeface="Times New Roman" panose="02020603050405020304" pitchFamily="18" charset="0"/>
+              <a:cs typeface="Times New Roman" panose="02020603050405020304" pitchFamily="18" charset="0"/>
+            </a:endParaRPr>
+          </a:p>
+          <a:p>
+            <a:pPr marL="914400" lvl="1" indent="-457200">
+              <a:buFont typeface="Arial" panose="020B0604020202020204" pitchFamily="34" charset="0"/>
+              <a:buChar char="•"/>
+            </a:pPr>
+            <a:r>
+              <a:rPr lang="en-US" dirty="0">
+                <a:latin typeface="Times New Roman" panose="02020603050405020304" pitchFamily="18" charset="0"/>
+                <a:cs typeface="Times New Roman" panose="02020603050405020304" pitchFamily="18" charset="0"/>
+              </a:rPr>
+              <a:t>Full control over linker scripts, startup code, and register-level access </a:t>
+            </a:r>
+          </a:p>
+          <a:p>
+            <a:pPr marL="914400" lvl="1" indent="-457200">
+              <a:buFont typeface="Arial" panose="020B0604020202020204" pitchFamily="34" charset="0"/>
+              <a:buChar char="•"/>
+            </a:pPr>
+            <a:r>
+              <a:rPr lang="en-US" dirty="0">
+                <a:latin typeface="Times New Roman" panose="02020603050405020304" pitchFamily="18" charset="0"/>
+                <a:cs typeface="Times New Roman" panose="02020603050405020304" pitchFamily="18" charset="0"/>
+              </a:rPr>
+              <a:t>No dependency on Xilinx toolchain </a:t>
+            </a:r>
+          </a:p>
+          <a:p>
+            <a:pPr marL="914400" lvl="1" indent="-457200">
+              <a:buFont typeface="Arial" panose="020B0604020202020204" pitchFamily="34" charset="0"/>
+              <a:buChar char="•"/>
+            </a:pPr>
+            <a:endParaRPr lang="en-US" dirty="0">
+              <a:latin typeface="Times New Roman" panose="02020603050405020304" pitchFamily="18" charset="0"/>
+              <a:cs typeface="Times New Roman" panose="02020603050405020304" pitchFamily="18" charset="0"/>
+            </a:endParaRPr>
+          </a:p>
+          <a:p>
+            <a:r>
+              <a:rPr lang="en-US" dirty="0">
+                <a:latin typeface="Times New Roman" panose="02020603050405020304" pitchFamily="18" charset="0"/>
+                <a:cs typeface="Times New Roman" panose="02020603050405020304" pitchFamily="18" charset="0"/>
+              </a:rPr>
+              <a:t>Both target the </a:t>
+            </a:r>
+            <a:r>
+              <a:rPr lang="en-US" dirty="0" err="1">
+                <a:latin typeface="Times New Roman" panose="02020603050405020304" pitchFamily="18" charset="0"/>
+                <a:cs typeface="Times New Roman" panose="02020603050405020304" pitchFamily="18" charset="0"/>
+              </a:rPr>
+              <a:t>MicroBlaze</a:t>
+            </a:r>
+            <a:r>
+              <a:rPr lang="en-US" dirty="0">
+                <a:latin typeface="Times New Roman" panose="02020603050405020304" pitchFamily="18" charset="0"/>
+                <a:cs typeface="Times New Roman" panose="02020603050405020304" pitchFamily="18" charset="0"/>
+              </a:rPr>
+              <a:t> RISC-V soft processor running on the </a:t>
+            </a:r>
+            <a:r>
+              <a:rPr lang="en-US" dirty="0" err="1">
+                <a:latin typeface="Times New Roman" panose="02020603050405020304" pitchFamily="18" charset="0"/>
+                <a:cs typeface="Times New Roman" panose="02020603050405020304" pitchFamily="18" charset="0"/>
+              </a:rPr>
+              <a:t>Cmod</a:t>
+            </a:r>
+            <a:r>
+              <a:rPr lang="en-US" dirty="0">
+                <a:latin typeface="Times New Roman" panose="02020603050405020304" pitchFamily="18" charset="0"/>
+                <a:cs typeface="Times New Roman" panose="02020603050405020304" pitchFamily="18" charset="0"/>
+              </a:rPr>
+              <a:t> A7-35T.</a:t>
+            </a:r>
+          </a:p>
+          <a:p>
+            <a:endParaRPr lang="en-US" dirty="0"/>
+          </a:p>
+        </p:txBody>
+      </p:sp>
+      <p:pic>
+        <p:nvPicPr>
+          <p:cNvPr id="11" name="Picture 9" descr="Vitis Embedded (SDK)">
+            <a:extLst>
+              <a:ext uri="{FF2B5EF4-FFF2-40B4-BE49-F238E27FC236}">
+                <a16:creationId xmlns:a16="http://schemas.microsoft.com/office/drawing/2014/main" id="{395D4C6A-2461-00D5-D090-6455DB6BCC8D}"/>
+              </a:ext>
+            </a:extLst>
+          </p:cNvPr>
+          <p:cNvPicPr/>
+          <p:nvPr/>
+        </p:nvPicPr>
+        <p:blipFill>
+          <a:blip r:embed="rId3"/>
+          <a:stretch/>
+        </p:blipFill>
+        <p:spPr>
+          <a:xfrm>
+            <a:off x="9103606" y="1995259"/>
+            <a:ext cx="2884394" cy="1433741"/>
+          </a:xfrm>
+          <a:prstGeom prst="rect">
+            <a:avLst/>
+          </a:prstGeom>
+          <a:ln w="0">
+            <a:noFill/>
+          </a:ln>
+        </p:spPr>
+      </p:pic>
+      <p:pic>
+        <p:nvPicPr>
+          <p:cNvPr id="1026" name="Picture 2" descr="GitHub - riscv-collab/riscv-gnu-toolchain: GNU toolchain for RISC-V,  including GCC · GitHub">
+            <a:extLst>
+              <a:ext uri="{FF2B5EF4-FFF2-40B4-BE49-F238E27FC236}">
+                <a16:creationId xmlns:a16="http://schemas.microsoft.com/office/drawing/2014/main" id="{97817E2D-132A-2102-7023-6361BEA70299}"/>
+              </a:ext>
+            </a:extLst>
+          </p:cNvPr>
+          <p:cNvPicPr>
+            <a:picLocks noChangeAspect="1" noChangeArrowheads="1"/>
+          </p:cNvPicPr>
+          <p:nvPr/>
+        </p:nvPicPr>
+        <p:blipFill>
+          <a:blip r:embed="rId4" cstate="print">
+            <a:extLst>
+              <a:ext uri="{28A0092B-C50C-407E-A947-70E740481C1C}">
+                <a14:useLocalDpi xmlns:a14="http://schemas.microsoft.com/office/drawing/2010/main" val="0"/>
+              </a:ext>
+            </a:extLst>
+          </a:blip>
+          <a:srcRect/>
+          <a:stretch>
+            <a:fillRect/>
+          </a:stretch>
+        </p:blipFill>
+        <p:spPr bwMode="auto">
+          <a:xfrm>
+            <a:off x="8355053" y="4039720"/>
+            <a:ext cx="3632947" cy="1816474"/>
+          </a:xfrm>
+          <a:prstGeom prst="rect">
+            <a:avLst/>
+          </a:prstGeom>
+          <a:noFill/>
+          <a:extLst>
+            <a:ext uri="{909E8E84-426E-40DD-AFC4-6F175D3DCCD1}">
+              <a14:hiddenFill xmlns:a14="http://schemas.microsoft.com/office/drawing/2010/main">
+                <a:solidFill>
+                  <a:srgbClr val="FFFFFF"/>
+                </a:solidFill>
+              </a14:hiddenFill>
+            </a:ext>
+          </a:extLst>
+        </p:spPr>
+      </p:pic>
+    </p:spTree>
+    <p:extLst>
+      <p:ext uri="{BB962C8B-B14F-4D97-AF65-F5344CB8AC3E}">
+        <p14:creationId xmlns:p14="http://schemas.microsoft.com/office/powerpoint/2010/main" val="1696558866"/>
+      </p:ext>
+    </p:extLst>
+  </p:cSld>
+  <p:clrMapOvr>
+    <a:masterClrMapping/>
+  </p:clrMapOvr>
+</p:sld>
+</file>
+
+<file path=ppt/slides/slide11.xml><?xml version="1.0" encoding="utf-8"?>
+<p:sld xmlns:a="http://schemas.openxmlformats.org/drawingml/2006/main" xmlns:r="http://schemas.openxmlformats.org/officeDocument/2006/relationships" xmlns:p="http://schemas.openxmlformats.org/presentationml/2006/main">
+  <p:cSld>
+    <p:spTree>
+      <p:nvGrpSpPr>
+        <p:cNvPr id="1" name="">
+          <a:extLst>
+            <a:ext uri="{FF2B5EF4-FFF2-40B4-BE49-F238E27FC236}">
+              <a16:creationId xmlns:a16="http://schemas.microsoft.com/office/drawing/2014/main" id="{79822481-0E47-FAC7-65C9-D45B32C8AC37}"/>
+            </a:ext>
+          </a:extLst>
+        </p:cNvPr>
+        <p:cNvGrpSpPr/>
+        <p:nvPr/>
+      </p:nvGrpSpPr>
+      <p:grpSpPr>
+        <a:xfrm>
+          <a:off x="0" y="0"/>
+          <a:ext cx="0" cy="0"/>
+          <a:chOff x="0" y="0"/>
+          <a:chExt cx="0" cy="0"/>
+        </a:xfrm>
+      </p:grpSpPr>
+      <p:pic>
+        <p:nvPicPr>
+          <p:cNvPr id="6" name="圖片 5">
+            <a:extLst>
+              <a:ext uri="{FF2B5EF4-FFF2-40B4-BE49-F238E27FC236}">
+                <a16:creationId xmlns:a16="http://schemas.microsoft.com/office/drawing/2014/main" id="{27C74AF0-CE7A-939F-2FF9-CB98515113D2}"/>
+              </a:ext>
+            </a:extLst>
+          </p:cNvPr>
+          <p:cNvPicPr>
+            <a:picLocks noChangeAspect="1"/>
+          </p:cNvPicPr>
+          <p:nvPr/>
+        </p:nvPicPr>
+        <p:blipFill>
+          <a:blip r:embed="rId2"/>
+          <a:srcRect l="27315" b="17297"/>
+          <a:stretch>
+            <a:fillRect/>
+          </a:stretch>
+        </p:blipFill>
+        <p:spPr>
+          <a:xfrm>
+            <a:off x="7886700" y="1546486"/>
+            <a:ext cx="4150660" cy="4302985"/>
+          </a:xfrm>
+          <a:prstGeom prst="rect">
+            <a:avLst/>
+          </a:prstGeom>
+        </p:spPr>
+      </p:pic>
+      <p:sp>
+        <p:nvSpPr>
+          <p:cNvPr id="2" name="標題 1">
+            <a:extLst>
+              <a:ext uri="{FF2B5EF4-FFF2-40B4-BE49-F238E27FC236}">
+                <a16:creationId xmlns:a16="http://schemas.microsoft.com/office/drawing/2014/main" id="{7F13FDE3-9D9C-5A05-0C52-AF7B30EE3307}"/>
+              </a:ext>
+            </a:extLst>
+          </p:cNvPr>
+          <p:cNvSpPr>
+            <a:spLocks noGrp="1"/>
+          </p:cNvSpPr>
+          <p:nvPr>
+            <p:ph type="title"/>
+          </p:nvPr>
+        </p:nvSpPr>
+        <p:spPr/>
+        <p:txBody>
+          <a:bodyPr/>
+          <a:lstStyle/>
+          <a:p>
+            <a:r>
+              <a:rPr lang="en-US" b="1" spc="-1" dirty="0">
+                <a:solidFill>
+                  <a:srgbClr val="DDDDDD"/>
+                </a:solidFill>
+                <a:latin typeface="Calibri"/>
+                <a:ea typeface="Calibri"/>
+              </a:rPr>
+              <a:t>Software Design Flow</a:t>
+            </a:r>
+            <a:endParaRPr lang="en-US" dirty="0"/>
+          </a:p>
+        </p:txBody>
+      </p:sp>
+      <p:sp>
+        <p:nvSpPr>
+          <p:cNvPr id="10" name="文字方塊 9">
+            <a:extLst>
+              <a:ext uri="{FF2B5EF4-FFF2-40B4-BE49-F238E27FC236}">
+                <a16:creationId xmlns:a16="http://schemas.microsoft.com/office/drawing/2014/main" id="{53A019C3-E5A0-DA43-EC4B-B469BB026EFD}"/>
+              </a:ext>
+            </a:extLst>
+          </p:cNvPr>
+          <p:cNvSpPr txBox="1"/>
+          <p:nvPr/>
+        </p:nvSpPr>
+        <p:spPr>
+          <a:xfrm>
+            <a:off x="598394" y="1707776"/>
+            <a:ext cx="10972080" cy="2585323"/>
+          </a:xfrm>
+          <a:prstGeom prst="rect">
+            <a:avLst/>
+          </a:prstGeom>
+          <a:noFill/>
+        </p:spPr>
+        <p:txBody>
+          <a:bodyPr wrap="square" rtlCol="0">
+            <a:spAutoFit/>
+          </a:bodyPr>
+          <a:lstStyle/>
+          <a:p>
+            <a:r>
+              <a:rPr lang="en-US" b="1" dirty="0">
+                <a:latin typeface="Times New Roman" panose="02020603050405020304" pitchFamily="18" charset="0"/>
+                <a:cs typeface="Times New Roman" panose="02020603050405020304" pitchFamily="18" charset="0"/>
+              </a:rPr>
+              <a:t>XSDB (Xilinx System Debugger)</a:t>
+            </a:r>
+            <a:endParaRPr lang="en-US" dirty="0">
+              <a:latin typeface="Times New Roman" panose="02020603050405020304" pitchFamily="18" charset="0"/>
+              <a:cs typeface="Times New Roman" panose="02020603050405020304" pitchFamily="18" charset="0"/>
+            </a:endParaRPr>
+          </a:p>
+          <a:p>
+            <a:pPr marL="742950" lvl="1" indent="-285750">
+              <a:buFont typeface="Arial" panose="020B0604020202020204" pitchFamily="34" charset="0"/>
+              <a:buChar char="•"/>
+            </a:pPr>
+            <a:r>
+              <a:rPr lang="en-US" dirty="0">
+                <a:solidFill>
+                  <a:srgbClr val="FF0000"/>
+                </a:solidFill>
+                <a:latin typeface="Times New Roman" panose="02020603050405020304" pitchFamily="18" charset="0"/>
+                <a:cs typeface="Times New Roman" panose="02020603050405020304" pitchFamily="18" charset="0"/>
+              </a:rPr>
+              <a:t>Command-line debug interface over JTAG</a:t>
+            </a:r>
+          </a:p>
+          <a:p>
+            <a:pPr marL="742950" lvl="1" indent="-285750">
+              <a:buFont typeface="Arial" panose="020B0604020202020204" pitchFamily="34" charset="0"/>
+              <a:buChar char="•"/>
+            </a:pPr>
+            <a:r>
+              <a:rPr lang="en-US" dirty="0">
+                <a:latin typeface="Times New Roman" panose="02020603050405020304" pitchFamily="18" charset="0"/>
+                <a:cs typeface="Times New Roman" panose="02020603050405020304" pitchFamily="18" charset="0"/>
+              </a:rPr>
+              <a:t>Connects to </a:t>
+            </a:r>
+            <a:r>
+              <a:rPr lang="en-US" dirty="0" err="1">
+                <a:latin typeface="Times New Roman" panose="02020603050405020304" pitchFamily="18" charset="0"/>
+                <a:cs typeface="Times New Roman" panose="02020603050405020304" pitchFamily="18" charset="0"/>
+              </a:rPr>
+              <a:t>MicroBlaze</a:t>
+            </a:r>
+            <a:r>
+              <a:rPr lang="en-US" dirty="0">
+                <a:latin typeface="Times New Roman" panose="02020603050405020304" pitchFamily="18" charset="0"/>
+                <a:cs typeface="Times New Roman" panose="02020603050405020304" pitchFamily="18" charset="0"/>
+              </a:rPr>
+              <a:t> via MDM (</a:t>
+            </a:r>
+            <a:r>
+              <a:rPr lang="en-US" dirty="0" err="1">
+                <a:latin typeface="Times New Roman" panose="02020603050405020304" pitchFamily="18" charset="0"/>
+                <a:cs typeface="Times New Roman" panose="02020603050405020304" pitchFamily="18" charset="0"/>
+              </a:rPr>
+              <a:t>MicroBlaze</a:t>
+            </a:r>
+            <a:r>
+              <a:rPr lang="en-US" dirty="0">
+                <a:latin typeface="Times New Roman" panose="02020603050405020304" pitchFamily="18" charset="0"/>
+                <a:cs typeface="Times New Roman" panose="02020603050405020304" pitchFamily="18" charset="0"/>
+              </a:rPr>
+              <a:t> Debug Module)</a:t>
+            </a:r>
+          </a:p>
+          <a:p>
+            <a:pPr marL="742950" lvl="1" indent="-285750">
+              <a:buFont typeface="Arial" panose="020B0604020202020204" pitchFamily="34" charset="0"/>
+              <a:buChar char="•"/>
+            </a:pPr>
+            <a:r>
+              <a:rPr lang="en-US" dirty="0">
+                <a:latin typeface="Times New Roman" panose="02020603050405020304" pitchFamily="18" charset="0"/>
+                <a:cs typeface="Times New Roman" panose="02020603050405020304" pitchFamily="18" charset="0"/>
+              </a:rPr>
+              <a:t>Capabilities: </a:t>
+            </a:r>
+          </a:p>
+          <a:p>
+            <a:pPr marL="1200150" lvl="2" indent="-285750">
+              <a:buFont typeface="Arial" panose="020B0604020202020204" pitchFamily="34" charset="0"/>
+              <a:buChar char="•"/>
+            </a:pPr>
+            <a:r>
+              <a:rPr lang="en-US" dirty="0">
+                <a:solidFill>
+                  <a:srgbClr val="FF0000"/>
+                </a:solidFill>
+                <a:latin typeface="Times New Roman" panose="02020603050405020304" pitchFamily="18" charset="0"/>
+                <a:cs typeface="Times New Roman" panose="02020603050405020304" pitchFamily="18" charset="0"/>
+              </a:rPr>
+              <a:t>Download ELF directly to BRAM/SRAM — no Flash needed</a:t>
+            </a:r>
+          </a:p>
+          <a:p>
+            <a:pPr marL="1200150" lvl="2" indent="-285750">
+              <a:buFont typeface="Arial" panose="020B0604020202020204" pitchFamily="34" charset="0"/>
+              <a:buChar char="•"/>
+            </a:pPr>
+            <a:r>
+              <a:rPr lang="en-US" dirty="0">
+                <a:latin typeface="Times New Roman" panose="02020603050405020304" pitchFamily="18" charset="0"/>
+                <a:cs typeface="Times New Roman" panose="02020603050405020304" pitchFamily="18" charset="0"/>
+              </a:rPr>
+              <a:t>Halt, step, and resume CPU execution</a:t>
+            </a:r>
+          </a:p>
+          <a:p>
+            <a:pPr marL="1200150" lvl="2" indent="-285750">
+              <a:buFont typeface="Arial" panose="020B0604020202020204" pitchFamily="34" charset="0"/>
+              <a:buChar char="•"/>
+            </a:pPr>
+            <a:r>
+              <a:rPr lang="en-US" dirty="0">
+                <a:latin typeface="Times New Roman" panose="02020603050405020304" pitchFamily="18" charset="0"/>
+                <a:cs typeface="Times New Roman" panose="02020603050405020304" pitchFamily="18" charset="0"/>
+              </a:rPr>
+              <a:t>Read/write memory and registers in real time</a:t>
+            </a:r>
+          </a:p>
+          <a:p>
+            <a:pPr marL="742950" lvl="1" indent="-285750">
+              <a:buFont typeface="Arial" panose="020B0604020202020204" pitchFamily="34" charset="0"/>
+              <a:buChar char="•"/>
+            </a:pPr>
+            <a:r>
+              <a:rPr lang="en-US" dirty="0">
+                <a:latin typeface="Times New Roman" panose="02020603050405020304" pitchFamily="18" charset="0"/>
+                <a:cs typeface="Times New Roman" panose="02020603050405020304" pitchFamily="18" charset="0"/>
+              </a:rPr>
+              <a:t>Enables rapid code-test-fix cycles during development</a:t>
+            </a:r>
+          </a:p>
+          <a:p>
+            <a:pPr marL="742950" lvl="1" indent="-285750">
+              <a:buFont typeface="Arial" panose="020B0604020202020204" pitchFamily="34" charset="0"/>
+              <a:buChar char="•"/>
+            </a:pPr>
+            <a:r>
+              <a:rPr lang="en-US" dirty="0">
+                <a:solidFill>
+                  <a:srgbClr val="FF0000"/>
+                </a:solidFill>
+                <a:latin typeface="Times New Roman" panose="02020603050405020304" pitchFamily="18" charset="0"/>
+                <a:cs typeface="Times New Roman" panose="02020603050405020304" pitchFamily="18" charset="0"/>
+              </a:rPr>
+              <a:t>No bootloader required </a:t>
+            </a:r>
+            <a:endParaRPr lang="en-US" dirty="0">
+              <a:latin typeface="Times New Roman" panose="02020603050405020304" pitchFamily="18" charset="0"/>
+              <a:cs typeface="Times New Roman" panose="02020603050405020304" pitchFamily="18" charset="0"/>
+            </a:endParaRPr>
+          </a:p>
+        </p:txBody>
+      </p:sp>
+    </p:spTree>
+    <p:extLst>
+      <p:ext uri="{BB962C8B-B14F-4D97-AF65-F5344CB8AC3E}">
+        <p14:creationId xmlns:p14="http://schemas.microsoft.com/office/powerpoint/2010/main" val="3864692339"/>
+      </p:ext>
+    </p:extLst>
+  </p:cSld>
+  <p:clrMapOvr>
+    <a:masterClrMapping/>
+  </p:clrMapOvr>
+</p:sld>
+</file>
+
+<file path=ppt/slides/slide12.xml><?xml version="1.0" encoding="utf-8"?>
+<p:sld xmlns:a="http://schemas.openxmlformats.org/drawingml/2006/main" xmlns:r="http://schemas.openxmlformats.org/officeDocument/2006/relationships" xmlns:p="http://schemas.openxmlformats.org/presentationml/2006/main">
+  <p:cSld>
+    <p:spTree>
+      <p:nvGrpSpPr>
         <p:cNvPr id="1" name=""/>
         <p:cNvGrpSpPr/>
         <p:nvPr/>
@@ -7725,118 +10435,16 @@
               </a:tabLst>
             </a:pPr>
             <a:r>
-              <a:rPr lang="en-US" sz="4000" b="1" strike="noStrike" spc="-1">
+              <a:rPr lang="en-US" sz="4000" b="1" spc="-1" dirty="0">
                 <a:solidFill>
                   <a:srgbClr val="DDDDDD"/>
                 </a:solidFill>
                 <a:latin typeface="Calibri"/>
                 <a:ea typeface="Calibri"/>
               </a:rPr>
-              <a:t>Tool Chain</a:t>
-            </a:r>
-            <a:endParaRPr lang="en-US" sz="4000" b="0" strike="noStrike" spc="-1">
-              <a:solidFill>
-                <a:srgbClr val="000000"/>
-              </a:solidFill>
-              <a:latin typeface="Arial"/>
-            </a:endParaRPr>
-          </a:p>
-        </p:txBody>
-      </p:sp>
-      <p:sp>
-        <p:nvSpPr>
-          <p:cNvPr id="130" name="PlaceHolder 2"/>
-          <p:cNvSpPr>
-            <a:spLocks noGrp="1"/>
-          </p:cNvSpPr>
-          <p:nvPr>
-            <p:ph/>
-          </p:nvPr>
-        </p:nvSpPr>
-        <p:spPr>
-          <a:xfrm>
-            <a:off x="334800" y="1482840"/>
-            <a:ext cx="11615040" cy="5112720"/>
-          </a:xfrm>
-          <a:prstGeom prst="rect">
-            <a:avLst/>
-          </a:prstGeom>
-          <a:noFill/>
-          <a:ln w="0">
-            <a:noFill/>
-          </a:ln>
-        </p:spPr>
-        <p:txBody>
-          <a:bodyPr lIns="91440" tIns="45720" rIns="91440" bIns="45720" anchor="t">
-            <a:noAutofit/>
-          </a:bodyPr>
-          <a:lstStyle/>
-          <a:p>
-            <a:pPr marL="457200" indent="-343080">
-              <a:lnSpc>
-                <a:spcPct val="100000"/>
-              </a:lnSpc>
-              <a:spcBef>
-                <a:spcPts val="360"/>
-              </a:spcBef>
-              <a:buClr>
-                <a:srgbClr val="000000"/>
-              </a:buClr>
-              <a:buFont typeface="Times New Roman"/>
-              <a:buChar char="•"/>
-            </a:pPr>
-            <a:r>
-              <a:rPr lang="en-US" sz="2800" b="0" strike="noStrike" spc="-1" dirty="0" err="1">
-                <a:solidFill>
-                  <a:schemeClr val="dk1"/>
-                </a:solidFill>
-                <a:latin typeface="Times New Roman"/>
-                <a:ea typeface="Times New Roman"/>
-              </a:rPr>
-              <a:t>Vivado</a:t>
-            </a:r>
-            <a:r>
-              <a:rPr lang="en-US" sz="2800" b="0" strike="noStrike" spc="-1" dirty="0">
-                <a:solidFill>
-                  <a:schemeClr val="dk1"/>
-                </a:solidFill>
-                <a:latin typeface="Times New Roman"/>
-                <a:ea typeface="Times New Roman"/>
-              </a:rPr>
-              <a:t> for FPGA Design (RTL → Bitstream) </a:t>
-            </a:r>
-            <a:endParaRPr lang="en-US" sz="2800" b="0" strike="noStrike" spc="-1" dirty="0">
-              <a:solidFill>
-                <a:srgbClr val="000000"/>
-              </a:solidFill>
-              <a:latin typeface="Arial"/>
-            </a:endParaRPr>
-          </a:p>
-          <a:p>
-            <a:pPr marL="457200" indent="-343080">
-              <a:lnSpc>
-                <a:spcPct val="100000"/>
-              </a:lnSpc>
-              <a:spcBef>
-                <a:spcPts val="360"/>
-              </a:spcBef>
-              <a:buClr>
-                <a:srgbClr val="000000"/>
-              </a:buClr>
-              <a:buFont typeface="Times New Roman"/>
-              <a:buChar char="•"/>
-            </a:pPr>
-            <a:r>
-              <a:rPr lang="en-US" sz="2800" b="0" strike="noStrike" spc="-1" dirty="0">
-                <a:solidFill>
-                  <a:schemeClr val="dk1"/>
-                </a:solidFill>
-                <a:latin typeface="Times New Roman"/>
-                <a:ea typeface="Times New Roman"/>
-              </a:rPr>
-              <a:t>Vitis for Software Development (C/C++ → ELF)</a:t>
-            </a:r>
-            <a:endParaRPr lang="en-US" sz="2800" b="0" strike="noStrike" spc="-1" dirty="0">
+              <a:t>Standalone Boot Sequence</a:t>
+            </a:r>
+            <a:endParaRPr lang="en-US" sz="4000" b="0" strike="noStrike" spc="-1" dirty="0">
               <a:solidFill>
                 <a:srgbClr val="000000"/>
               </a:solidFill>
@@ -7897,52 +10505,6 @@
           </a:p>
         </p:txBody>
       </p:sp>
-      <p:pic>
-        <p:nvPicPr>
-          <p:cNvPr id="132" name="Picture 9" descr="Vitis Embedded (SDK)"/>
-          <p:cNvPicPr/>
-          <p:nvPr/>
-        </p:nvPicPr>
-        <p:blipFill>
-          <a:blip r:embed="rId2"/>
-          <a:stretch/>
-        </p:blipFill>
-        <p:spPr>
-          <a:xfrm>
-            <a:off x="6095880" y="3166200"/>
-            <a:ext cx="5108040" cy="2873160"/>
-          </a:xfrm>
-          <a:prstGeom prst="rect">
-            <a:avLst/>
-          </a:prstGeom>
-          <a:ln w="0">
-            <a:noFill/>
-          </a:ln>
-        </p:spPr>
-      </p:pic>
-      <p:pic>
-        <p:nvPicPr>
-          <p:cNvPr id="133" name="Picture 11" descr="AMD Vivado Design Suite: Redefining FPGA and SoC Development - Microchip USA"/>
-          <p:cNvPicPr/>
-          <p:nvPr/>
-        </p:nvPicPr>
-        <p:blipFill>
-          <a:blip r:embed="rId3"/>
-          <a:stretch/>
-        </p:blipFill>
-        <p:spPr>
-          <a:xfrm>
-            <a:off x="1015920" y="3166200"/>
-            <a:ext cx="4632120" cy="2873160"/>
-          </a:xfrm>
-          <a:prstGeom prst="rect">
-            <a:avLst/>
-          </a:prstGeom>
-          <a:ln w="0">
-            <a:noFill/>
-          </a:ln>
-        </p:spPr>
-      </p:pic>
     </p:spTree>
   </p:cSld>
   <p:clrMapOvr>
@@ -8052,7 +10614,7 @@
         <p:spPr>
           <a:xfrm>
             <a:off x="572575" y="1468582"/>
-            <a:ext cx="9642764" cy="5171737"/>
+            <a:ext cx="11213772" cy="5174493"/>
           </a:xfrm>
           <a:prstGeom prst="rect">
             <a:avLst/>
@@ -8109,7 +10671,21 @@
                 <a:latin typeface="Times New Roman" panose="02020603050405020304" pitchFamily="18" charset="0"/>
                 <a:cs typeface="Times New Roman" panose="02020603050405020304" pitchFamily="18" charset="0"/>
               </a:rPr>
-              <a:t>GPIO</a:t>
+              <a:t>GPIO / Interrupt System / </a:t>
+            </a:r>
+            <a:r>
+              <a:rPr lang="zh-TW" altLang="en-US" sz="3200" dirty="0">
+                <a:latin typeface="Times New Roman" panose="02020603050405020304" pitchFamily="18" charset="0"/>
+                <a:cs typeface="Times New Roman" panose="02020603050405020304" pitchFamily="18" charset="0"/>
+              </a:rPr>
+              <a:t> </a:t>
+            </a:r>
+            <a:r>
+              <a:rPr lang="en-US" altLang="zh-TW" sz="3200" dirty="0">
+                <a:latin typeface="Times New Roman" panose="02020603050405020304" pitchFamily="18" charset="0"/>
+                <a:cs typeface="Times New Roman" panose="02020603050405020304" pitchFamily="18" charset="0"/>
+              </a:rPr>
+              <a:t>Timer &amp; PWM / XADC / UART</a:t>
             </a:r>
           </a:p>
           <a:p>
@@ -8125,7 +10701,7 @@
                 <a:latin typeface="Times New Roman" panose="02020603050405020304" pitchFamily="18" charset="0"/>
                 <a:cs typeface="Times New Roman" panose="02020603050405020304" pitchFamily="18" charset="0"/>
               </a:rPr>
-              <a:t>Interrupt System</a:t>
+              <a:t>Memory Hierarchy</a:t>
             </a:r>
           </a:p>
           <a:p>
@@ -8137,12 +10713,16 @@
               <a:buChar char="•"/>
             </a:pPr>
             <a:r>
-              <a:rPr lang="en-US" sz="3200" dirty="0">
+              <a:rPr lang="en-US" altLang="zh-TW" sz="3200" dirty="0">
                 <a:latin typeface="Times New Roman" panose="02020603050405020304" pitchFamily="18" charset="0"/>
                 <a:cs typeface="Times New Roman" panose="02020603050405020304" pitchFamily="18" charset="0"/>
               </a:rPr>
-              <a:t>Memory Hierarchy</a:t>
-            </a:r>
+              <a:t>Report</a:t>
+            </a:r>
+            <a:endParaRPr lang="en-US" sz="3200" dirty="0">
+              <a:latin typeface="Times New Roman" panose="02020603050405020304" pitchFamily="18" charset="0"/>
+              <a:cs typeface="Times New Roman" panose="02020603050405020304" pitchFamily="18" charset="0"/>
+            </a:endParaRPr>
           </a:p>
           <a:p>
             <a:pPr marL="285750" indent="-285750">
@@ -8153,16 +10733,12 @@
               <a:buChar char="•"/>
             </a:pPr>
             <a:r>
-              <a:rPr lang="en-US" altLang="zh-TW" sz="3200" dirty="0">
+              <a:rPr lang="en-US" sz="3200" dirty="0">
                 <a:latin typeface="Times New Roman" panose="02020603050405020304" pitchFamily="18" charset="0"/>
                 <a:cs typeface="Times New Roman" panose="02020603050405020304" pitchFamily="18" charset="0"/>
               </a:rPr>
-              <a:t>Report</a:t>
-            </a:r>
-            <a:endParaRPr lang="en-US" sz="3200" dirty="0">
-              <a:latin typeface="Times New Roman" panose="02020603050405020304" pitchFamily="18" charset="0"/>
-              <a:cs typeface="Times New Roman" panose="02020603050405020304" pitchFamily="18" charset="0"/>
-            </a:endParaRPr>
+              <a:t>Software Design Flow</a:t>
+            </a:r>
           </a:p>
           <a:p>
             <a:pPr marL="285750" indent="-285750">
@@ -8177,7 +10753,7 @@
                 <a:latin typeface="Times New Roman" panose="02020603050405020304" pitchFamily="18" charset="0"/>
                 <a:cs typeface="Times New Roman" panose="02020603050405020304" pitchFamily="18" charset="0"/>
               </a:rPr>
-              <a:t>Software Design Flow</a:t>
+              <a:t>Standalone Boot Sequence</a:t>
             </a:r>
           </a:p>
         </p:txBody>
@@ -8435,10 +11011,20 @@
             </a:pPr>
             <a:r>
               <a:rPr lang="en-US" sz="2400" dirty="0">
+                <a:solidFill>
+                  <a:srgbClr val="FF0000"/>
+                </a:solidFill>
                 <a:latin typeface="Times New Roman" panose="02020603050405020304" pitchFamily="18" charset="0"/>
                 <a:cs typeface="Times New Roman" panose="02020603050405020304" pitchFamily="18" charset="0"/>
               </a:rPr>
-              <a:t>Analog pins: 0–3.3 V input, scaled to 0–1 V via on-board voltage divider</a:t>
+              <a:t>Analog pins: 0–3.3 V input</a:t>
+            </a:r>
+            <a:r>
+              <a:rPr lang="en-US" sz="2400" dirty="0">
+                <a:latin typeface="Times New Roman" panose="02020603050405020304" pitchFamily="18" charset="0"/>
+                <a:cs typeface="Times New Roman" panose="02020603050405020304" pitchFamily="18" charset="0"/>
+              </a:rPr>
+              <a:t>, scaled to 0–1 V via on-board voltage divider</a:t>
             </a:r>
           </a:p>
           <a:p>
@@ -8608,7 +11194,7 @@
           <p:nvPr/>
         </p:nvPicPr>
         <p:blipFill>
-          <a:blip r:embed="rId2" cstate="print">
+          <a:blip r:embed="rId3" cstate="print">
             <a:extLst>
               <a:ext uri="{28A0092B-C50C-407E-A947-70E740481C1C}">
                 <a14:useLocalDpi xmlns:a14="http://schemas.microsoft.com/office/drawing/2010/main" val="0"/>
@@ -8622,7 +11208,7 @@
         </p:blipFill>
         <p:spPr bwMode="auto">
           <a:xfrm>
-            <a:off x="8675544" y="1865744"/>
+            <a:off x="8675544" y="2096655"/>
             <a:ext cx="1713864" cy="4761345"/>
           </a:xfrm>
           <a:prstGeom prst="rect">
@@ -8655,7 +11241,7 @@
           <p:nvPr/>
         </p:nvPicPr>
         <p:blipFill>
-          <a:blip r:embed="rId3">
+          <a:blip r:embed="rId4">
             <a:extLst>
               <a:ext uri="{28A0092B-C50C-407E-A947-70E740481C1C}">
                 <a14:useLocalDpi xmlns:a14="http://schemas.microsoft.com/office/drawing/2010/main" val="0"/>
@@ -8669,7 +11255,7 @@
         </p:blipFill>
         <p:spPr bwMode="auto">
           <a:xfrm>
-            <a:off x="1153740" y="2952007"/>
+            <a:off x="1153740" y="3182918"/>
             <a:ext cx="5583382" cy="2976746"/>
           </a:xfrm>
           <a:prstGeom prst="rect">
@@ -8701,7 +11287,7 @@
         </p:nvSpPr>
         <p:spPr>
           <a:xfrm>
-            <a:off x="5698837" y="2952007"/>
+            <a:off x="5698837" y="3182918"/>
             <a:ext cx="951345" cy="797957"/>
           </a:xfrm>
           <a:prstGeom prst="rect">
@@ -8756,7 +11342,7 @@
         </p:nvCxnSpPr>
         <p:spPr>
           <a:xfrm flipH="1" flipV="1">
-            <a:off x="6650182" y="3350986"/>
+            <a:off x="6650182" y="3581897"/>
             <a:ext cx="2025362" cy="1535050"/>
           </a:xfrm>
           <a:prstGeom prst="straightConnector1">
@@ -8784,6 +11370,1210 @@
           </a:fontRef>
         </p:style>
       </p:cxnSp>
+      <p:sp>
+        <p:nvSpPr>
+          <p:cNvPr id="3" name="文字方塊 2">
+            <a:extLst>
+              <a:ext uri="{FF2B5EF4-FFF2-40B4-BE49-F238E27FC236}">
+                <a16:creationId xmlns:a16="http://schemas.microsoft.com/office/drawing/2014/main" id="{1F7DC024-A10A-79FE-32CB-3318C34A6662}"/>
+              </a:ext>
+            </a:extLst>
+          </p:cNvPr>
+          <p:cNvSpPr txBox="1"/>
+          <p:nvPr/>
+        </p:nvSpPr>
+        <p:spPr>
+          <a:xfrm>
+            <a:off x="5637402" y="3204808"/>
+            <a:ext cx="65" cy="276999"/>
+          </a:xfrm>
+          <a:prstGeom prst="rect">
+            <a:avLst/>
+          </a:prstGeom>
+          <a:noFill/>
+        </p:spPr>
+        <p:txBody>
+          <a:bodyPr wrap="none" lIns="0" tIns="0" rIns="0" bIns="0" rtlCol="0">
+            <a:spAutoFit/>
+          </a:bodyPr>
+          <a:lstStyle/>
+          <a:p>
+            <a:endParaRPr lang="en-US" dirty="0"/>
+          </a:p>
+        </p:txBody>
+      </p:sp>
+      <mc:AlternateContent xmlns:mc="http://schemas.openxmlformats.org/markup-compatibility/2006">
+        <mc:Choice xmlns:a14="http://schemas.microsoft.com/office/drawing/2010/main" Requires="a14">
+          <p:sp>
+            <p:nvSpPr>
+              <p:cNvPr id="7" name="文字方塊 6">
+                <a:extLst>
+                  <a:ext uri="{FF2B5EF4-FFF2-40B4-BE49-F238E27FC236}">
+                    <a16:creationId xmlns:a16="http://schemas.microsoft.com/office/drawing/2014/main" id="{26DAE217-E7B8-68FF-438E-C041810D0F39}"/>
+                  </a:ext>
+                </a:extLst>
+              </p:cNvPr>
+              <p:cNvSpPr txBox="1"/>
+              <p:nvPr/>
+            </p:nvSpPr>
+            <p:spPr>
+              <a:xfrm>
+                <a:off x="1117896" y="1496840"/>
+                <a:ext cx="6270947" cy="571247"/>
+              </a:xfrm>
+              <a:prstGeom prst="rect">
+                <a:avLst/>
+              </a:prstGeom>
+              <a:noFill/>
+            </p:spPr>
+            <p:txBody>
+              <a:bodyPr wrap="none" lIns="0" tIns="0" rIns="0" bIns="0" rtlCol="0">
+                <a:spAutoFit/>
+              </a:bodyPr>
+              <a:lstStyle/>
+              <a:p>
+                <a14:m>
+                  <m:oMathPara xmlns:m="http://schemas.openxmlformats.org/officeDocument/2006/math">
+                    <m:oMathParaPr>
+                      <m:jc m:val="centerGroup"/>
+                    </m:oMathParaPr>
+                    <m:oMath xmlns:m="http://schemas.openxmlformats.org/officeDocument/2006/math">
+                      <m:sSub>
+                        <m:sSubPr>
+                          <m:ctrlPr>
+                            <a:rPr lang="en-US" i="1" smtClean="0">
+                              <a:latin typeface="Cambria Math" panose="02040503050406030204" pitchFamily="18" charset="0"/>
+                            </a:rPr>
+                          </m:ctrlPr>
+                        </m:sSubPr>
+                        <m:e>
+                          <m:r>
+                            <a:rPr lang="en-US" i="1">
+                              <a:latin typeface="Cambria Math" panose="02040503050406030204" pitchFamily="18" charset="0"/>
+                            </a:rPr>
+                            <m:t>𝑉</m:t>
+                          </m:r>
+                        </m:e>
+                        <m:sub>
+                          <m:r>
+                            <a:rPr lang="en-US" i="1">
+                              <a:latin typeface="Cambria Math" panose="02040503050406030204" pitchFamily="18" charset="0"/>
+                            </a:rPr>
+                            <m:t>𝐷𝐼𝑉</m:t>
+                          </m:r>
+                        </m:sub>
+                      </m:sSub>
+                      <m:r>
+                        <a:rPr lang="en-US" i="1">
+                          <a:latin typeface="Cambria Math" panose="02040503050406030204" pitchFamily="18" charset="0"/>
+                        </a:rPr>
+                        <m:t>=</m:t>
+                      </m:r>
+                      <m:sSub>
+                        <m:sSubPr>
+                          <m:ctrlPr>
+                            <a:rPr lang="en-US" i="1">
+                              <a:latin typeface="Cambria Math" panose="02040503050406030204" pitchFamily="18" charset="0"/>
+                            </a:rPr>
+                          </m:ctrlPr>
+                        </m:sSubPr>
+                        <m:e>
+                          <m:r>
+                            <a:rPr lang="en-US" i="1">
+                              <a:latin typeface="Cambria Math" panose="02040503050406030204" pitchFamily="18" charset="0"/>
+                            </a:rPr>
+                            <m:t>𝑉</m:t>
+                          </m:r>
+                        </m:e>
+                        <m:sub>
+                          <m:r>
+                            <a:rPr lang="en-US" i="1">
+                              <a:latin typeface="Cambria Math" panose="02040503050406030204" pitchFamily="18" charset="0"/>
+                            </a:rPr>
+                            <m:t>𝐴𝐼𝑁</m:t>
+                          </m:r>
+                        </m:sub>
+                      </m:sSub>
+                      <m:r>
+                        <a:rPr lang="en-US" i="1">
+                          <a:latin typeface="Cambria Math" panose="02040503050406030204" pitchFamily="18" charset="0"/>
+                        </a:rPr>
+                        <m:t>×</m:t>
+                      </m:r>
+                      <m:f>
+                        <m:fPr>
+                          <m:ctrlPr>
+                            <a:rPr lang="en-US" i="1">
+                              <a:latin typeface="Cambria Math" panose="02040503050406030204" pitchFamily="18" charset="0"/>
+                            </a:rPr>
+                          </m:ctrlPr>
+                        </m:fPr>
+                        <m:num>
+                          <m:sSub>
+                            <m:sSubPr>
+                              <m:ctrlPr>
+                                <a:rPr lang="en-US" i="1">
+                                  <a:latin typeface="Cambria Math" panose="02040503050406030204" pitchFamily="18" charset="0"/>
+                                </a:rPr>
+                              </m:ctrlPr>
+                            </m:sSubPr>
+                            <m:e>
+                              <m:r>
+                                <a:rPr lang="en-US" i="1">
+                                  <a:latin typeface="Cambria Math" panose="02040503050406030204" pitchFamily="18" charset="0"/>
+                                </a:rPr>
+                                <m:t>𝑅</m:t>
+                              </m:r>
+                            </m:e>
+                            <m:sub>
+                              <m:r>
+                                <a:rPr lang="en-US" i="1">
+                                  <a:latin typeface="Cambria Math" panose="02040503050406030204" pitchFamily="18" charset="0"/>
+                                </a:rPr>
+                                <m:t>2</m:t>
+                              </m:r>
+                            </m:sub>
+                          </m:sSub>
+                        </m:num>
+                        <m:den>
+                          <m:sSub>
+                            <m:sSubPr>
+                              <m:ctrlPr>
+                                <a:rPr lang="en-US" i="1">
+                                  <a:latin typeface="Cambria Math" panose="02040503050406030204" pitchFamily="18" charset="0"/>
+                                </a:rPr>
+                              </m:ctrlPr>
+                            </m:sSubPr>
+                            <m:e>
+                              <m:r>
+                                <a:rPr lang="en-US" i="1">
+                                  <a:latin typeface="Cambria Math" panose="02040503050406030204" pitchFamily="18" charset="0"/>
+                                </a:rPr>
+                                <m:t>𝑅</m:t>
+                              </m:r>
+                            </m:e>
+                            <m:sub>
+                              <m:r>
+                                <a:rPr lang="en-US" i="1">
+                                  <a:latin typeface="Cambria Math" panose="02040503050406030204" pitchFamily="18" charset="0"/>
+                                </a:rPr>
+                                <m:t>1</m:t>
+                              </m:r>
+                            </m:sub>
+                          </m:sSub>
+                          <m:r>
+                            <a:rPr lang="en-US" i="1">
+                              <a:latin typeface="Cambria Math" panose="02040503050406030204" pitchFamily="18" charset="0"/>
+                            </a:rPr>
+                            <m:t>+</m:t>
+                          </m:r>
+                          <m:sSub>
+                            <m:sSubPr>
+                              <m:ctrlPr>
+                                <a:rPr lang="en-US" i="1">
+                                  <a:latin typeface="Cambria Math" panose="02040503050406030204" pitchFamily="18" charset="0"/>
+                                </a:rPr>
+                              </m:ctrlPr>
+                            </m:sSubPr>
+                            <m:e>
+                              <m:r>
+                                <a:rPr lang="en-US" i="1">
+                                  <a:latin typeface="Cambria Math" panose="02040503050406030204" pitchFamily="18" charset="0"/>
+                                </a:rPr>
+                                <m:t>𝑅</m:t>
+                              </m:r>
+                            </m:e>
+                            <m:sub>
+                              <m:r>
+                                <a:rPr lang="en-US" i="1">
+                                  <a:latin typeface="Cambria Math" panose="02040503050406030204" pitchFamily="18" charset="0"/>
+                                </a:rPr>
+                                <m:t>2</m:t>
+                              </m:r>
+                            </m:sub>
+                          </m:sSub>
+                        </m:den>
+                      </m:f>
+                      <m:r>
+                        <a:rPr lang="en-US" i="1">
+                          <a:latin typeface="Cambria Math" panose="02040503050406030204" pitchFamily="18" charset="0"/>
+                        </a:rPr>
+                        <m:t>=</m:t>
+                      </m:r>
+                      <m:sSub>
+                        <m:sSubPr>
+                          <m:ctrlPr>
+                            <a:rPr lang="en-US" i="1">
+                              <a:latin typeface="Cambria Math" panose="02040503050406030204" pitchFamily="18" charset="0"/>
+                            </a:rPr>
+                          </m:ctrlPr>
+                        </m:sSubPr>
+                        <m:e>
+                          <m:r>
+                            <a:rPr lang="en-US" i="1">
+                              <a:latin typeface="Cambria Math" panose="02040503050406030204" pitchFamily="18" charset="0"/>
+                            </a:rPr>
+                            <m:t>𝑉</m:t>
+                          </m:r>
+                        </m:e>
+                        <m:sub>
+                          <m:r>
+                            <a:rPr lang="en-US" i="1">
+                              <a:latin typeface="Cambria Math" panose="02040503050406030204" pitchFamily="18" charset="0"/>
+                            </a:rPr>
+                            <m:t>𝐴𝐼𝑁</m:t>
+                          </m:r>
+                        </m:sub>
+                      </m:sSub>
+                      <m:r>
+                        <a:rPr lang="en-US" i="1">
+                          <a:latin typeface="Cambria Math" panose="02040503050406030204" pitchFamily="18" charset="0"/>
+                        </a:rPr>
+                        <m:t>×</m:t>
+                      </m:r>
+                      <m:f>
+                        <m:fPr>
+                          <m:ctrlPr>
+                            <a:rPr lang="en-US" i="1">
+                              <a:latin typeface="Cambria Math" panose="02040503050406030204" pitchFamily="18" charset="0"/>
+                            </a:rPr>
+                          </m:ctrlPr>
+                        </m:fPr>
+                        <m:num>
+                          <m:r>
+                            <a:rPr lang="en-US" i="1">
+                              <a:latin typeface="Cambria Math" panose="02040503050406030204" pitchFamily="18" charset="0"/>
+                            </a:rPr>
+                            <m:t>1 </m:t>
+                          </m:r>
+                          <m:r>
+                            <a:rPr lang="en-US" i="1">
+                              <a:latin typeface="Cambria Math" panose="02040503050406030204" pitchFamily="18" charset="0"/>
+                            </a:rPr>
+                            <m:t>𝑘</m:t>
+                          </m:r>
+                          <m:r>
+                            <m:rPr>
+                              <m:sty m:val="p"/>
+                            </m:rPr>
+                            <a:rPr lang="en-US" i="0">
+                              <a:latin typeface="Cambria Math" panose="02040503050406030204" pitchFamily="18" charset="0"/>
+                            </a:rPr>
+                            <m:t>Ω</m:t>
+                          </m:r>
+                        </m:num>
+                        <m:den>
+                          <m:r>
+                            <a:rPr lang="en-US" i="1">
+                              <a:latin typeface="Cambria Math" panose="02040503050406030204" pitchFamily="18" charset="0"/>
+                            </a:rPr>
+                            <m:t>2.32 </m:t>
+                          </m:r>
+                          <m:r>
+                            <a:rPr lang="en-US" i="1">
+                              <a:latin typeface="Cambria Math" panose="02040503050406030204" pitchFamily="18" charset="0"/>
+                            </a:rPr>
+                            <m:t>𝑘</m:t>
+                          </m:r>
+                          <m:r>
+                            <m:rPr>
+                              <m:sty m:val="p"/>
+                            </m:rPr>
+                            <a:rPr lang="en-US" i="0">
+                              <a:latin typeface="Cambria Math" panose="02040503050406030204" pitchFamily="18" charset="0"/>
+                            </a:rPr>
+                            <m:t>Ω</m:t>
+                          </m:r>
+                          <m:r>
+                            <a:rPr lang="en-US" i="1">
+                              <a:latin typeface="Cambria Math" panose="02040503050406030204" pitchFamily="18" charset="0"/>
+                            </a:rPr>
+                            <m:t>+1 </m:t>
+                          </m:r>
+                          <m:r>
+                            <a:rPr lang="en-US" i="1">
+                              <a:latin typeface="Cambria Math" panose="02040503050406030204" pitchFamily="18" charset="0"/>
+                            </a:rPr>
+                            <m:t>𝑘</m:t>
+                          </m:r>
+                          <m:r>
+                            <m:rPr>
+                              <m:sty m:val="p"/>
+                            </m:rPr>
+                            <a:rPr lang="en-US" i="0">
+                              <a:latin typeface="Cambria Math" panose="02040503050406030204" pitchFamily="18" charset="0"/>
+                            </a:rPr>
+                            <m:t>Ω</m:t>
+                          </m:r>
+                        </m:den>
+                      </m:f>
+                      <m:r>
+                        <a:rPr lang="en-US" i="1">
+                          <a:latin typeface="Cambria Math" panose="02040503050406030204" pitchFamily="18" charset="0"/>
+                        </a:rPr>
+                        <m:t>=</m:t>
+                      </m:r>
+                      <m:sSub>
+                        <m:sSubPr>
+                          <m:ctrlPr>
+                            <a:rPr lang="en-US" i="1">
+                              <a:latin typeface="Cambria Math" panose="02040503050406030204" pitchFamily="18" charset="0"/>
+                            </a:rPr>
+                          </m:ctrlPr>
+                        </m:sSubPr>
+                        <m:e>
+                          <m:r>
+                            <a:rPr lang="en-US" i="1">
+                              <a:latin typeface="Cambria Math" panose="02040503050406030204" pitchFamily="18" charset="0"/>
+                            </a:rPr>
+                            <m:t>𝑉</m:t>
+                          </m:r>
+                        </m:e>
+                        <m:sub>
+                          <m:r>
+                            <a:rPr lang="en-US" i="1">
+                              <a:latin typeface="Cambria Math" panose="02040503050406030204" pitchFamily="18" charset="0"/>
+                            </a:rPr>
+                            <m:t>𝐴𝐼𝑁</m:t>
+                          </m:r>
+                        </m:sub>
+                      </m:sSub>
+                      <m:r>
+                        <a:rPr lang="en-US" i="1">
+                          <a:latin typeface="Cambria Math" panose="02040503050406030204" pitchFamily="18" charset="0"/>
+                        </a:rPr>
+                        <m:t>×0.301</m:t>
+                      </m:r>
+                    </m:oMath>
+                  </m:oMathPara>
+                </a14:m>
+                <a:endParaRPr lang="en-US" dirty="0"/>
+              </a:p>
+            </p:txBody>
+          </p:sp>
+        </mc:Choice>
+        <mc:Fallback>
+          <p:sp>
+            <p:nvSpPr>
+              <p:cNvPr id="7" name="文字方塊 6">
+                <a:extLst>
+                  <a:ext uri="{FF2B5EF4-FFF2-40B4-BE49-F238E27FC236}">
+                    <a16:creationId xmlns:a16="http://schemas.microsoft.com/office/drawing/2014/main" id="{26DAE217-E7B8-68FF-438E-C041810D0F39}"/>
+                  </a:ext>
+                </a:extLst>
+              </p:cNvPr>
+              <p:cNvSpPr txBox="1">
+                <a:spLocks noRot="1" noChangeAspect="1" noMove="1" noResize="1" noEditPoints="1" noAdjustHandles="1" noChangeArrowheads="1" noChangeShapeType="1" noTextEdit="1"/>
+              </p:cNvSpPr>
+              <p:nvPr/>
+            </p:nvSpPr>
+            <p:spPr>
+              <a:xfrm>
+                <a:off x="1117896" y="1496840"/>
+                <a:ext cx="6270947" cy="571247"/>
+              </a:xfrm>
+              <a:prstGeom prst="rect">
+                <a:avLst/>
+              </a:prstGeom>
+              <a:blipFill>
+                <a:blip r:embed="rId5"/>
+                <a:stretch>
+                  <a:fillRect/>
+                </a:stretch>
+              </a:blipFill>
+            </p:spPr>
+            <p:txBody>
+              <a:bodyPr/>
+              <a:lstStyle/>
+              <a:p>
+                <a:r>
+                  <a:rPr lang="en-US">
+                    <a:noFill/>
+                  </a:rPr>
+                  <a:t> </a:t>
+                </a:r>
+              </a:p>
+            </p:txBody>
+          </p:sp>
+        </mc:Fallback>
+      </mc:AlternateContent>
+      <mc:AlternateContent xmlns:mc="http://schemas.openxmlformats.org/markup-compatibility/2006">
+        <mc:Choice xmlns:a14="http://schemas.microsoft.com/office/drawing/2010/main" Requires="a14">
+          <p:sp>
+            <p:nvSpPr>
+              <p:cNvPr id="8" name="文字方塊 7">
+                <a:extLst>
+                  <a:ext uri="{FF2B5EF4-FFF2-40B4-BE49-F238E27FC236}">
+                    <a16:creationId xmlns:a16="http://schemas.microsoft.com/office/drawing/2014/main" id="{B63B58FB-17A7-4663-F80B-416436348B30}"/>
+                  </a:ext>
+                </a:extLst>
+              </p:cNvPr>
+              <p:cNvSpPr txBox="1"/>
+              <p:nvPr/>
+            </p:nvSpPr>
+            <p:spPr>
+              <a:xfrm>
+                <a:off x="1117896" y="2194545"/>
+                <a:ext cx="2976071" cy="276999"/>
+              </a:xfrm>
+              <a:prstGeom prst="rect">
+                <a:avLst/>
+              </a:prstGeom>
+              <a:noFill/>
+            </p:spPr>
+            <p:txBody>
+              <a:bodyPr wrap="none" lIns="0" tIns="0" rIns="0" bIns="0" rtlCol="0">
+                <a:spAutoFit/>
+              </a:bodyPr>
+              <a:lstStyle/>
+              <a:p>
+                <a14:m>
+                  <m:oMathPara xmlns:m="http://schemas.openxmlformats.org/officeDocument/2006/math">
+                    <m:oMathParaPr>
+                      <m:jc m:val="centerGroup"/>
+                    </m:oMathParaPr>
+                    <m:oMath xmlns:m="http://schemas.openxmlformats.org/officeDocument/2006/math">
+                      <m:sSub>
+                        <m:sSubPr>
+                          <m:ctrlPr>
+                            <a:rPr lang="en-US" i="1" smtClean="0">
+                              <a:latin typeface="Cambria Math" panose="02040503050406030204" pitchFamily="18" charset="0"/>
+                            </a:rPr>
+                          </m:ctrlPr>
+                        </m:sSubPr>
+                        <m:e>
+                          <m:r>
+                            <a:rPr lang="en-US" i="1">
+                              <a:latin typeface="Cambria Math" panose="02040503050406030204" pitchFamily="18" charset="0"/>
+                            </a:rPr>
+                            <m:t>𝑉</m:t>
+                          </m:r>
+                        </m:e>
+                        <m:sub>
+                          <m:r>
+                            <a:rPr lang="en-US" i="1">
+                              <a:latin typeface="Cambria Math" panose="02040503050406030204" pitchFamily="18" charset="0"/>
+                            </a:rPr>
+                            <m:t>𝐷𝐼𝑉</m:t>
+                          </m:r>
+                        </m:sub>
+                      </m:sSub>
+                      <m:r>
+                        <a:rPr lang="en-US" i="1">
+                          <a:latin typeface="Cambria Math" panose="02040503050406030204" pitchFamily="18" charset="0"/>
+                        </a:rPr>
+                        <m:t>=3.3×0.301=0.994 </m:t>
+                      </m:r>
+                      <m:r>
+                        <a:rPr lang="en-US" i="1">
+                          <a:latin typeface="Cambria Math" panose="02040503050406030204" pitchFamily="18" charset="0"/>
+                        </a:rPr>
+                        <m:t>𝑉</m:t>
+                      </m:r>
+                    </m:oMath>
+                  </m:oMathPara>
+                </a14:m>
+                <a:endParaRPr lang="en-US" dirty="0"/>
+              </a:p>
+            </p:txBody>
+          </p:sp>
+        </mc:Choice>
+        <mc:Fallback>
+          <p:sp>
+            <p:nvSpPr>
+              <p:cNvPr id="8" name="文字方塊 7">
+                <a:extLst>
+                  <a:ext uri="{FF2B5EF4-FFF2-40B4-BE49-F238E27FC236}">
+                    <a16:creationId xmlns:a16="http://schemas.microsoft.com/office/drawing/2014/main" id="{B63B58FB-17A7-4663-F80B-416436348B30}"/>
+                  </a:ext>
+                </a:extLst>
+              </p:cNvPr>
+              <p:cNvSpPr txBox="1">
+                <a:spLocks noRot="1" noChangeAspect="1" noMove="1" noResize="1" noEditPoints="1" noAdjustHandles="1" noChangeArrowheads="1" noChangeShapeType="1" noTextEdit="1"/>
+              </p:cNvSpPr>
+              <p:nvPr/>
+            </p:nvSpPr>
+            <p:spPr>
+              <a:xfrm>
+                <a:off x="1117896" y="2194545"/>
+                <a:ext cx="2976071" cy="276999"/>
+              </a:xfrm>
+              <a:prstGeom prst="rect">
+                <a:avLst/>
+              </a:prstGeom>
+              <a:blipFill>
+                <a:blip r:embed="rId6"/>
+                <a:stretch>
+                  <a:fillRect l="-1227" r="-1022" b="-17778"/>
+                </a:stretch>
+              </a:blipFill>
+            </p:spPr>
+            <p:txBody>
+              <a:bodyPr/>
+              <a:lstStyle/>
+              <a:p>
+                <a:r>
+                  <a:rPr lang="en-US">
+                    <a:noFill/>
+                  </a:rPr>
+                  <a:t> </a:t>
+                </a:r>
+              </a:p>
+            </p:txBody>
+          </p:sp>
+        </mc:Fallback>
+      </mc:AlternateContent>
+      <mc:AlternateContent xmlns:mc="http://schemas.openxmlformats.org/markup-compatibility/2006">
+        <mc:Choice xmlns:a14="http://schemas.microsoft.com/office/drawing/2010/main" Requires="a14">
+          <p:sp>
+            <p:nvSpPr>
+              <p:cNvPr id="9" name="文字方塊 8">
+                <a:extLst>
+                  <a:ext uri="{FF2B5EF4-FFF2-40B4-BE49-F238E27FC236}">
+                    <a16:creationId xmlns:a16="http://schemas.microsoft.com/office/drawing/2014/main" id="{E006CC74-0C61-F9B0-99F6-6FE18DF2B808}"/>
+                  </a:ext>
+                </a:extLst>
+              </p:cNvPr>
+              <p:cNvSpPr txBox="1"/>
+              <p:nvPr/>
+            </p:nvSpPr>
+            <p:spPr>
+              <a:xfrm>
+                <a:off x="5171762" y="3152001"/>
+                <a:ext cx="480388" cy="276999"/>
+              </a:xfrm>
+              <a:prstGeom prst="rect">
+                <a:avLst/>
+              </a:prstGeom>
+              <a:noFill/>
+            </p:spPr>
+            <p:txBody>
+              <a:bodyPr wrap="none" lIns="0" tIns="0" rIns="0" bIns="0" rtlCol="0">
+                <a:spAutoFit/>
+              </a:bodyPr>
+              <a:lstStyle/>
+              <a:p>
+                <a14:m>
+                  <m:oMathPara xmlns:m="http://schemas.openxmlformats.org/officeDocument/2006/math">
+                    <m:oMathParaPr>
+                      <m:jc m:val="centerGroup"/>
+                    </m:oMathParaPr>
+                    <m:oMath xmlns:m="http://schemas.openxmlformats.org/officeDocument/2006/math">
+                      <m:sSub>
+                        <m:sSubPr>
+                          <m:ctrlPr>
+                            <a:rPr lang="en-US" i="1" smtClean="0">
+                              <a:latin typeface="Cambria Math" panose="02040503050406030204" pitchFamily="18" charset="0"/>
+                            </a:rPr>
+                          </m:ctrlPr>
+                        </m:sSubPr>
+                        <m:e>
+                          <m:r>
+                            <a:rPr lang="en-US" i="1">
+                              <a:latin typeface="Cambria Math" panose="02040503050406030204" pitchFamily="18" charset="0"/>
+                            </a:rPr>
+                            <m:t>𝑉</m:t>
+                          </m:r>
+                        </m:e>
+                        <m:sub>
+                          <m:r>
+                            <a:rPr lang="en-US" b="0" i="1" smtClean="0">
+                              <a:latin typeface="Cambria Math" panose="02040503050406030204" pitchFamily="18" charset="0"/>
+                            </a:rPr>
+                            <m:t>𝐴𝐼</m:t>
+                          </m:r>
+                          <m:r>
+                            <m:rPr>
+                              <m:sty m:val="p"/>
+                            </m:rPr>
+                            <a:rPr lang="en-US" b="0" i="1" smtClean="0">
+                              <a:latin typeface="Cambria Math" panose="02040503050406030204" pitchFamily="18" charset="0"/>
+                            </a:rPr>
+                            <m:t>N</m:t>
+                          </m:r>
+                        </m:sub>
+                      </m:sSub>
+                    </m:oMath>
+                  </m:oMathPara>
+                </a14:m>
+                <a:endParaRPr lang="en-US" dirty="0"/>
+              </a:p>
+            </p:txBody>
+          </p:sp>
+        </mc:Choice>
+        <mc:Fallback>
+          <p:sp>
+            <p:nvSpPr>
+              <p:cNvPr id="9" name="文字方塊 8">
+                <a:extLst>
+                  <a:ext uri="{FF2B5EF4-FFF2-40B4-BE49-F238E27FC236}">
+                    <a16:creationId xmlns:a16="http://schemas.microsoft.com/office/drawing/2014/main" id="{E006CC74-0C61-F9B0-99F6-6FE18DF2B808}"/>
+                  </a:ext>
+                </a:extLst>
+              </p:cNvPr>
+              <p:cNvSpPr txBox="1">
+                <a:spLocks noRot="1" noChangeAspect="1" noMove="1" noResize="1" noEditPoints="1" noAdjustHandles="1" noChangeArrowheads="1" noChangeShapeType="1" noTextEdit="1"/>
+              </p:cNvSpPr>
+              <p:nvPr/>
+            </p:nvSpPr>
+            <p:spPr>
+              <a:xfrm>
+                <a:off x="5171762" y="3152001"/>
+                <a:ext cx="480388" cy="276999"/>
+              </a:xfrm>
+              <a:prstGeom prst="rect">
+                <a:avLst/>
+              </a:prstGeom>
+              <a:blipFill>
+                <a:blip r:embed="rId7"/>
+                <a:stretch>
+                  <a:fillRect l="-8861" r="-3797" b="-17391"/>
+                </a:stretch>
+              </a:blipFill>
+            </p:spPr>
+            <p:txBody>
+              <a:bodyPr/>
+              <a:lstStyle/>
+              <a:p>
+                <a:r>
+                  <a:rPr lang="en-US">
+                    <a:noFill/>
+                  </a:rPr>
+                  <a:t> </a:t>
+                </a:r>
+              </a:p>
+            </p:txBody>
+          </p:sp>
+        </mc:Fallback>
+      </mc:AlternateContent>
+      <mc:AlternateContent xmlns:mc="http://schemas.openxmlformats.org/markup-compatibility/2006">
+        <mc:Choice xmlns:a14="http://schemas.microsoft.com/office/drawing/2010/main" Requires="a14">
+          <p:sp>
+            <p:nvSpPr>
+              <p:cNvPr id="12" name="文字方塊 11">
+                <a:extLst>
+                  <a:ext uri="{FF2B5EF4-FFF2-40B4-BE49-F238E27FC236}">
+                    <a16:creationId xmlns:a16="http://schemas.microsoft.com/office/drawing/2014/main" id="{4BBA61EE-48E1-70F8-E9BD-159CA976D98A}"/>
+                  </a:ext>
+                </a:extLst>
+              </p:cNvPr>
+              <p:cNvSpPr txBox="1"/>
+              <p:nvPr/>
+            </p:nvSpPr>
+            <p:spPr>
+              <a:xfrm>
+                <a:off x="4711760" y="4287333"/>
+                <a:ext cx="485454" cy="276999"/>
+              </a:xfrm>
+              <a:prstGeom prst="rect">
+                <a:avLst/>
+              </a:prstGeom>
+              <a:noFill/>
+            </p:spPr>
+            <p:txBody>
+              <a:bodyPr wrap="none" lIns="0" tIns="0" rIns="0" bIns="0" rtlCol="0">
+                <a:spAutoFit/>
+              </a:bodyPr>
+              <a:lstStyle/>
+              <a:p>
+                <a14:m>
+                  <m:oMathPara xmlns:m="http://schemas.openxmlformats.org/officeDocument/2006/math">
+                    <m:oMathParaPr>
+                      <m:jc m:val="centerGroup"/>
+                    </m:oMathParaPr>
+                    <m:oMath xmlns:m="http://schemas.openxmlformats.org/officeDocument/2006/math">
+                      <m:sSub>
+                        <m:sSubPr>
+                          <m:ctrlPr>
+                            <a:rPr lang="en-US" i="1" smtClean="0">
+                              <a:latin typeface="Cambria Math" panose="02040503050406030204" pitchFamily="18" charset="0"/>
+                            </a:rPr>
+                          </m:ctrlPr>
+                        </m:sSubPr>
+                        <m:e>
+                          <m:r>
+                            <a:rPr lang="en-US" i="1">
+                              <a:latin typeface="Cambria Math" panose="02040503050406030204" pitchFamily="18" charset="0"/>
+                            </a:rPr>
+                            <m:t>𝑉</m:t>
+                          </m:r>
+                        </m:e>
+                        <m:sub>
+                          <m:r>
+                            <m:rPr>
+                              <m:sty m:val="p"/>
+                            </m:rPr>
+                            <a:rPr lang="en-US" altLang="zh-TW" i="1" smtClean="0">
+                              <a:latin typeface="Cambria Math" panose="02040503050406030204" pitchFamily="18" charset="0"/>
+                            </a:rPr>
+                            <m:t>D</m:t>
+                          </m:r>
+                          <m:r>
+                            <m:rPr>
+                              <m:sty m:val="p"/>
+                            </m:rPr>
+                            <a:rPr lang="en-US" altLang="zh-TW" i="1">
+                              <a:latin typeface="Cambria Math" panose="02040503050406030204" pitchFamily="18" charset="0"/>
+                            </a:rPr>
+                            <m:t>I</m:t>
+                          </m:r>
+                          <m:r>
+                            <m:rPr>
+                              <m:sty m:val="p"/>
+                            </m:rPr>
+                            <a:rPr lang="en-US" altLang="zh-TW" i="1" smtClean="0">
+                              <a:latin typeface="Cambria Math" panose="02040503050406030204" pitchFamily="18" charset="0"/>
+                            </a:rPr>
+                            <m:t>V</m:t>
+                          </m:r>
+                        </m:sub>
+                      </m:sSub>
+                    </m:oMath>
+                  </m:oMathPara>
+                </a14:m>
+                <a:endParaRPr lang="en-US" dirty="0"/>
+              </a:p>
+            </p:txBody>
+          </p:sp>
+        </mc:Choice>
+        <mc:Fallback>
+          <p:sp>
+            <p:nvSpPr>
+              <p:cNvPr id="12" name="文字方塊 11">
+                <a:extLst>
+                  <a:ext uri="{FF2B5EF4-FFF2-40B4-BE49-F238E27FC236}">
+                    <a16:creationId xmlns:a16="http://schemas.microsoft.com/office/drawing/2014/main" id="{4BBA61EE-48E1-70F8-E9BD-159CA976D98A}"/>
+                  </a:ext>
+                </a:extLst>
+              </p:cNvPr>
+              <p:cNvSpPr txBox="1">
+                <a:spLocks noRot="1" noChangeAspect="1" noMove="1" noResize="1" noEditPoints="1" noAdjustHandles="1" noChangeArrowheads="1" noChangeShapeType="1" noTextEdit="1"/>
+              </p:cNvSpPr>
+              <p:nvPr/>
+            </p:nvSpPr>
+            <p:spPr>
+              <a:xfrm>
+                <a:off x="4711760" y="4287333"/>
+                <a:ext cx="485454" cy="276999"/>
+              </a:xfrm>
+              <a:prstGeom prst="rect">
+                <a:avLst/>
+              </a:prstGeom>
+              <a:blipFill>
+                <a:blip r:embed="rId8"/>
+                <a:stretch>
+                  <a:fillRect l="-11250" r="-1250" b="-17391"/>
+                </a:stretch>
+              </a:blipFill>
+            </p:spPr>
+            <p:txBody>
+              <a:bodyPr/>
+              <a:lstStyle/>
+              <a:p>
+                <a:r>
+                  <a:rPr lang="en-US">
+                    <a:noFill/>
+                  </a:rPr>
+                  <a:t> </a:t>
+                </a:r>
+              </a:p>
+            </p:txBody>
+          </p:sp>
+        </mc:Fallback>
+      </mc:AlternateContent>
+      <mc:AlternateContent xmlns:mc="http://schemas.openxmlformats.org/markup-compatibility/2006">
+        <mc:Choice xmlns:a14="http://schemas.microsoft.com/office/drawing/2010/main" Requires="a14">
+          <p:sp>
+            <p:nvSpPr>
+              <p:cNvPr id="13" name="文字方塊 12">
+                <a:extLst>
+                  <a:ext uri="{FF2B5EF4-FFF2-40B4-BE49-F238E27FC236}">
+                    <a16:creationId xmlns:a16="http://schemas.microsoft.com/office/drawing/2014/main" id="{9B881BEA-99B1-5C3A-42D8-613115AAE2FC}"/>
+                  </a:ext>
+                </a:extLst>
+              </p:cNvPr>
+              <p:cNvSpPr txBox="1"/>
+              <p:nvPr/>
+            </p:nvSpPr>
+            <p:spPr>
+              <a:xfrm>
+                <a:off x="1117896" y="2721044"/>
+                <a:ext cx="5047151" cy="286297"/>
+              </a:xfrm>
+              <a:prstGeom prst="rect">
+                <a:avLst/>
+              </a:prstGeom>
+              <a:noFill/>
+            </p:spPr>
+            <p:txBody>
+              <a:bodyPr wrap="none" lIns="0" tIns="0" rIns="0" bIns="0" rtlCol="0">
+                <a:spAutoFit/>
+              </a:bodyPr>
+              <a:lstStyle/>
+              <a:p>
+                <a14:m>
+                  <m:oMathPara xmlns:m="http://schemas.openxmlformats.org/officeDocument/2006/math">
+                    <m:oMathParaPr>
+                      <m:jc m:val="centerGroup"/>
+                    </m:oMathParaPr>
+                    <m:oMath xmlns:m="http://schemas.openxmlformats.org/officeDocument/2006/math">
+                      <m:sSub>
+                        <m:sSubPr>
+                          <m:ctrlPr>
+                            <a:rPr lang="en-US" i="1" smtClean="0">
+                              <a:latin typeface="Cambria Math" panose="02040503050406030204" pitchFamily="18" charset="0"/>
+                            </a:rPr>
+                          </m:ctrlPr>
+                        </m:sSubPr>
+                        <m:e>
+                          <m:r>
+                            <a:rPr lang="en-US" i="1">
+                              <a:latin typeface="Cambria Math" panose="02040503050406030204" pitchFamily="18" charset="0"/>
+                            </a:rPr>
+                            <m:t>𝑉</m:t>
+                          </m:r>
+                        </m:e>
+                        <m:sub>
+                          <m:r>
+                            <a:rPr lang="en-US" i="1">
+                              <a:latin typeface="Cambria Math" panose="02040503050406030204" pitchFamily="18" charset="0"/>
+                            </a:rPr>
+                            <m:t>𝑚𝑒𝑎𝑠𝑢𝑟𝑒𝑑</m:t>
+                          </m:r>
+                        </m:sub>
+                      </m:sSub>
+                      <m:r>
+                        <a:rPr lang="en-US" i="1">
+                          <a:latin typeface="Cambria Math" panose="02040503050406030204" pitchFamily="18" charset="0"/>
+                        </a:rPr>
+                        <m:t>=</m:t>
+                      </m:r>
+                      <m:sSub>
+                        <m:sSubPr>
+                          <m:ctrlPr>
+                            <a:rPr lang="en-US" i="1">
+                              <a:latin typeface="Cambria Math" panose="02040503050406030204" pitchFamily="18" charset="0"/>
+                            </a:rPr>
+                          </m:ctrlPr>
+                        </m:sSubPr>
+                        <m:e>
+                          <m:r>
+                            <a:rPr lang="en-US" i="1">
+                              <a:latin typeface="Cambria Math" panose="02040503050406030204" pitchFamily="18" charset="0"/>
+                            </a:rPr>
+                            <m:t>𝑉</m:t>
+                          </m:r>
+                        </m:e>
+                        <m:sub>
+                          <m:r>
+                            <a:rPr lang="en-US" i="1">
+                              <a:latin typeface="Cambria Math" panose="02040503050406030204" pitchFamily="18" charset="0"/>
+                            </a:rPr>
+                            <m:t>𝐴𝐷𝑥</m:t>
+                          </m:r>
+                          <m:r>
+                            <m:rPr>
+                              <m:lit/>
+                            </m:rPr>
+                            <a:rPr lang="en-US" i="1">
+                              <a:latin typeface="Cambria Math" panose="02040503050406030204" pitchFamily="18" charset="0"/>
+                            </a:rPr>
+                            <m:t>_</m:t>
+                          </m:r>
+                          <m:r>
+                            <a:rPr lang="en-US" i="1">
+                              <a:latin typeface="Cambria Math" panose="02040503050406030204" pitchFamily="18" charset="0"/>
+                            </a:rPr>
+                            <m:t>𝑃</m:t>
+                          </m:r>
+                        </m:sub>
+                      </m:sSub>
+                      <m:r>
+                        <a:rPr lang="en-US" i="1">
+                          <a:latin typeface="Cambria Math" panose="02040503050406030204" pitchFamily="18" charset="0"/>
+                        </a:rPr>
+                        <m:t>−</m:t>
+                      </m:r>
+                      <m:sSub>
+                        <m:sSubPr>
+                          <m:ctrlPr>
+                            <a:rPr lang="en-US" i="1">
+                              <a:latin typeface="Cambria Math" panose="02040503050406030204" pitchFamily="18" charset="0"/>
+                            </a:rPr>
+                          </m:ctrlPr>
+                        </m:sSubPr>
+                        <m:e>
+                          <m:r>
+                            <a:rPr lang="en-US" i="1">
+                              <a:latin typeface="Cambria Math" panose="02040503050406030204" pitchFamily="18" charset="0"/>
+                            </a:rPr>
+                            <m:t>𝑉</m:t>
+                          </m:r>
+                        </m:e>
+                        <m:sub>
+                          <m:r>
+                            <a:rPr lang="en-US" i="1">
+                              <a:latin typeface="Cambria Math" panose="02040503050406030204" pitchFamily="18" charset="0"/>
+                            </a:rPr>
+                            <m:t>𝐴𝐷𝑥</m:t>
+                          </m:r>
+                          <m:r>
+                            <m:rPr>
+                              <m:lit/>
+                            </m:rPr>
+                            <a:rPr lang="en-US" i="1">
+                              <a:latin typeface="Cambria Math" panose="02040503050406030204" pitchFamily="18" charset="0"/>
+                            </a:rPr>
+                            <m:t>_</m:t>
+                          </m:r>
+                          <m:r>
+                            <a:rPr lang="en-US" i="1">
+                              <a:latin typeface="Cambria Math" panose="02040503050406030204" pitchFamily="18" charset="0"/>
+                            </a:rPr>
+                            <m:t>𝑁</m:t>
+                          </m:r>
+                        </m:sub>
+                      </m:sSub>
+                      <m:r>
+                        <a:rPr lang="en-US" i="1">
+                          <a:latin typeface="Cambria Math" panose="02040503050406030204" pitchFamily="18" charset="0"/>
+                        </a:rPr>
+                        <m:t>≈</m:t>
+                      </m:r>
+                      <m:sSub>
+                        <m:sSubPr>
+                          <m:ctrlPr>
+                            <a:rPr lang="en-US" i="1">
+                              <a:latin typeface="Cambria Math" panose="02040503050406030204" pitchFamily="18" charset="0"/>
+                            </a:rPr>
+                          </m:ctrlPr>
+                        </m:sSubPr>
+                        <m:e>
+                          <m:r>
+                            <a:rPr lang="en-US" i="1">
+                              <a:latin typeface="Cambria Math" panose="02040503050406030204" pitchFamily="18" charset="0"/>
+                            </a:rPr>
+                            <m:t>𝑉</m:t>
+                          </m:r>
+                        </m:e>
+                        <m:sub>
+                          <m:r>
+                            <a:rPr lang="en-US" i="1">
+                              <a:latin typeface="Cambria Math" panose="02040503050406030204" pitchFamily="18" charset="0"/>
+                            </a:rPr>
+                            <m:t>𝐷𝐼𝑉</m:t>
+                          </m:r>
+                        </m:sub>
+                      </m:sSub>
+                      <m:r>
+                        <a:rPr lang="en-US" i="1">
+                          <a:latin typeface="Cambria Math" panose="02040503050406030204" pitchFamily="18" charset="0"/>
+                        </a:rPr>
+                        <m:t>−0=0.994 </m:t>
+                      </m:r>
+                      <m:r>
+                        <a:rPr lang="en-US" i="1">
+                          <a:latin typeface="Cambria Math" panose="02040503050406030204" pitchFamily="18" charset="0"/>
+                        </a:rPr>
+                        <m:t>𝑉</m:t>
+                      </m:r>
+                    </m:oMath>
+                  </m:oMathPara>
+                </a14:m>
+                <a:endParaRPr lang="en-US" dirty="0"/>
+              </a:p>
+            </p:txBody>
+          </p:sp>
+        </mc:Choice>
+        <mc:Fallback>
+          <p:sp>
+            <p:nvSpPr>
+              <p:cNvPr id="13" name="文字方塊 12">
+                <a:extLst>
+                  <a:ext uri="{FF2B5EF4-FFF2-40B4-BE49-F238E27FC236}">
+                    <a16:creationId xmlns:a16="http://schemas.microsoft.com/office/drawing/2014/main" id="{9B881BEA-99B1-5C3A-42D8-613115AAE2FC}"/>
+                  </a:ext>
+                </a:extLst>
+              </p:cNvPr>
+              <p:cNvSpPr txBox="1">
+                <a:spLocks noRot="1" noChangeAspect="1" noMove="1" noResize="1" noEditPoints="1" noAdjustHandles="1" noChangeArrowheads="1" noChangeShapeType="1" noTextEdit="1"/>
+              </p:cNvSpPr>
+              <p:nvPr/>
+            </p:nvSpPr>
+            <p:spPr>
+              <a:xfrm>
+                <a:off x="1117896" y="2721044"/>
+                <a:ext cx="5047151" cy="286297"/>
+              </a:xfrm>
+              <a:prstGeom prst="rect">
+                <a:avLst/>
+              </a:prstGeom>
+              <a:blipFill>
+                <a:blip r:embed="rId9"/>
+                <a:stretch>
+                  <a:fillRect l="-483" r="-604" b="-14894"/>
+                </a:stretch>
+              </a:blipFill>
+            </p:spPr>
+            <p:txBody>
+              <a:bodyPr/>
+              <a:lstStyle/>
+              <a:p>
+                <a:r>
+                  <a:rPr lang="en-US">
+                    <a:noFill/>
+                  </a:rPr>
+                  <a:t> </a:t>
+                </a:r>
+              </a:p>
+            </p:txBody>
+          </p:sp>
+        </mc:Fallback>
+      </mc:AlternateContent>
+      <p:sp>
+        <p:nvSpPr>
+          <p:cNvPr id="15" name="橢圓 14">
+            <a:extLst>
+              <a:ext uri="{FF2B5EF4-FFF2-40B4-BE49-F238E27FC236}">
+                <a16:creationId xmlns:a16="http://schemas.microsoft.com/office/drawing/2014/main" id="{D33EDBAE-F10B-60BF-1CFC-9F3670FA4EE1}"/>
+              </a:ext>
+            </a:extLst>
+          </p:cNvPr>
+          <p:cNvSpPr/>
+          <p:nvPr/>
+        </p:nvSpPr>
+        <p:spPr>
+          <a:xfrm>
+            <a:off x="4577536" y="4414409"/>
+            <a:ext cx="134224" cy="125835"/>
+          </a:xfrm>
+          <a:prstGeom prst="ellipse">
+            <a:avLst/>
+          </a:prstGeom>
+          <a:solidFill>
+            <a:schemeClr val="bg1"/>
+          </a:solidFill>
+          <a:ln>
+            <a:solidFill>
+              <a:schemeClr val="tx1"/>
+            </a:solidFill>
+          </a:ln>
+        </p:spPr>
+        <p:style>
+          <a:lnRef idx="2">
+            <a:schemeClr val="accent1">
+              <a:shade val="15000"/>
+            </a:schemeClr>
+          </a:lnRef>
+          <a:fillRef idx="1">
+            <a:schemeClr val="accent1"/>
+          </a:fillRef>
+          <a:effectRef idx="0">
+            <a:schemeClr val="accent1"/>
+          </a:effectRef>
+          <a:fontRef idx="minor">
+            <a:schemeClr val="lt1"/>
+          </a:fontRef>
+        </p:style>
+        <p:txBody>
+          <a:bodyPr rtlCol="0" anchor="ctr"/>
+          <a:lstStyle/>
+          <a:p>
+            <a:pPr algn="ctr"/>
+            <a:endParaRPr lang="en-US"/>
+          </a:p>
+        </p:txBody>
+      </p:sp>
+      <p:sp>
+        <p:nvSpPr>
+          <p:cNvPr id="16" name="矩形 15">
+            <a:extLst>
+              <a:ext uri="{FF2B5EF4-FFF2-40B4-BE49-F238E27FC236}">
+                <a16:creationId xmlns:a16="http://schemas.microsoft.com/office/drawing/2014/main" id="{706A72F4-4140-8F9C-947D-82D9E8D887BA}"/>
+              </a:ext>
+            </a:extLst>
+          </p:cNvPr>
+          <p:cNvSpPr/>
+          <p:nvPr/>
+        </p:nvSpPr>
+        <p:spPr>
+          <a:xfrm>
+            <a:off x="2650494" y="4197673"/>
+            <a:ext cx="800372" cy="1238987"/>
+          </a:xfrm>
+          <a:prstGeom prst="rect">
+            <a:avLst/>
+          </a:prstGeom>
+          <a:noFill/>
+          <a:ln>
+            <a:solidFill>
+              <a:srgbClr val="FF0000"/>
+            </a:solidFill>
+          </a:ln>
+        </p:spPr>
+        <p:style>
+          <a:lnRef idx="2">
+            <a:schemeClr val="accent1">
+              <a:shade val="15000"/>
+            </a:schemeClr>
+          </a:lnRef>
+          <a:fillRef idx="1">
+            <a:schemeClr val="accent1"/>
+          </a:fillRef>
+          <a:effectRef idx="0">
+            <a:schemeClr val="accent1"/>
+          </a:effectRef>
+          <a:fontRef idx="minor">
+            <a:schemeClr val="lt1"/>
+          </a:fontRef>
+        </p:style>
+        <p:txBody>
+          <a:bodyPr rtlCol="0" anchor="ctr"/>
+          <a:lstStyle/>
+          <a:p>
+            <a:pPr algn="ctr"/>
+            <a:endParaRPr lang="en-US"/>
+          </a:p>
+        </p:txBody>
+      </p:sp>
+      <p:sp>
+        <p:nvSpPr>
+          <p:cNvPr id="17" name="文字方塊 16">
+            <a:extLst>
+              <a:ext uri="{FF2B5EF4-FFF2-40B4-BE49-F238E27FC236}">
+                <a16:creationId xmlns:a16="http://schemas.microsoft.com/office/drawing/2014/main" id="{584986B5-5250-7B0B-12E9-1BA70559826F}"/>
+              </a:ext>
+            </a:extLst>
+          </p:cNvPr>
+          <p:cNvSpPr txBox="1"/>
+          <p:nvPr/>
+        </p:nvSpPr>
+        <p:spPr>
+          <a:xfrm>
+            <a:off x="2176081" y="3752840"/>
+            <a:ext cx="1640193" cy="369332"/>
+          </a:xfrm>
+          <a:prstGeom prst="rect">
+            <a:avLst/>
+          </a:prstGeom>
+          <a:noFill/>
+        </p:spPr>
+        <p:txBody>
+          <a:bodyPr wrap="none" rtlCol="0">
+            <a:spAutoFit/>
+          </a:bodyPr>
+          <a:lstStyle/>
+          <a:p>
+            <a:r>
+              <a:rPr lang="en-US" dirty="0">
+                <a:latin typeface="Times New Roman" panose="02020603050405020304" pitchFamily="18" charset="0"/>
+                <a:cs typeface="Times New Roman" panose="02020603050405020304" pitchFamily="18" charset="0"/>
+              </a:rPr>
+              <a:t>Filter Capacitor</a:t>
+            </a:r>
+          </a:p>
+        </p:txBody>
+      </p:sp>
     </p:spTree>
     <p:extLst>
       <p:ext uri="{BB962C8B-B14F-4D97-AF65-F5344CB8AC3E}">
@@ -14366,1057 +18156,6 @@
               </a:solidFill>
               <a:latin typeface="Arial"/>
             </a:endParaRPr>
-          </a:p>
-        </p:txBody>
-      </p:sp>
-      <p:sp>
-        <p:nvSpPr>
-          <p:cNvPr id="76" name="矩形 12">
-            <a:extLst>
-              <a:ext uri="{FF2B5EF4-FFF2-40B4-BE49-F238E27FC236}">
-                <a16:creationId xmlns:a16="http://schemas.microsoft.com/office/drawing/2014/main" id="{E94B38B7-078E-A53E-4500-8D8575A171F2}"/>
-              </a:ext>
-            </a:extLst>
-          </p:cNvPr>
-          <p:cNvSpPr/>
-          <p:nvPr/>
-        </p:nvSpPr>
-        <p:spPr>
-          <a:xfrm rot="16200000">
-            <a:off x="-1482979" y="4079962"/>
-            <a:ext cx="4367745" cy="254880"/>
-          </a:xfrm>
-          <a:prstGeom prst="rect">
-            <a:avLst/>
-          </a:prstGeom>
-          <a:solidFill>
-            <a:schemeClr val="tx1"/>
-          </a:solidFill>
-          <a:ln>
-            <a:solidFill>
-              <a:srgbClr val="516263"/>
-            </a:solidFill>
-            <a:round/>
-          </a:ln>
-        </p:spPr>
-        <p:style>
-          <a:lnRef idx="2">
-            <a:schemeClr val="accent1">
-              <a:shade val="15000"/>
-            </a:schemeClr>
-          </a:lnRef>
-          <a:fillRef idx="1">
-            <a:schemeClr val="accent1"/>
-          </a:fillRef>
-          <a:effectRef idx="0">
-            <a:schemeClr val="accent1"/>
-          </a:effectRef>
-          <a:fontRef idx="minor"/>
-        </p:style>
-        <p:txBody>
-          <a:bodyPr lIns="90000" tIns="45000" rIns="90000" bIns="45000" anchor="ctr">
-            <a:noAutofit/>
-          </a:bodyPr>
-          <a:lstStyle/>
-          <a:p>
-            <a:pPr algn="ctr">
-              <a:lnSpc>
-                <a:spcPct val="100000"/>
-              </a:lnSpc>
-            </a:pPr>
-            <a:r>
-              <a:rPr lang="en-US" sz="2000" b="0" strike="noStrike" spc="-1">
-                <a:solidFill>
-                  <a:schemeClr val="lt1"/>
-                </a:solidFill>
-                <a:latin typeface="Arial"/>
-                <a:ea typeface="Arial"/>
-              </a:rPr>
-              <a:t>AXI Interconnect (BUS)</a:t>
-            </a:r>
-            <a:endParaRPr lang="en-US" sz="2000" b="0" strike="noStrike" spc="-1">
-              <a:solidFill>
-                <a:srgbClr val="FFFFFF"/>
-              </a:solidFill>
-              <a:latin typeface="Arial"/>
-            </a:endParaRPr>
-          </a:p>
-        </p:txBody>
-      </p:sp>
-      <p:sp>
-        <p:nvSpPr>
-          <p:cNvPr id="2" name="矩形: 圓角 7">
-            <a:extLst>
-              <a:ext uri="{FF2B5EF4-FFF2-40B4-BE49-F238E27FC236}">
-                <a16:creationId xmlns:a16="http://schemas.microsoft.com/office/drawing/2014/main" id="{1B3E5CFF-6A0C-51F8-9EF9-D94C5306BE0B}"/>
-              </a:ext>
-            </a:extLst>
-          </p:cNvPr>
-          <p:cNvSpPr/>
-          <p:nvPr/>
-        </p:nvSpPr>
-        <p:spPr>
-          <a:xfrm>
-            <a:off x="5791200" y="2136667"/>
-            <a:ext cx="1209600" cy="1045080"/>
-          </a:xfrm>
-          <a:prstGeom prst="roundRect">
-            <a:avLst>
-              <a:gd name="adj" fmla="val 16667"/>
-            </a:avLst>
-          </a:prstGeom>
-          <a:solidFill>
-            <a:srgbClr val="BBE0E3"/>
-          </a:solidFill>
-          <a:ln>
-            <a:solidFill>
-              <a:srgbClr val="516263"/>
-            </a:solidFill>
-            <a:round/>
-          </a:ln>
-        </p:spPr>
-        <p:style>
-          <a:lnRef idx="2">
-            <a:schemeClr val="accent1">
-              <a:shade val="15000"/>
-            </a:schemeClr>
-          </a:lnRef>
-          <a:fillRef idx="1">
-            <a:schemeClr val="accent1"/>
-          </a:fillRef>
-          <a:effectRef idx="0">
-            <a:schemeClr val="accent1"/>
-          </a:effectRef>
-          <a:fontRef idx="minor"/>
-        </p:style>
-        <p:txBody>
-          <a:bodyPr lIns="90000" tIns="45000" rIns="90000" bIns="45000" anchor="ctr">
-            <a:noAutofit/>
-          </a:bodyPr>
-          <a:lstStyle/>
-          <a:p>
-            <a:pPr algn="ctr">
-              <a:lnSpc>
-                <a:spcPct val="100000"/>
-              </a:lnSpc>
-            </a:pPr>
-            <a:r>
-              <a:rPr lang="en-US" sz="1400" b="0" strike="noStrike" spc="-1" dirty="0">
-                <a:solidFill>
-                  <a:schemeClr val="dk1"/>
-                </a:solidFill>
-                <a:latin typeface="Arial"/>
-                <a:ea typeface="Arial"/>
-              </a:rPr>
-              <a:t>AXI Timer </a:t>
-            </a:r>
-          </a:p>
-          <a:p>
-            <a:pPr algn="ctr">
-              <a:lnSpc>
-                <a:spcPct val="100000"/>
-              </a:lnSpc>
-            </a:pPr>
-            <a:r>
-              <a:rPr lang="en-US" sz="1400" spc="-1" dirty="0">
-                <a:solidFill>
-                  <a:schemeClr val="dk1"/>
-                </a:solidFill>
-                <a:latin typeface="Arial"/>
-                <a:ea typeface="Arial"/>
-              </a:rPr>
-              <a:t>* 3</a:t>
-            </a:r>
-            <a:endParaRPr lang="en-US" sz="1400" b="0" strike="noStrike" spc="-1" dirty="0">
-              <a:solidFill>
-                <a:srgbClr val="000000"/>
-              </a:solidFill>
-              <a:latin typeface="Arial"/>
-            </a:endParaRPr>
-          </a:p>
-        </p:txBody>
-      </p:sp>
-      <p:sp>
-        <p:nvSpPr>
-          <p:cNvPr id="3" name="矩形: 圓角 7">
-            <a:extLst>
-              <a:ext uri="{FF2B5EF4-FFF2-40B4-BE49-F238E27FC236}">
-                <a16:creationId xmlns:a16="http://schemas.microsoft.com/office/drawing/2014/main" id="{58ABF13A-CCD2-D424-D3C6-D8EB28F21782}"/>
-              </a:ext>
-            </a:extLst>
-          </p:cNvPr>
-          <p:cNvSpPr/>
-          <p:nvPr/>
-        </p:nvSpPr>
-        <p:spPr>
-          <a:xfrm>
-            <a:off x="2106330" y="4645529"/>
-            <a:ext cx="1209600" cy="1045080"/>
-          </a:xfrm>
-          <a:prstGeom prst="roundRect">
-            <a:avLst>
-              <a:gd name="adj" fmla="val 16667"/>
-            </a:avLst>
-          </a:prstGeom>
-          <a:solidFill>
-            <a:srgbClr val="FFC000"/>
-          </a:solidFill>
-          <a:ln>
-            <a:solidFill>
-              <a:srgbClr val="516263"/>
-            </a:solidFill>
-            <a:round/>
-          </a:ln>
-        </p:spPr>
-        <p:style>
-          <a:lnRef idx="2">
-            <a:schemeClr val="accent1">
-              <a:shade val="15000"/>
-            </a:schemeClr>
-          </a:lnRef>
-          <a:fillRef idx="1">
-            <a:schemeClr val="accent1"/>
-          </a:fillRef>
-          <a:effectRef idx="0">
-            <a:schemeClr val="accent1"/>
-          </a:effectRef>
-          <a:fontRef idx="minor"/>
-        </p:style>
-        <p:txBody>
-          <a:bodyPr lIns="90000" tIns="45000" rIns="90000" bIns="45000" anchor="ctr">
-            <a:noAutofit/>
-          </a:bodyPr>
-          <a:lstStyle/>
-          <a:p>
-            <a:pPr algn="ctr">
-              <a:lnSpc>
-                <a:spcPct val="100000"/>
-              </a:lnSpc>
-            </a:pPr>
-            <a:r>
-              <a:rPr lang="en-US" altLang="zh-TW" sz="1400" b="0" strike="noStrike" spc="-1" dirty="0">
-                <a:solidFill>
-                  <a:srgbClr val="000000"/>
-                </a:solidFill>
-                <a:latin typeface="Arial"/>
-              </a:rPr>
-              <a:t>RISC-V</a:t>
-            </a:r>
-          </a:p>
-          <a:p>
-            <a:pPr algn="ctr">
-              <a:lnSpc>
-                <a:spcPct val="100000"/>
-              </a:lnSpc>
-            </a:pPr>
-            <a:r>
-              <a:rPr lang="en-US" sz="1400" spc="-1" dirty="0">
-                <a:solidFill>
-                  <a:srgbClr val="000000"/>
-                </a:solidFill>
-                <a:latin typeface="Arial"/>
-              </a:rPr>
-              <a:t>Core</a:t>
-            </a:r>
-            <a:endParaRPr lang="en-US" sz="1400" b="0" strike="noStrike" spc="-1" dirty="0">
-              <a:solidFill>
-                <a:srgbClr val="000000"/>
-              </a:solidFill>
-              <a:latin typeface="Arial"/>
-            </a:endParaRPr>
-          </a:p>
-        </p:txBody>
-      </p:sp>
-      <p:sp>
-        <p:nvSpPr>
-          <p:cNvPr id="4" name="矩形: 圓角 7">
-            <a:extLst>
-              <a:ext uri="{FF2B5EF4-FFF2-40B4-BE49-F238E27FC236}">
-                <a16:creationId xmlns:a16="http://schemas.microsoft.com/office/drawing/2014/main" id="{DC49C466-9B15-BD2E-A60B-AEF68B7A6735}"/>
-              </a:ext>
-            </a:extLst>
-          </p:cNvPr>
-          <p:cNvSpPr/>
-          <p:nvPr/>
-        </p:nvSpPr>
-        <p:spPr>
-          <a:xfrm>
-            <a:off x="2106330" y="3032017"/>
-            <a:ext cx="1209600" cy="1045080"/>
-          </a:xfrm>
-          <a:prstGeom prst="roundRect">
-            <a:avLst>
-              <a:gd name="adj" fmla="val 16667"/>
-            </a:avLst>
-          </a:prstGeom>
-          <a:solidFill>
-            <a:srgbClr val="00B0F0"/>
-          </a:solidFill>
-          <a:ln>
-            <a:solidFill>
-              <a:srgbClr val="516263"/>
-            </a:solidFill>
-            <a:round/>
-          </a:ln>
-        </p:spPr>
-        <p:style>
-          <a:lnRef idx="2">
-            <a:schemeClr val="accent1">
-              <a:shade val="15000"/>
-            </a:schemeClr>
-          </a:lnRef>
-          <a:fillRef idx="1">
-            <a:schemeClr val="accent1"/>
-          </a:fillRef>
-          <a:effectRef idx="0">
-            <a:schemeClr val="accent1"/>
-          </a:effectRef>
-          <a:fontRef idx="minor"/>
-        </p:style>
-        <p:txBody>
-          <a:bodyPr lIns="90000" tIns="45000" rIns="90000" bIns="45000" anchor="ctr">
-            <a:noAutofit/>
-          </a:bodyPr>
-          <a:lstStyle/>
-          <a:p>
-            <a:pPr algn="ctr">
-              <a:lnSpc>
-                <a:spcPct val="100000"/>
-              </a:lnSpc>
-            </a:pPr>
-            <a:r>
-              <a:rPr lang="en-US" sz="1400" dirty="0"/>
-              <a:t>AXI</a:t>
-            </a:r>
-          </a:p>
-          <a:p>
-            <a:pPr algn="ctr">
-              <a:lnSpc>
-                <a:spcPct val="100000"/>
-              </a:lnSpc>
-            </a:pPr>
-            <a:r>
-              <a:rPr lang="en-US" sz="1400" dirty="0"/>
-              <a:t>Interrupt</a:t>
-            </a:r>
-          </a:p>
-          <a:p>
-            <a:pPr algn="ctr">
-              <a:lnSpc>
-                <a:spcPct val="100000"/>
-              </a:lnSpc>
-            </a:pPr>
-            <a:r>
-              <a:rPr lang="en-US" sz="1400" dirty="0"/>
-              <a:t>Controller</a:t>
-            </a:r>
-          </a:p>
-        </p:txBody>
-      </p:sp>
-      <p:sp>
-        <p:nvSpPr>
-          <p:cNvPr id="5" name="矩形: 圓角 7">
-            <a:extLst>
-              <a:ext uri="{FF2B5EF4-FFF2-40B4-BE49-F238E27FC236}">
-                <a16:creationId xmlns:a16="http://schemas.microsoft.com/office/drawing/2014/main" id="{93C6A273-8627-1E4D-2293-EF6BA6132E76}"/>
-              </a:ext>
-            </a:extLst>
-          </p:cNvPr>
-          <p:cNvSpPr/>
-          <p:nvPr/>
-        </p:nvSpPr>
-        <p:spPr>
-          <a:xfrm>
-            <a:off x="3849345" y="3052401"/>
-            <a:ext cx="1209600" cy="1045080"/>
-          </a:xfrm>
-          <a:prstGeom prst="roundRect">
-            <a:avLst>
-              <a:gd name="adj" fmla="val 16667"/>
-            </a:avLst>
-          </a:prstGeom>
-          <a:solidFill>
-            <a:schemeClr val="bg2">
-              <a:lumMod val="60000"/>
-              <a:lumOff val="40000"/>
-            </a:schemeClr>
-          </a:solidFill>
-          <a:ln>
-            <a:solidFill>
-              <a:srgbClr val="516263"/>
-            </a:solidFill>
-            <a:round/>
-          </a:ln>
-        </p:spPr>
-        <p:style>
-          <a:lnRef idx="2">
-            <a:schemeClr val="accent1">
-              <a:shade val="15000"/>
-            </a:schemeClr>
-          </a:lnRef>
-          <a:fillRef idx="1">
-            <a:schemeClr val="accent1"/>
-          </a:fillRef>
-          <a:effectRef idx="0">
-            <a:schemeClr val="accent1"/>
-          </a:effectRef>
-          <a:fontRef idx="minor"/>
-        </p:style>
-        <p:txBody>
-          <a:bodyPr lIns="90000" tIns="45000" rIns="90000" bIns="45000" anchor="ctr">
-            <a:noAutofit/>
-          </a:bodyPr>
-          <a:lstStyle/>
-          <a:p>
-            <a:pPr algn="ctr">
-              <a:lnSpc>
-                <a:spcPct val="100000"/>
-              </a:lnSpc>
-            </a:pPr>
-            <a:r>
-              <a:rPr lang="en-US" sz="1400" b="0" strike="noStrike" spc="-1" dirty="0" err="1">
-                <a:solidFill>
-                  <a:srgbClr val="000000"/>
-                </a:solidFill>
-                <a:latin typeface="Arial"/>
-              </a:rPr>
-              <a:t>Concat</a:t>
-            </a:r>
-            <a:endParaRPr lang="en-US" sz="1400" b="0" strike="noStrike" spc="-1" dirty="0">
-              <a:solidFill>
-                <a:srgbClr val="000000"/>
-              </a:solidFill>
-              <a:latin typeface="Arial"/>
-            </a:endParaRPr>
-          </a:p>
-        </p:txBody>
-      </p:sp>
-      <p:sp>
-        <p:nvSpPr>
-          <p:cNvPr id="6" name="矩形: 圓角 7">
-            <a:extLst>
-              <a:ext uri="{FF2B5EF4-FFF2-40B4-BE49-F238E27FC236}">
-                <a16:creationId xmlns:a16="http://schemas.microsoft.com/office/drawing/2014/main" id="{1E73104D-EEF2-26D4-2B6C-D55956201067}"/>
-              </a:ext>
-            </a:extLst>
-          </p:cNvPr>
-          <p:cNvSpPr/>
-          <p:nvPr/>
-        </p:nvSpPr>
-        <p:spPr>
-          <a:xfrm>
-            <a:off x="5943600" y="2289067"/>
-            <a:ext cx="1209600" cy="1045080"/>
-          </a:xfrm>
-          <a:prstGeom prst="roundRect">
-            <a:avLst>
-              <a:gd name="adj" fmla="val 16667"/>
-            </a:avLst>
-          </a:prstGeom>
-          <a:solidFill>
-            <a:srgbClr val="BBE0E3"/>
-          </a:solidFill>
-          <a:ln>
-            <a:solidFill>
-              <a:srgbClr val="516263"/>
-            </a:solidFill>
-            <a:round/>
-          </a:ln>
-        </p:spPr>
-        <p:style>
-          <a:lnRef idx="2">
-            <a:schemeClr val="accent1">
-              <a:shade val="15000"/>
-            </a:schemeClr>
-          </a:lnRef>
-          <a:fillRef idx="1">
-            <a:schemeClr val="accent1"/>
-          </a:fillRef>
-          <a:effectRef idx="0">
-            <a:schemeClr val="accent1"/>
-          </a:effectRef>
-          <a:fontRef idx="minor"/>
-        </p:style>
-        <p:txBody>
-          <a:bodyPr lIns="90000" tIns="45000" rIns="90000" bIns="45000" anchor="ctr">
-            <a:noAutofit/>
-          </a:bodyPr>
-          <a:lstStyle/>
-          <a:p>
-            <a:pPr algn="ctr">
-              <a:lnSpc>
-                <a:spcPct val="100000"/>
-              </a:lnSpc>
-            </a:pPr>
-            <a:r>
-              <a:rPr lang="en-US" sz="1400" b="0" strike="noStrike" spc="-1" dirty="0">
-                <a:solidFill>
-                  <a:schemeClr val="dk1"/>
-                </a:solidFill>
-                <a:latin typeface="Arial"/>
-                <a:ea typeface="Arial"/>
-              </a:rPr>
-              <a:t>AXI Timer </a:t>
-            </a:r>
-          </a:p>
-          <a:p>
-            <a:pPr algn="ctr">
-              <a:lnSpc>
-                <a:spcPct val="100000"/>
-              </a:lnSpc>
-            </a:pPr>
-            <a:r>
-              <a:rPr lang="en-US" sz="1400" spc="-1" dirty="0">
-                <a:solidFill>
-                  <a:schemeClr val="dk1"/>
-                </a:solidFill>
-                <a:latin typeface="Arial"/>
-                <a:ea typeface="Arial"/>
-              </a:rPr>
-              <a:t>* 3</a:t>
-            </a:r>
-            <a:endParaRPr lang="en-US" sz="1400" b="0" strike="noStrike" spc="-1" dirty="0">
-              <a:solidFill>
-                <a:srgbClr val="000000"/>
-              </a:solidFill>
-              <a:latin typeface="Arial"/>
-            </a:endParaRPr>
-          </a:p>
-        </p:txBody>
-      </p:sp>
-      <p:sp>
-        <p:nvSpPr>
-          <p:cNvPr id="7" name="矩形: 圓角 7">
-            <a:extLst>
-              <a:ext uri="{FF2B5EF4-FFF2-40B4-BE49-F238E27FC236}">
-                <a16:creationId xmlns:a16="http://schemas.microsoft.com/office/drawing/2014/main" id="{153FC0DA-5B07-0426-F54E-004AA6D6AFF6}"/>
-              </a:ext>
-            </a:extLst>
-          </p:cNvPr>
-          <p:cNvSpPr/>
-          <p:nvPr/>
-        </p:nvSpPr>
-        <p:spPr>
-          <a:xfrm>
-            <a:off x="6096000" y="2441467"/>
-            <a:ext cx="1209600" cy="1045080"/>
-          </a:xfrm>
-          <a:prstGeom prst="roundRect">
-            <a:avLst>
-              <a:gd name="adj" fmla="val 16667"/>
-            </a:avLst>
-          </a:prstGeom>
-          <a:solidFill>
-            <a:srgbClr val="BBE0E3"/>
-          </a:solidFill>
-          <a:ln>
-            <a:solidFill>
-              <a:srgbClr val="516263"/>
-            </a:solidFill>
-            <a:round/>
-          </a:ln>
-        </p:spPr>
-        <p:style>
-          <a:lnRef idx="2">
-            <a:schemeClr val="accent1">
-              <a:shade val="15000"/>
-            </a:schemeClr>
-          </a:lnRef>
-          <a:fillRef idx="1">
-            <a:schemeClr val="accent1"/>
-          </a:fillRef>
-          <a:effectRef idx="0">
-            <a:schemeClr val="accent1"/>
-          </a:effectRef>
-          <a:fontRef idx="minor"/>
-        </p:style>
-        <p:txBody>
-          <a:bodyPr lIns="90000" tIns="45000" rIns="90000" bIns="45000" anchor="ctr">
-            <a:noAutofit/>
-          </a:bodyPr>
-          <a:lstStyle/>
-          <a:p>
-            <a:pPr algn="ctr">
-              <a:lnSpc>
-                <a:spcPct val="100000"/>
-              </a:lnSpc>
-            </a:pPr>
-            <a:r>
-              <a:rPr lang="en-US" sz="1400" b="0" strike="noStrike" spc="-1" dirty="0">
-                <a:solidFill>
-                  <a:schemeClr val="dk1"/>
-                </a:solidFill>
-                <a:latin typeface="Arial"/>
-                <a:ea typeface="Arial"/>
-              </a:rPr>
-              <a:t>AXI Timer </a:t>
-            </a:r>
-          </a:p>
-          <a:p>
-            <a:pPr algn="ctr">
-              <a:lnSpc>
-                <a:spcPct val="100000"/>
-              </a:lnSpc>
-            </a:pPr>
-            <a:r>
-              <a:rPr lang="en-US" sz="1400" spc="-1" dirty="0">
-                <a:solidFill>
-                  <a:schemeClr val="dk1"/>
-                </a:solidFill>
-                <a:latin typeface="Arial"/>
-                <a:ea typeface="Arial"/>
-              </a:rPr>
-              <a:t>* 3</a:t>
-            </a:r>
-            <a:endParaRPr lang="en-US" sz="1400" b="0" strike="noStrike" spc="-1" dirty="0">
-              <a:solidFill>
-                <a:srgbClr val="000000"/>
-              </a:solidFill>
-              <a:latin typeface="Arial"/>
-            </a:endParaRPr>
-          </a:p>
-        </p:txBody>
-      </p:sp>
-      <p:sp>
-        <p:nvSpPr>
-          <p:cNvPr id="9" name="矩形: 圓角 7">
-            <a:extLst>
-              <a:ext uri="{FF2B5EF4-FFF2-40B4-BE49-F238E27FC236}">
-                <a16:creationId xmlns:a16="http://schemas.microsoft.com/office/drawing/2014/main" id="{18FE6573-EA8D-F960-A986-B9066BF4F20A}"/>
-              </a:ext>
-            </a:extLst>
-          </p:cNvPr>
-          <p:cNvSpPr/>
-          <p:nvPr/>
-        </p:nvSpPr>
-        <p:spPr>
-          <a:xfrm>
-            <a:off x="5791200" y="3818189"/>
-            <a:ext cx="1209600" cy="1045080"/>
-          </a:xfrm>
-          <a:prstGeom prst="roundRect">
-            <a:avLst>
-              <a:gd name="adj" fmla="val 16667"/>
-            </a:avLst>
-          </a:prstGeom>
-          <a:solidFill>
-            <a:schemeClr val="accent2">
-              <a:lumMod val="40000"/>
-              <a:lumOff val="60000"/>
-            </a:schemeClr>
-          </a:solidFill>
-          <a:ln>
-            <a:solidFill>
-              <a:srgbClr val="516263"/>
-            </a:solidFill>
-            <a:round/>
-          </a:ln>
-        </p:spPr>
-        <p:style>
-          <a:lnRef idx="2">
-            <a:schemeClr val="accent1">
-              <a:shade val="15000"/>
-            </a:schemeClr>
-          </a:lnRef>
-          <a:fillRef idx="1">
-            <a:schemeClr val="accent1"/>
-          </a:fillRef>
-          <a:effectRef idx="0">
-            <a:schemeClr val="accent1"/>
-          </a:effectRef>
-          <a:fontRef idx="minor"/>
-        </p:style>
-        <p:txBody>
-          <a:bodyPr lIns="90000" tIns="45000" rIns="90000" bIns="45000" anchor="ctr">
-            <a:noAutofit/>
-          </a:bodyPr>
-          <a:lstStyle/>
-          <a:p>
-            <a:pPr algn="ctr">
-              <a:lnSpc>
-                <a:spcPct val="100000"/>
-              </a:lnSpc>
-            </a:pPr>
-            <a:r>
-              <a:rPr lang="en-US" sz="1400" b="0" strike="noStrike" spc="-1" dirty="0">
-                <a:solidFill>
-                  <a:schemeClr val="dk1"/>
-                </a:solidFill>
-                <a:latin typeface="Arial"/>
-                <a:ea typeface="Arial"/>
-              </a:rPr>
-              <a:t>AXI </a:t>
-            </a:r>
-            <a:r>
-              <a:rPr lang="en-US" sz="1400" spc="-1" dirty="0">
-                <a:solidFill>
-                  <a:schemeClr val="dk1"/>
-                </a:solidFill>
-                <a:latin typeface="Arial"/>
-                <a:ea typeface="Arial"/>
-              </a:rPr>
-              <a:t>GPIO</a:t>
-            </a:r>
-            <a:r>
-              <a:rPr lang="en-US" sz="1400" b="0" strike="noStrike" spc="-1" dirty="0">
-                <a:solidFill>
-                  <a:schemeClr val="dk1"/>
-                </a:solidFill>
-                <a:latin typeface="Arial"/>
-                <a:ea typeface="Arial"/>
-              </a:rPr>
-              <a:t> </a:t>
-            </a:r>
-          </a:p>
-          <a:p>
-            <a:pPr algn="ctr">
-              <a:lnSpc>
-                <a:spcPct val="100000"/>
-              </a:lnSpc>
-            </a:pPr>
-            <a:r>
-              <a:rPr lang="en-US" sz="1400" spc="-1" dirty="0">
-                <a:solidFill>
-                  <a:schemeClr val="dk1"/>
-                </a:solidFill>
-                <a:latin typeface="Arial"/>
-              </a:rPr>
-              <a:t>w intr * 3</a:t>
-            </a:r>
-            <a:endParaRPr lang="en-US" sz="1400" b="0" strike="noStrike" spc="-1" dirty="0">
-              <a:solidFill>
-                <a:srgbClr val="000000"/>
-              </a:solidFill>
-              <a:latin typeface="Arial"/>
-            </a:endParaRPr>
-          </a:p>
-        </p:txBody>
-      </p:sp>
-      <p:sp>
-        <p:nvSpPr>
-          <p:cNvPr id="10" name="矩形: 圓角 7">
-            <a:extLst>
-              <a:ext uri="{FF2B5EF4-FFF2-40B4-BE49-F238E27FC236}">
-                <a16:creationId xmlns:a16="http://schemas.microsoft.com/office/drawing/2014/main" id="{5EB6055E-6116-3724-89E5-429E45C5B49E}"/>
-              </a:ext>
-            </a:extLst>
-          </p:cNvPr>
-          <p:cNvSpPr/>
-          <p:nvPr/>
-        </p:nvSpPr>
-        <p:spPr>
-          <a:xfrm>
-            <a:off x="5943600" y="3970589"/>
-            <a:ext cx="1209600" cy="1045080"/>
-          </a:xfrm>
-          <a:prstGeom prst="roundRect">
-            <a:avLst>
-              <a:gd name="adj" fmla="val 16667"/>
-            </a:avLst>
-          </a:prstGeom>
-          <a:solidFill>
-            <a:schemeClr val="accent2">
-              <a:lumMod val="40000"/>
-              <a:lumOff val="60000"/>
-            </a:schemeClr>
-          </a:solidFill>
-          <a:ln>
-            <a:solidFill>
-              <a:srgbClr val="516263"/>
-            </a:solidFill>
-            <a:round/>
-          </a:ln>
-        </p:spPr>
-        <p:style>
-          <a:lnRef idx="2">
-            <a:schemeClr val="accent1">
-              <a:shade val="15000"/>
-            </a:schemeClr>
-          </a:lnRef>
-          <a:fillRef idx="1">
-            <a:schemeClr val="accent1"/>
-          </a:fillRef>
-          <a:effectRef idx="0">
-            <a:schemeClr val="accent1"/>
-          </a:effectRef>
-          <a:fontRef idx="minor"/>
-        </p:style>
-        <p:txBody>
-          <a:bodyPr lIns="90000" tIns="45000" rIns="90000" bIns="45000" anchor="ctr">
-            <a:noAutofit/>
-          </a:bodyPr>
-          <a:lstStyle/>
-          <a:p>
-            <a:pPr algn="ctr">
-              <a:lnSpc>
-                <a:spcPct val="100000"/>
-              </a:lnSpc>
-            </a:pPr>
-            <a:r>
-              <a:rPr lang="en-US" sz="1400" b="0" strike="noStrike" spc="-1" dirty="0">
-                <a:solidFill>
-                  <a:schemeClr val="dk1"/>
-                </a:solidFill>
-                <a:latin typeface="Arial"/>
-                <a:ea typeface="Arial"/>
-              </a:rPr>
-              <a:t>AXI </a:t>
-            </a:r>
-            <a:r>
-              <a:rPr lang="en-US" sz="1400" spc="-1" dirty="0">
-                <a:solidFill>
-                  <a:schemeClr val="dk1"/>
-                </a:solidFill>
-                <a:latin typeface="Arial"/>
-                <a:ea typeface="Arial"/>
-              </a:rPr>
-              <a:t>GPIO</a:t>
-            </a:r>
-            <a:r>
-              <a:rPr lang="en-US" sz="1400" b="0" strike="noStrike" spc="-1" dirty="0">
-                <a:solidFill>
-                  <a:schemeClr val="dk1"/>
-                </a:solidFill>
-                <a:latin typeface="Arial"/>
-                <a:ea typeface="Arial"/>
-              </a:rPr>
-              <a:t> </a:t>
-            </a:r>
-          </a:p>
-          <a:p>
-            <a:pPr algn="ctr">
-              <a:lnSpc>
-                <a:spcPct val="100000"/>
-              </a:lnSpc>
-            </a:pPr>
-            <a:r>
-              <a:rPr lang="en-US" sz="1400" spc="-1" dirty="0">
-                <a:solidFill>
-                  <a:schemeClr val="dk1"/>
-                </a:solidFill>
-                <a:latin typeface="Arial"/>
-              </a:rPr>
-              <a:t>w intr * 3</a:t>
-            </a:r>
-            <a:endParaRPr lang="en-US" sz="1400" b="0" strike="noStrike" spc="-1" dirty="0">
-              <a:solidFill>
-                <a:srgbClr val="000000"/>
-              </a:solidFill>
-              <a:latin typeface="Arial"/>
-            </a:endParaRPr>
-          </a:p>
-        </p:txBody>
-      </p:sp>
-      <p:sp>
-        <p:nvSpPr>
-          <p:cNvPr id="11" name="矩形: 圓角 7">
-            <a:extLst>
-              <a:ext uri="{FF2B5EF4-FFF2-40B4-BE49-F238E27FC236}">
-                <a16:creationId xmlns:a16="http://schemas.microsoft.com/office/drawing/2014/main" id="{625EDE8F-67E3-1851-45C2-D14B40A0779A}"/>
-              </a:ext>
-            </a:extLst>
-          </p:cNvPr>
-          <p:cNvSpPr/>
-          <p:nvPr/>
-        </p:nvSpPr>
-        <p:spPr>
-          <a:xfrm>
-            <a:off x="6096000" y="4122989"/>
-            <a:ext cx="1209600" cy="1045080"/>
-          </a:xfrm>
-          <a:prstGeom prst="roundRect">
-            <a:avLst>
-              <a:gd name="adj" fmla="val 16667"/>
-            </a:avLst>
-          </a:prstGeom>
-          <a:solidFill>
-            <a:schemeClr val="accent2">
-              <a:lumMod val="40000"/>
-              <a:lumOff val="60000"/>
-            </a:schemeClr>
-          </a:solidFill>
-          <a:ln>
-            <a:solidFill>
-              <a:srgbClr val="516263"/>
-            </a:solidFill>
-            <a:round/>
-          </a:ln>
-        </p:spPr>
-        <p:style>
-          <a:lnRef idx="2">
-            <a:schemeClr val="accent1">
-              <a:shade val="15000"/>
-            </a:schemeClr>
-          </a:lnRef>
-          <a:fillRef idx="1">
-            <a:schemeClr val="accent1"/>
-          </a:fillRef>
-          <a:effectRef idx="0">
-            <a:schemeClr val="accent1"/>
-          </a:effectRef>
-          <a:fontRef idx="minor"/>
-        </p:style>
-        <p:txBody>
-          <a:bodyPr lIns="90000" tIns="45000" rIns="90000" bIns="45000" anchor="ctr">
-            <a:noAutofit/>
-          </a:bodyPr>
-          <a:lstStyle/>
-          <a:p>
-            <a:pPr algn="ctr">
-              <a:lnSpc>
-                <a:spcPct val="100000"/>
-              </a:lnSpc>
-            </a:pPr>
-            <a:r>
-              <a:rPr lang="en-US" sz="1400" b="0" strike="noStrike" spc="-1" dirty="0">
-                <a:solidFill>
-                  <a:schemeClr val="dk1"/>
-                </a:solidFill>
-                <a:latin typeface="Arial"/>
-                <a:ea typeface="Arial"/>
-              </a:rPr>
-              <a:t>AXI </a:t>
-            </a:r>
-            <a:r>
-              <a:rPr lang="en-US" sz="1400" spc="-1" dirty="0">
-                <a:solidFill>
-                  <a:schemeClr val="dk1"/>
-                </a:solidFill>
-                <a:latin typeface="Arial"/>
-                <a:ea typeface="Arial"/>
-              </a:rPr>
-              <a:t>GPIO</a:t>
-            </a:r>
-            <a:r>
-              <a:rPr lang="en-US" sz="1400" b="0" strike="noStrike" spc="-1" dirty="0">
-                <a:solidFill>
-                  <a:schemeClr val="dk1"/>
-                </a:solidFill>
-                <a:latin typeface="Arial"/>
-                <a:ea typeface="Arial"/>
-              </a:rPr>
-              <a:t> </a:t>
-            </a:r>
-          </a:p>
-          <a:p>
-            <a:pPr algn="ctr">
-              <a:lnSpc>
-                <a:spcPct val="100000"/>
-              </a:lnSpc>
-            </a:pPr>
-            <a:r>
-              <a:rPr lang="en-US" sz="1400" spc="-1" dirty="0">
-                <a:solidFill>
-                  <a:schemeClr val="dk1"/>
-                </a:solidFill>
-                <a:latin typeface="Arial"/>
-              </a:rPr>
-              <a:t>w intr * 3</a:t>
-            </a:r>
-            <a:endParaRPr lang="en-US" sz="1400" b="0" strike="noStrike" spc="-1" dirty="0">
-              <a:solidFill>
-                <a:srgbClr val="000000"/>
-              </a:solidFill>
-              <a:latin typeface="Arial"/>
-            </a:endParaRPr>
-          </a:p>
-        </p:txBody>
-      </p:sp>
-      <p:sp>
-        <p:nvSpPr>
-          <p:cNvPr id="13" name="箭號: 上-下雙向 12">
-            <a:extLst>
-              <a:ext uri="{FF2B5EF4-FFF2-40B4-BE49-F238E27FC236}">
-                <a16:creationId xmlns:a16="http://schemas.microsoft.com/office/drawing/2014/main" id="{FCA1D84B-15CB-C04D-AD93-E9EABAA12CB3}"/>
-              </a:ext>
-            </a:extLst>
-          </p:cNvPr>
-          <p:cNvSpPr/>
-          <p:nvPr/>
-        </p:nvSpPr>
-        <p:spPr>
-          <a:xfrm rot="16200000">
-            <a:off x="1252800" y="3123531"/>
-            <a:ext cx="429062" cy="902821"/>
-          </a:xfrm>
-          <a:prstGeom prst="upDownArrow">
-            <a:avLst/>
-          </a:prstGeom>
-          <a:solidFill>
-            <a:schemeClr val="tx1"/>
-          </a:solidFill>
-        </p:spPr>
-        <p:style>
-          <a:lnRef idx="2">
-            <a:schemeClr val="accent1">
-              <a:shade val="15000"/>
-            </a:schemeClr>
-          </a:lnRef>
-          <a:fillRef idx="1">
-            <a:schemeClr val="accent1"/>
-          </a:fillRef>
-          <a:effectRef idx="0">
-            <a:schemeClr val="accent1"/>
-          </a:effectRef>
-          <a:fontRef idx="minor">
-            <a:schemeClr val="lt1"/>
-          </a:fontRef>
-        </p:style>
-        <p:txBody>
-          <a:bodyPr rtlCol="0" anchor="ctr"/>
-          <a:lstStyle/>
-          <a:p>
-            <a:pPr algn="ctr"/>
-            <a:endParaRPr lang="en-US"/>
-          </a:p>
-        </p:txBody>
-      </p:sp>
-      <p:sp>
-        <p:nvSpPr>
-          <p:cNvPr id="14" name="箭號: 上-下雙向 13">
-            <a:extLst>
-              <a:ext uri="{FF2B5EF4-FFF2-40B4-BE49-F238E27FC236}">
-                <a16:creationId xmlns:a16="http://schemas.microsoft.com/office/drawing/2014/main" id="{B8A6189B-F9D6-6742-F4EB-5E71507E3C20}"/>
-              </a:ext>
-            </a:extLst>
-          </p:cNvPr>
-          <p:cNvSpPr/>
-          <p:nvPr/>
-        </p:nvSpPr>
-        <p:spPr>
-          <a:xfrm rot="16200000">
-            <a:off x="1252801" y="4716659"/>
-            <a:ext cx="429062" cy="902821"/>
-          </a:xfrm>
-          <a:prstGeom prst="upDownArrow">
-            <a:avLst/>
-          </a:prstGeom>
-          <a:solidFill>
-            <a:schemeClr val="tx1"/>
-          </a:solidFill>
-        </p:spPr>
-        <p:style>
-          <a:lnRef idx="2">
-            <a:schemeClr val="accent1">
-              <a:shade val="15000"/>
-            </a:schemeClr>
-          </a:lnRef>
-          <a:fillRef idx="1">
-            <a:schemeClr val="accent1"/>
-          </a:fillRef>
-          <a:effectRef idx="0">
-            <a:schemeClr val="accent1"/>
-          </a:effectRef>
-          <a:fontRef idx="minor">
-            <a:schemeClr val="lt1"/>
-          </a:fontRef>
-        </p:style>
-        <p:txBody>
-          <a:bodyPr rtlCol="0" anchor="ctr"/>
-          <a:lstStyle/>
-          <a:p>
-            <a:pPr algn="ctr"/>
-            <a:endParaRPr lang="en-US"/>
           </a:p>
         </p:txBody>
       </p:sp>

--- a/Intro/RISCV-MCU.pptx
+++ b/Intro/RISCV-MCU.pptx
@@ -11094,8 +11094,8 @@
           </a:p>
         </p:txBody>
       </p:sp>
-      <mc:AlternateContent xmlns:mc="http://schemas.openxmlformats.org/markup-compatibility/2006">
-        <mc:Choice xmlns:a14="http://schemas.microsoft.com/office/drawing/2010/main" Requires="a14">
+      <mc:AlternateContent xmlns:mc="http://schemas.openxmlformats.org/markup-compatibility/2006" xmlns:a14="http://schemas.microsoft.com/office/drawing/2010/main">
+        <mc:Choice Requires="a14">
           <p:sp>
             <p:nvSpPr>
               <p:cNvPr id="20" name="文字方塊 19">
@@ -11185,7 +11185,7 @@
             </p:txBody>
           </p:sp>
         </mc:Choice>
-        <mc:Fallback>
+        <mc:Fallback xmlns="">
           <p:sp>
             <p:nvSpPr>
               <p:cNvPr id="20" name="文字方塊 19">
@@ -17884,7 +17884,7 @@
         </p:nvSpPr>
         <p:spPr>
           <a:xfrm>
-            <a:off x="7218004" y="2742561"/>
+            <a:off x="6096000" y="2725266"/>
             <a:ext cx="3492360" cy="811800"/>
           </a:xfrm>
           <a:prstGeom prst="roundRect">
@@ -18122,7 +18122,7 @@
         </p:nvCxnSpPr>
         <p:spPr>
           <a:xfrm flipV="1">
-            <a:off x="7473644" y="2460303"/>
+            <a:off x="6351640" y="2443008"/>
             <a:ext cx="0" cy="285835"/>
           </a:xfrm>
           <a:prstGeom prst="straightConnector1">
@@ -18146,7 +18146,7 @@
         </p:nvCxnSpPr>
         <p:spPr>
           <a:xfrm flipV="1">
-            <a:off x="8954875" y="2460303"/>
+            <a:off x="7832871" y="2443008"/>
             <a:ext cx="0" cy="282258"/>
           </a:xfrm>
           <a:prstGeom prst="straightConnector1">
@@ -18292,7 +18292,7 @@
         </p:nvSpPr>
         <p:spPr>
           <a:xfrm>
-            <a:off x="8801411" y="3660561"/>
+            <a:off x="7679407" y="3643266"/>
             <a:ext cx="249120" cy="479520"/>
           </a:xfrm>
           <a:prstGeom prst="downArrow">
@@ -18354,7 +18354,7 @@
         </p:nvSpPr>
         <p:spPr>
           <a:xfrm>
-            <a:off x="6781336" y="1557981"/>
+            <a:off x="5659332" y="1540686"/>
             <a:ext cx="1373040" cy="943560"/>
           </a:xfrm>
           <a:prstGeom prst="rect">
@@ -18908,7 +18908,30 @@
                 <a:latin typeface="Arial"/>
                 <a:ea typeface="Arial"/>
               </a:rPr>
-              <a:t>Data Mem</a:t>
+              <a:t>Data Mem /</a:t>
+            </a:r>
+            <a:endParaRPr lang="en-US" sz="1400" spc="-1" dirty="0">
+              <a:solidFill>
+                <a:schemeClr val="dk1"/>
+              </a:solidFill>
+              <a:latin typeface="Arial"/>
+              <a:ea typeface="Arial"/>
+            </a:endParaRPr>
+          </a:p>
+          <a:p>
+            <a:pPr algn="ctr">
+              <a:lnSpc>
+                <a:spcPct val="100000"/>
+              </a:lnSpc>
+            </a:pPr>
+            <a:r>
+              <a:rPr lang="en-US" sz="1400" b="0" strike="noStrike" spc="-1" dirty="0">
+                <a:solidFill>
+                  <a:schemeClr val="dk1"/>
+                </a:solidFill>
+                <a:latin typeface="Arial"/>
+              </a:rPr>
+              <a:t>Inst Mem /</a:t>
             </a:r>
             <a:endParaRPr lang="en-US" sz="1400" b="0" strike="noStrike" spc="-1" dirty="0">
               <a:solidFill>
@@ -18931,7 +18954,7 @@
                 <a:latin typeface="Arial"/>
                 <a:ea typeface="Arial"/>
               </a:rPr>
-              <a:t>128KB</a:t>
+              <a:t>Shared 128KB</a:t>
             </a:r>
             <a:endParaRPr lang="en-US" sz="1400" b="0" strike="noStrike" spc="-1" dirty="0">
               <a:solidFill>
@@ -18942,126 +18965,6 @@
           </a:p>
         </p:txBody>
       </p:sp>
-      <p:sp>
-        <p:nvSpPr>
-          <p:cNvPr id="92" name="矩形: 圓角 45"/>
-          <p:cNvSpPr/>
-          <p:nvPr/>
-        </p:nvSpPr>
-        <p:spPr>
-          <a:xfrm>
-            <a:off x="5013724" y="1622241"/>
-            <a:ext cx="1518840" cy="815040"/>
-          </a:xfrm>
-          <a:prstGeom prst="roundRect">
-            <a:avLst>
-              <a:gd name="adj" fmla="val 16667"/>
-            </a:avLst>
-          </a:prstGeom>
-          <a:solidFill>
-            <a:srgbClr val="FFC000"/>
-          </a:solidFill>
-          <a:ln>
-            <a:solidFill>
-              <a:srgbClr val="000000"/>
-            </a:solidFill>
-            <a:round/>
-          </a:ln>
-        </p:spPr>
-        <p:style>
-          <a:lnRef idx="2">
-            <a:schemeClr val="dk1">
-              <a:shade val="15000"/>
-            </a:schemeClr>
-          </a:lnRef>
-          <a:fillRef idx="1">
-            <a:schemeClr val="dk1"/>
-          </a:fillRef>
-          <a:effectRef idx="0">
-            <a:schemeClr val="dk1"/>
-          </a:effectRef>
-          <a:fontRef idx="minor"/>
-        </p:style>
-        <p:txBody>
-          <a:bodyPr lIns="90000" tIns="45000" rIns="90000" bIns="45000" anchor="ctr">
-            <a:noAutofit/>
-          </a:bodyPr>
-          <a:lstStyle/>
-          <a:p>
-            <a:pPr algn="ctr">
-              <a:lnSpc>
-                <a:spcPct val="100000"/>
-              </a:lnSpc>
-            </a:pPr>
-            <a:r>
-              <a:rPr lang="en-US" sz="1400" b="0" strike="noStrike" spc="-1">
-                <a:solidFill>
-                  <a:schemeClr val="dk1"/>
-                </a:solidFill>
-                <a:latin typeface="Arial"/>
-                <a:ea typeface="Arial"/>
-              </a:rPr>
-              <a:t>Inst MEM</a:t>
-            </a:r>
-            <a:endParaRPr lang="en-US" sz="1400" b="0" strike="noStrike" spc="-1">
-              <a:solidFill>
-                <a:srgbClr val="000000"/>
-              </a:solidFill>
-              <a:latin typeface="Arial"/>
-            </a:endParaRPr>
-          </a:p>
-          <a:p>
-            <a:pPr algn="ctr">
-              <a:lnSpc>
-                <a:spcPct val="100000"/>
-              </a:lnSpc>
-            </a:pPr>
-            <a:r>
-              <a:rPr lang="en-US" sz="1400" b="0" strike="noStrike" spc="-1">
-                <a:solidFill>
-                  <a:schemeClr val="dk1"/>
-                </a:solidFill>
-                <a:latin typeface="Arial"/>
-                <a:ea typeface="Arial"/>
-              </a:rPr>
-              <a:t>64KB</a:t>
-            </a:r>
-            <a:endParaRPr lang="en-US" sz="1400" b="0" strike="noStrike" spc="-1">
-              <a:solidFill>
-                <a:srgbClr val="000000"/>
-              </a:solidFill>
-              <a:latin typeface="Arial"/>
-            </a:endParaRPr>
-          </a:p>
-        </p:txBody>
-      </p:sp>
-      <p:cxnSp>
-        <p:nvCxnSpPr>
-          <p:cNvPr id="93" name="直線單箭頭接點 48"/>
-          <p:cNvCxnSpPr>
-            <a:stCxn id="92" idx="1"/>
-            <a:endCxn id="89" idx="3"/>
-          </p:cNvCxnSpPr>
-          <p:nvPr/>
-        </p:nvCxnSpPr>
-        <p:spPr>
-          <a:xfrm flipH="1">
-            <a:off x="4678564" y="2029761"/>
-            <a:ext cx="335520" cy="360"/>
-          </a:xfrm>
-          <a:prstGeom prst="straightConnector1">
-            <a:avLst/>
-          </a:prstGeom>
-          <a:ln w="28575">
-            <a:solidFill>
-              <a:srgbClr val="000000"/>
-            </a:solidFill>
-            <a:round/>
-            <a:headEnd type="arrow" w="med" len="med"/>
-            <a:tailEnd type="arrow" w="med" len="med"/>
-          </a:ln>
-        </p:spPr>
-      </p:cxnSp>
       <p:cxnSp>
         <p:nvCxnSpPr>
           <p:cNvPr id="94" name="直線單箭頭接點 51"/>
@@ -19103,7 +19006,7 @@
         </p:nvSpPr>
         <p:spPr>
           <a:xfrm>
-            <a:off x="7789374" y="1557633"/>
+            <a:off x="6667370" y="1540338"/>
             <a:ext cx="2331002" cy="1168097"/>
           </a:xfrm>
           <a:prstGeom prst="rect">
@@ -19251,7 +19154,7 @@
         </p:nvCxnSpPr>
         <p:spPr>
           <a:xfrm flipV="1">
-            <a:off x="10599357" y="2510286"/>
+            <a:off x="9477353" y="2492991"/>
             <a:ext cx="0" cy="231800"/>
           </a:xfrm>
           <a:prstGeom prst="straightConnector1">
@@ -19279,7 +19182,7 @@
         </p:nvSpPr>
         <p:spPr>
           <a:xfrm>
-            <a:off x="9912837" y="1557633"/>
+            <a:off x="8790833" y="1540338"/>
             <a:ext cx="1373040" cy="952653"/>
           </a:xfrm>
           <a:prstGeom prst="rect">
